--- a/docs/pptx/carbo/jx-carbo-linsubhr-sens-sideeffect.pptx
+++ b/docs/pptx/carbo/jx-carbo-linsubhr-sens-sideeffect.pptx
@@ -5339,7 +5339,7 @@
           <p:spPr>
             <a:xfrm>
               <a:off x="817517" y="1896563"/>
-              <a:ext cx="6169365" cy="82021"/>
+              <a:ext cx="6833128" cy="82021"/>
             </a:xfrm>
             <a:prstGeom prst="rect">
               <a:avLst/>
@@ -5371,7 +5371,7 @@
                   <a:latin typeface="Helvetica"/>
                   <a:cs typeface="Helvetica"/>
                 </a:rPr>
-                <a:t>subHR per 0.1 ratio decline: 1.26 (1.09-1.45), p = 0.002  |  per IQR decline (Δ = 0.28): 1.89 (1.27-2.83)  |  IQR: [0.70, 0.98]</a:t>
+                <a:t>subHR per 0.1 ratio decline: 1.26 (1.09-1.45), p_Bonf = 0.011 (n = 6)  |  per IQR decline (Δ = 0.28): 1.89 (1.27-2.83)  |  IQR: [0.70, 0.98]</a:t>
               </a:r>
             </a:p>
           </p:txBody>

--- a/docs/pptx/carbo/jx-carbo-linsubhr-sens-sideeffect.pptx
+++ b/docs/pptx/carbo/jx-carbo-linsubhr-sens-sideeffect.pptx
@@ -5062,8 +5062,8 @@
           </p:nvSpPr>
           <p:spPr>
             <a:xfrm>
-              <a:off x="2155289" y="5785772"/>
-              <a:ext cx="155356" cy="80101"/>
+              <a:off x="2152181" y="5785772"/>
+              <a:ext cx="161574" cy="80101"/>
             </a:xfrm>
             <a:prstGeom prst="rect">
               <a:avLst/>
@@ -5095,7 +5095,7 @@
                   <a:latin typeface="Helvetica"/>
                   <a:cs typeface="Helvetica"/>
                 </a:rPr>
-                <a:t>0.6</a:t>
+                <a:t>-40</a:t>
               </a:r>
             </a:p>
           </p:txBody>
@@ -5108,8 +5108,8 @@
           </p:nvSpPr>
           <p:spPr>
             <a:xfrm>
-              <a:off x="3887213" y="5785772"/>
-              <a:ext cx="155356" cy="80101"/>
+              <a:off x="3884104" y="5785772"/>
+              <a:ext cx="161574" cy="80101"/>
             </a:xfrm>
             <a:prstGeom prst="rect">
               <a:avLst/>
@@ -5141,7 +5141,7 @@
                   <a:latin typeface="Helvetica"/>
                   <a:cs typeface="Helvetica"/>
                 </a:rPr>
-                <a:t>0.8</a:t>
+                <a:t>-20</a:t>
               </a:r>
             </a:p>
           </p:txBody>
@@ -5154,8 +5154,8 @@
           </p:nvSpPr>
           <p:spPr>
             <a:xfrm>
-              <a:off x="5619136" y="5785772"/>
-              <a:ext cx="155356" cy="80101"/>
+              <a:off x="5665725" y="5785772"/>
+              <a:ext cx="62179" cy="80101"/>
             </a:xfrm>
             <a:prstGeom prst="rect">
               <a:avLst/>
@@ -5187,7 +5187,7 @@
                   <a:latin typeface="Helvetica"/>
                   <a:cs typeface="Helvetica"/>
                 </a:rPr>
-                <a:t>1.0</a:t>
+                <a:t>0</a:t>
               </a:r>
             </a:p>
           </p:txBody>
@@ -5200,8 +5200,8 @@
           </p:nvSpPr>
           <p:spPr>
             <a:xfrm>
-              <a:off x="7351060" y="5785772"/>
-              <a:ext cx="155356" cy="80101"/>
+              <a:off x="7366559" y="5785772"/>
+              <a:ext cx="124358" cy="80101"/>
             </a:xfrm>
             <a:prstGeom prst="rect">
               <a:avLst/>
@@ -5233,7 +5233,7 @@
                   <a:latin typeface="Helvetica"/>
                   <a:cs typeface="Helvetica"/>
                 </a:rPr>
-                <a:t>1.2</a:t>
+                <a:t>20</a:t>
               </a:r>
             </a:p>
           </p:txBody>
@@ -5246,8 +5246,8 @@
           </p:nvSpPr>
           <p:spPr>
             <a:xfrm>
-              <a:off x="2691419" y="5925448"/>
-              <a:ext cx="4051889" cy="100218"/>
+              <a:off x="1561815" y="5925448"/>
+              <a:ext cx="6311097" cy="100218"/>
             </a:xfrm>
             <a:prstGeom prst="rect">
               <a:avLst/>
@@ -5279,7 +5279,7 @@
                   <a:latin typeface="Helvetica"/>
                   <a:cs typeface="Helvetica"/>
                 </a:rPr>
-                <a:t>Sensitivity eGFR Ratio (CKD-EPI 2012 CysC / CKD-EPI 2021 Cr)</a:t>
+                <a:t>Sensitivity eGFR Difference (%): 100 × (CKD-EPI 2012 CysC − CKD-EPI 2021 Cr) / CKD-EPI 2021 Cr</a:t>
               </a:r>
             </a:p>
           </p:txBody>
@@ -5339,7 +5339,7 @@
           <p:spPr>
             <a:xfrm>
               <a:off x="817517" y="1896563"/>
-              <a:ext cx="6833128" cy="82021"/>
+              <a:ext cx="6959864" cy="82021"/>
             </a:xfrm>
             <a:prstGeom prst="rect">
               <a:avLst/>
@@ -5371,7 +5371,7 @@
                   <a:latin typeface="Helvetica"/>
                   <a:cs typeface="Helvetica"/>
                 </a:rPr>
-                <a:t>subHR per 0.1 ratio decline: 1.26 (1.09-1.45), p_Bonf = 0.011 (n = 6)  |  per IQR decline (Δ = 0.28): 1.89 (1.27-2.83)  |  IQR: [0.70, 0.98]</a:t>
+                <a:t>subHR per 10 % decline: 1.26 (1.09-1.45), p_Bonf = 0.011 (n = 6)  |  per IQR decline (Δ = 28.0 %): 1.89 (1.27-2.83)  |  IQR: [-30.0, -2.0] %</a:t>
               </a:r>
             </a:p>
           </p:txBody>

--- a/docs/pptx/carbo/jx-carbo-linsubhr-sens-sideeffect.pptx
+++ b/docs/pptx/carbo/jx-carbo-linsubhr-sens-sideeffect.pptx
@@ -2265,34 +2265,26 @@
         </p:sp>
         <p:sp>
           <p:nvSpPr>
-            <p:cNvPr id="4" name="pl4"/>
+            <p:cNvPr id="4" name="rc4"/>
             <p:cNvSpPr/>
             <p:nvPr/>
           </p:nvSpPr>
           <p:spPr>
             <a:xfrm>
-              <a:off x="817517" y="5142518"/>
-              <a:ext cx="7799693" cy="0"/>
+              <a:off x="457200" y="1600200"/>
+              <a:ext cx="8229600" cy="4525962"/>
             </a:xfrm>
-            <a:custGeom>
+            <a:prstGeom prst="rect">
               <a:avLst/>
-              <a:pathLst>
-                <a:path w="7799693" h="0">
-                  <a:moveTo>
-                    <a:pt x="0" y="0"/>
-                  </a:moveTo>
-                  <a:lnTo>
-                    <a:pt x="7799693" y="0"/>
-                  </a:lnTo>
-                  <a:lnTo>
-                    <a:pt x="7799693" y="0"/>
-                  </a:lnTo>
-                </a:path>
-              </a:pathLst>
-            </a:custGeom>
-            <a:ln w="6775" cap="flat">
+            </a:prstGeom>
+            <a:solidFill>
+              <a:srgbClr val="FFFFFF">
+                <a:alpha val="100000"/>
+              </a:srgbClr>
+            </a:solidFill>
+            <a:ln w="13550" cap="rnd">
               <a:solidFill>
-                <a:srgbClr val="EBEBEB">
+                <a:srgbClr val="FFFFFF">
                   <a:alpha val="100000"/>
                 </a:srgbClr>
               </a:solidFill>
@@ -2314,21 +2306,21 @@
           </p:nvSpPr>
           <p:spPr>
             <a:xfrm>
-              <a:off x="817517" y="4313054"/>
-              <a:ext cx="7799693" cy="0"/>
+              <a:off x="887106" y="3250627"/>
+              <a:ext cx="7660515" cy="0"/>
             </a:xfrm>
             <a:custGeom>
               <a:avLst/>
               <a:pathLst>
-                <a:path w="7799693" h="0">
+                <a:path w="7660515" h="0">
                   <a:moveTo>
                     <a:pt x="0" y="0"/>
                   </a:moveTo>
                   <a:lnTo>
-                    <a:pt x="7799693" y="0"/>
-                  </a:lnTo>
-                  <a:lnTo>
-                    <a:pt x="7799693" y="0"/>
+                    <a:pt x="7660515" y="0"/>
+                  </a:lnTo>
+                  <a:lnTo>
+                    <a:pt x="7660515" y="0"/>
                   </a:lnTo>
                 </a:path>
               </a:pathLst>
@@ -2357,21 +2349,21 @@
           </p:nvSpPr>
           <p:spPr>
             <a:xfrm>
-              <a:off x="817517" y="3483591"/>
-              <a:ext cx="7799693" cy="0"/>
+              <a:off x="887106" y="2951293"/>
+              <a:ext cx="7660515" cy="0"/>
             </a:xfrm>
             <a:custGeom>
               <a:avLst/>
               <a:pathLst>
-                <a:path w="7799693" h="0">
+                <a:path w="7660515" h="0">
                   <a:moveTo>
                     <a:pt x="0" y="0"/>
                   </a:moveTo>
                   <a:lnTo>
-                    <a:pt x="7799693" y="0"/>
-                  </a:lnTo>
-                  <a:lnTo>
-                    <a:pt x="7799693" y="0"/>
+                    <a:pt x="7660515" y="0"/>
+                  </a:lnTo>
+                  <a:lnTo>
+                    <a:pt x="7660515" y="0"/>
                   </a:lnTo>
                 </a:path>
               </a:pathLst>
@@ -2400,21 +2392,21 @@
           </p:nvSpPr>
           <p:spPr>
             <a:xfrm>
-              <a:off x="817517" y="2654127"/>
-              <a:ext cx="7799693" cy="0"/>
+              <a:off x="887106" y="2651959"/>
+              <a:ext cx="7660515" cy="0"/>
             </a:xfrm>
             <a:custGeom>
               <a:avLst/>
               <a:pathLst>
-                <a:path w="7799693" h="0">
+                <a:path w="7660515" h="0">
                   <a:moveTo>
                     <a:pt x="0" y="0"/>
                   </a:moveTo>
                   <a:lnTo>
-                    <a:pt x="7799693" y="0"/>
-                  </a:lnTo>
-                  <a:lnTo>
-                    <a:pt x="7799693" y="0"/>
+                    <a:pt x="7660515" y="0"/>
+                  </a:lnTo>
+                  <a:lnTo>
+                    <a:pt x="7660515" y="0"/>
                   </a:lnTo>
                 </a:path>
               </a:pathLst>
@@ -2443,21 +2435,21 @@
           </p:nvSpPr>
           <p:spPr>
             <a:xfrm>
-              <a:off x="1367006" y="2073503"/>
-              <a:ext cx="0" cy="3649639"/>
+              <a:off x="887106" y="2352625"/>
+              <a:ext cx="7660515" cy="0"/>
             </a:xfrm>
             <a:custGeom>
               <a:avLst/>
               <a:pathLst>
-                <a:path w="0" h="3649639">
+                <a:path w="7660515" h="0">
                   <a:moveTo>
-                    <a:pt x="0" y="3649639"/>
+                    <a:pt x="0" y="0"/>
                   </a:moveTo>
                   <a:lnTo>
-                    <a:pt x="0" y="0"/>
-                  </a:lnTo>
-                  <a:lnTo>
-                    <a:pt x="0" y="0"/>
+                    <a:pt x="7660515" y="0"/>
+                  </a:lnTo>
+                  <a:lnTo>
+                    <a:pt x="7660515" y="0"/>
                   </a:lnTo>
                 </a:path>
               </a:pathLst>
@@ -2486,15 +2478,15 @@
           </p:nvSpPr>
           <p:spPr>
             <a:xfrm>
-              <a:off x="3098929" y="2073503"/>
-              <a:ext cx="0" cy="3649639"/>
+              <a:off x="1426790" y="2143092"/>
+              <a:ext cx="0" cy="1317069"/>
             </a:xfrm>
             <a:custGeom>
               <a:avLst/>
               <a:pathLst>
-                <a:path w="0" h="3649639">
+                <a:path w="0" h="1317069">
                   <a:moveTo>
-                    <a:pt x="0" y="3649639"/>
+                    <a:pt x="0" y="1317069"/>
                   </a:moveTo>
                   <a:lnTo>
                     <a:pt x="0" y="0"/>
@@ -2529,15 +2521,15 @@
           </p:nvSpPr>
           <p:spPr>
             <a:xfrm>
-              <a:off x="4830853" y="2073503"/>
-              <a:ext cx="0" cy="3649639"/>
+              <a:off x="3127809" y="2143092"/>
+              <a:ext cx="0" cy="1317069"/>
             </a:xfrm>
             <a:custGeom>
               <a:avLst/>
               <a:pathLst>
-                <a:path w="0" h="3649639">
+                <a:path w="0" h="1317069">
                   <a:moveTo>
-                    <a:pt x="0" y="3649639"/>
+                    <a:pt x="0" y="1317069"/>
                   </a:moveTo>
                   <a:lnTo>
                     <a:pt x="0" y="0"/>
@@ -2572,15 +2564,15 @@
           </p:nvSpPr>
           <p:spPr>
             <a:xfrm>
-              <a:off x="6562776" y="2073503"/>
-              <a:ext cx="0" cy="3649639"/>
+              <a:off x="4828828" y="2143092"/>
+              <a:ext cx="0" cy="1317069"/>
             </a:xfrm>
             <a:custGeom>
               <a:avLst/>
               <a:pathLst>
-                <a:path w="0" h="3649639">
+                <a:path w="0" h="1317069">
                   <a:moveTo>
-                    <a:pt x="0" y="3649639"/>
+                    <a:pt x="0" y="1317069"/>
                   </a:moveTo>
                   <a:lnTo>
                     <a:pt x="0" y="0"/>
@@ -2615,15 +2607,15 @@
           </p:nvSpPr>
           <p:spPr>
             <a:xfrm>
-              <a:off x="8294700" y="2073503"/>
-              <a:ext cx="0" cy="3649639"/>
+              <a:off x="6529847" y="2143092"/>
+              <a:ext cx="0" cy="1317069"/>
             </a:xfrm>
             <a:custGeom>
               <a:avLst/>
               <a:pathLst>
-                <a:path w="0" h="3649639">
+                <a:path w="0" h="1317069">
                   <a:moveTo>
-                    <a:pt x="0" y="3649639"/>
+                    <a:pt x="0" y="1317069"/>
                   </a:moveTo>
                   <a:lnTo>
                     <a:pt x="0" y="0"/>
@@ -2658,26 +2650,26 @@
           </p:nvSpPr>
           <p:spPr>
             <a:xfrm>
-              <a:off x="817517" y="5557249"/>
-              <a:ext cx="7799693" cy="0"/>
+              <a:off x="8230866" y="2143092"/>
+              <a:ext cx="0" cy="1317069"/>
             </a:xfrm>
             <a:custGeom>
               <a:avLst/>
               <a:pathLst>
-                <a:path w="7799693" h="0">
+                <a:path w="0" h="1317069">
                   <a:moveTo>
+                    <a:pt x="0" y="1317069"/>
+                  </a:moveTo>
+                  <a:lnTo>
                     <a:pt x="0" y="0"/>
-                  </a:moveTo>
-                  <a:lnTo>
-                    <a:pt x="7799693" y="0"/>
-                  </a:lnTo>
-                  <a:lnTo>
-                    <a:pt x="7799693" y="0"/>
+                  </a:lnTo>
+                  <a:lnTo>
+                    <a:pt x="0" y="0"/>
                   </a:lnTo>
                 </a:path>
               </a:pathLst>
             </a:custGeom>
-            <a:ln w="13550" cap="flat">
+            <a:ln w="6775" cap="flat">
               <a:solidFill>
                 <a:srgbClr val="EBEBEB">
                   <a:alpha val="100000"/>
@@ -2701,21 +2693,21 @@
           </p:nvSpPr>
           <p:spPr>
             <a:xfrm>
-              <a:off x="817517" y="4727786"/>
-              <a:ext cx="7799693" cy="0"/>
+              <a:off x="887106" y="3400294"/>
+              <a:ext cx="7660515" cy="0"/>
             </a:xfrm>
             <a:custGeom>
               <a:avLst/>
               <a:pathLst>
-                <a:path w="7799693" h="0">
+                <a:path w="7660515" h="0">
                   <a:moveTo>
                     <a:pt x="0" y="0"/>
                   </a:moveTo>
                   <a:lnTo>
-                    <a:pt x="7799693" y="0"/>
-                  </a:lnTo>
-                  <a:lnTo>
-                    <a:pt x="7799693" y="0"/>
+                    <a:pt x="7660515" y="0"/>
+                  </a:lnTo>
+                  <a:lnTo>
+                    <a:pt x="7660515" y="0"/>
                   </a:lnTo>
                 </a:path>
               </a:pathLst>
@@ -2744,21 +2736,21 @@
           </p:nvSpPr>
           <p:spPr>
             <a:xfrm>
-              <a:off x="817517" y="3898322"/>
-              <a:ext cx="7799693" cy="0"/>
+              <a:off x="887106" y="3100960"/>
+              <a:ext cx="7660515" cy="0"/>
             </a:xfrm>
             <a:custGeom>
               <a:avLst/>
               <a:pathLst>
-                <a:path w="7799693" h="0">
+                <a:path w="7660515" h="0">
                   <a:moveTo>
                     <a:pt x="0" y="0"/>
                   </a:moveTo>
                   <a:lnTo>
-                    <a:pt x="7799693" y="0"/>
-                  </a:lnTo>
-                  <a:lnTo>
-                    <a:pt x="7799693" y="0"/>
+                    <a:pt x="7660515" y="0"/>
+                  </a:lnTo>
+                  <a:lnTo>
+                    <a:pt x="7660515" y="0"/>
                   </a:lnTo>
                 </a:path>
               </a:pathLst>
@@ -2787,21 +2779,21 @@
           </p:nvSpPr>
           <p:spPr>
             <a:xfrm>
-              <a:off x="817517" y="3068859"/>
-              <a:ext cx="7799693" cy="0"/>
+              <a:off x="887106" y="2801626"/>
+              <a:ext cx="7660515" cy="0"/>
             </a:xfrm>
             <a:custGeom>
               <a:avLst/>
               <a:pathLst>
-                <a:path w="7799693" h="0">
+                <a:path w="7660515" h="0">
                   <a:moveTo>
                     <a:pt x="0" y="0"/>
                   </a:moveTo>
                   <a:lnTo>
-                    <a:pt x="7799693" y="0"/>
-                  </a:lnTo>
-                  <a:lnTo>
-                    <a:pt x="7799693" y="0"/>
+                    <a:pt x="7660515" y="0"/>
+                  </a:lnTo>
+                  <a:lnTo>
+                    <a:pt x="7660515" y="0"/>
                   </a:lnTo>
                 </a:path>
               </a:pathLst>
@@ -2830,21 +2822,21 @@
           </p:nvSpPr>
           <p:spPr>
             <a:xfrm>
-              <a:off x="817517" y="2239395"/>
-              <a:ext cx="7799693" cy="0"/>
+              <a:off x="887106" y="2502292"/>
+              <a:ext cx="7660515" cy="0"/>
             </a:xfrm>
             <a:custGeom>
               <a:avLst/>
               <a:pathLst>
-                <a:path w="7799693" h="0">
+                <a:path w="7660515" h="0">
                   <a:moveTo>
                     <a:pt x="0" y="0"/>
                   </a:moveTo>
                   <a:lnTo>
-                    <a:pt x="7799693" y="0"/>
-                  </a:lnTo>
-                  <a:lnTo>
-                    <a:pt x="7799693" y="0"/>
+                    <a:pt x="7660515" y="0"/>
+                  </a:lnTo>
+                  <a:lnTo>
+                    <a:pt x="7660515" y="0"/>
                   </a:lnTo>
                 </a:path>
               </a:pathLst>
@@ -2873,21 +2865,21 @@
           </p:nvSpPr>
           <p:spPr>
             <a:xfrm>
-              <a:off x="2232968" y="2073503"/>
-              <a:ext cx="0" cy="3649639"/>
+              <a:off x="887106" y="2202958"/>
+              <a:ext cx="7660515" cy="0"/>
             </a:xfrm>
             <a:custGeom>
               <a:avLst/>
               <a:pathLst>
-                <a:path w="0" h="3649639">
+                <a:path w="7660515" h="0">
                   <a:moveTo>
-                    <a:pt x="0" y="3649639"/>
+                    <a:pt x="0" y="0"/>
                   </a:moveTo>
                   <a:lnTo>
-                    <a:pt x="0" y="0"/>
-                  </a:lnTo>
-                  <a:lnTo>
-                    <a:pt x="0" y="0"/>
+                    <a:pt x="7660515" y="0"/>
+                  </a:lnTo>
+                  <a:lnTo>
+                    <a:pt x="7660515" y="0"/>
                   </a:lnTo>
                 </a:path>
               </a:pathLst>
@@ -2916,15 +2908,15 @@
           </p:nvSpPr>
           <p:spPr>
             <a:xfrm>
-              <a:off x="3964891" y="2073503"/>
-              <a:ext cx="0" cy="3649639"/>
+              <a:off x="2277299" y="2143092"/>
+              <a:ext cx="0" cy="1317069"/>
             </a:xfrm>
             <a:custGeom>
               <a:avLst/>
               <a:pathLst>
-                <a:path w="0" h="3649639">
+                <a:path w="0" h="1317069">
                   <a:moveTo>
-                    <a:pt x="0" y="3649639"/>
+                    <a:pt x="0" y="1317069"/>
                   </a:moveTo>
                   <a:lnTo>
                     <a:pt x="0" y="0"/>
@@ -2959,15 +2951,15 @@
           </p:nvSpPr>
           <p:spPr>
             <a:xfrm>
-              <a:off x="5696815" y="2073503"/>
-              <a:ext cx="0" cy="3649639"/>
+              <a:off x="3978318" y="2143092"/>
+              <a:ext cx="0" cy="1317069"/>
             </a:xfrm>
             <a:custGeom>
               <a:avLst/>
               <a:pathLst>
-                <a:path w="0" h="3649639">
+                <a:path w="0" h="1317069">
                   <a:moveTo>
-                    <a:pt x="0" y="3649639"/>
+                    <a:pt x="0" y="1317069"/>
                   </a:moveTo>
                   <a:lnTo>
                     <a:pt x="0" y="0"/>
@@ -3002,15 +2994,15 @@
           </p:nvSpPr>
           <p:spPr>
             <a:xfrm>
-              <a:off x="7428738" y="2073503"/>
-              <a:ext cx="0" cy="3649639"/>
+              <a:off x="5679337" y="2143092"/>
+              <a:ext cx="0" cy="1317069"/>
             </a:xfrm>
             <a:custGeom>
               <a:avLst/>
               <a:pathLst>
-                <a:path w="0" h="3649639">
+                <a:path w="0" h="1317069">
                   <a:moveTo>
-                    <a:pt x="0" y="3649639"/>
+                    <a:pt x="0" y="1317069"/>
                   </a:moveTo>
                   <a:lnTo>
                     <a:pt x="0" y="0"/>
@@ -3039,618 +3031,661 @@
         </p:sp>
         <p:sp>
           <p:nvSpPr>
-            <p:cNvPr id="22" name="pg22"/>
+            <p:cNvPr id="22" name="pl22"/>
             <p:cNvSpPr/>
             <p:nvPr/>
           </p:nvSpPr>
           <p:spPr>
             <a:xfrm>
-              <a:off x="1172049" y="2408482"/>
-              <a:ext cx="7090630" cy="2997957"/>
+              <a:off x="7380356" y="2143092"/>
+              <a:ext cx="0" cy="1317069"/>
             </a:xfrm>
             <a:custGeom>
               <a:avLst/>
               <a:pathLst>
-                <a:path w="7090630" h="2997957">
+                <a:path w="0" h="1317069">
+                  <a:moveTo>
+                    <a:pt x="0" y="1317069"/>
+                  </a:moveTo>
+                  <a:lnTo>
+                    <a:pt x="0" y="0"/>
+                  </a:lnTo>
+                  <a:lnTo>
+                    <a:pt x="0" y="0"/>
+                  </a:lnTo>
+                </a:path>
+              </a:pathLst>
+            </a:custGeom>
+            <a:ln w="13550" cap="flat">
+              <a:solidFill>
+                <a:srgbClr val="EBEBEB">
+                  <a:alpha val="100000"/>
+                </a:srgbClr>
+              </a:solidFill>
+              <a:prstDash val="solid"/>
+              <a:round/>
+            </a:ln>
+          </p:spPr>
+          <p:txBody>
+            <a:bodyPr/>
+            <a:lstStyle/>
+            <a:p/>
+          </p:txBody>
+        </p:sp>
+        <p:sp>
+          <p:nvSpPr>
+            <p:cNvPr id="23" name="pg23"/>
+            <p:cNvSpPr/>
+            <p:nvPr/>
+          </p:nvSpPr>
+          <p:spPr>
+            <a:xfrm>
+              <a:off x="1235312" y="2263978"/>
+              <a:ext cx="6964104" cy="1081892"/>
+            </a:xfrm>
+            <a:custGeom>
+              <a:avLst/>
+              <a:pathLst>
+                <a:path w="6964104" h="1081892">
                   <a:moveTo>
                     <a:pt x="0" y="0"/>
                   </a:moveTo>
                   <a:lnTo>
-                    <a:pt x="71622" y="95181"/>
-                  </a:lnTo>
-                  <a:lnTo>
-                    <a:pt x="143245" y="187485"/>
-                  </a:lnTo>
-                  <a:lnTo>
-                    <a:pt x="214867" y="276999"/>
-                  </a:lnTo>
-                  <a:lnTo>
-                    <a:pt x="286490" y="363807"/>
-                  </a:lnTo>
-                  <a:lnTo>
-                    <a:pt x="358112" y="447991"/>
-                  </a:lnTo>
-                  <a:lnTo>
-                    <a:pt x="429735" y="529631"/>
-                  </a:lnTo>
-                  <a:lnTo>
-                    <a:pt x="501357" y="608802"/>
-                  </a:lnTo>
-                  <a:lnTo>
-                    <a:pt x="572980" y="685581"/>
-                  </a:lnTo>
-                  <a:lnTo>
-                    <a:pt x="644602" y="760038"/>
-                  </a:lnTo>
-                  <a:lnTo>
-                    <a:pt x="716225" y="832245"/>
-                  </a:lnTo>
-                  <a:lnTo>
-                    <a:pt x="787847" y="902269"/>
-                  </a:lnTo>
-                  <a:lnTo>
-                    <a:pt x="859470" y="970177"/>
-                  </a:lnTo>
-                  <a:lnTo>
-                    <a:pt x="931092" y="1036031"/>
-                  </a:lnTo>
-                  <a:lnTo>
-                    <a:pt x="1002715" y="1099895"/>
-                  </a:lnTo>
-                  <a:lnTo>
-                    <a:pt x="1074337" y="1161829"/>
-                  </a:lnTo>
-                  <a:lnTo>
-                    <a:pt x="1145960" y="1221890"/>
-                  </a:lnTo>
-                  <a:lnTo>
-                    <a:pt x="1217582" y="1280136"/>
-                  </a:lnTo>
-                  <a:lnTo>
-                    <a:pt x="1289205" y="1336621"/>
-                  </a:lnTo>
-                  <a:lnTo>
-                    <a:pt x="1360827" y="1391399"/>
-                  </a:lnTo>
-                  <a:lnTo>
-                    <a:pt x="1432450" y="1444521"/>
-                  </a:lnTo>
-                  <a:lnTo>
-                    <a:pt x="1504073" y="1496037"/>
-                  </a:lnTo>
-                  <a:lnTo>
-                    <a:pt x="1575695" y="1545996"/>
-                  </a:lnTo>
-                  <a:lnTo>
-                    <a:pt x="1647318" y="1594445"/>
-                  </a:lnTo>
-                  <a:lnTo>
-                    <a:pt x="1718940" y="1641429"/>
-                  </a:lnTo>
-                  <a:lnTo>
-                    <a:pt x="1790563" y="1686993"/>
-                  </a:lnTo>
-                  <a:lnTo>
-                    <a:pt x="1862185" y="1731180"/>
-                  </a:lnTo>
-                  <a:lnTo>
-                    <a:pt x="1933808" y="1774031"/>
-                  </a:lnTo>
-                  <a:lnTo>
-                    <a:pt x="2005430" y="1815586"/>
-                  </a:lnTo>
-                  <a:lnTo>
-                    <a:pt x="2077053" y="1855886"/>
-                  </a:lnTo>
-                  <a:lnTo>
-                    <a:pt x="2148675" y="1894967"/>
-                  </a:lnTo>
-                  <a:lnTo>
-                    <a:pt x="2220298" y="1932867"/>
-                  </a:lnTo>
-                  <a:lnTo>
-                    <a:pt x="2291920" y="1969622"/>
-                  </a:lnTo>
-                  <a:lnTo>
-                    <a:pt x="2363543" y="2005265"/>
-                  </a:lnTo>
-                  <a:lnTo>
-                    <a:pt x="2435165" y="2039831"/>
-                  </a:lnTo>
-                  <a:lnTo>
-                    <a:pt x="2506788" y="2073352"/>
-                  </a:lnTo>
-                  <a:lnTo>
-                    <a:pt x="2578410" y="2105860"/>
-                  </a:lnTo>
-                  <a:lnTo>
-                    <a:pt x="2650033" y="2137385"/>
-                  </a:lnTo>
-                  <a:lnTo>
-                    <a:pt x="2721655" y="2167957"/>
-                  </a:lnTo>
-                  <a:lnTo>
-                    <a:pt x="2793278" y="2197605"/>
-                  </a:lnTo>
-                  <a:lnTo>
-                    <a:pt x="2864901" y="2226357"/>
-                  </a:lnTo>
-                  <a:lnTo>
-                    <a:pt x="2936523" y="2254240"/>
-                  </a:lnTo>
-                  <a:lnTo>
-                    <a:pt x="3008146" y="2281280"/>
-                  </a:lnTo>
-                  <a:lnTo>
-                    <a:pt x="3079768" y="2307502"/>
-                  </a:lnTo>
-                  <a:lnTo>
-                    <a:pt x="3151391" y="2322410"/>
-                  </a:lnTo>
-                  <a:lnTo>
-                    <a:pt x="3223013" y="2328135"/>
-                  </a:lnTo>
-                  <a:lnTo>
-                    <a:pt x="3294636" y="2333820"/>
-                  </a:lnTo>
-                  <a:lnTo>
-                    <a:pt x="3366258" y="2339466"/>
-                  </a:lnTo>
-                  <a:lnTo>
-                    <a:pt x="3437881" y="2345073"/>
-                  </a:lnTo>
-                  <a:lnTo>
-                    <a:pt x="3509503" y="2350642"/>
-                  </a:lnTo>
-                  <a:lnTo>
-                    <a:pt x="3581126" y="2356171"/>
-                  </a:lnTo>
-                  <a:lnTo>
-                    <a:pt x="3652748" y="2361662"/>
-                  </a:lnTo>
-                  <a:lnTo>
-                    <a:pt x="3724371" y="2367116"/>
-                  </a:lnTo>
-                  <a:lnTo>
-                    <a:pt x="3795993" y="2372531"/>
-                  </a:lnTo>
-                  <a:lnTo>
-                    <a:pt x="3867616" y="2377909"/>
-                  </a:lnTo>
-                  <a:lnTo>
-                    <a:pt x="3939238" y="2383249"/>
-                  </a:lnTo>
-                  <a:lnTo>
-                    <a:pt x="4010861" y="2388553"/>
-                  </a:lnTo>
-                  <a:lnTo>
-                    <a:pt x="4082483" y="2393820"/>
-                  </a:lnTo>
-                  <a:lnTo>
-                    <a:pt x="4154106" y="2399050"/>
-                  </a:lnTo>
-                  <a:lnTo>
-                    <a:pt x="4225729" y="2404245"/>
-                  </a:lnTo>
-                  <a:lnTo>
-                    <a:pt x="4297351" y="2409403"/>
-                  </a:lnTo>
-                  <a:lnTo>
-                    <a:pt x="4368974" y="2414525"/>
-                  </a:lnTo>
-                  <a:lnTo>
-                    <a:pt x="4440596" y="2419612"/>
-                  </a:lnTo>
-                  <a:lnTo>
-                    <a:pt x="4512219" y="2424664"/>
-                  </a:lnTo>
-                  <a:lnTo>
-                    <a:pt x="4583841" y="2429681"/>
-                  </a:lnTo>
-                  <a:lnTo>
-                    <a:pt x="4655464" y="2434662"/>
-                  </a:lnTo>
-                  <a:lnTo>
-                    <a:pt x="4727086" y="2439610"/>
-                  </a:lnTo>
-                  <a:lnTo>
-                    <a:pt x="4798709" y="2444523"/>
-                  </a:lnTo>
-                  <a:lnTo>
-                    <a:pt x="4870331" y="2449402"/>
-                  </a:lnTo>
-                  <a:lnTo>
-                    <a:pt x="4941954" y="2454247"/>
-                  </a:lnTo>
-                  <a:lnTo>
-                    <a:pt x="5013576" y="2459059"/>
-                  </a:lnTo>
-                  <a:lnTo>
-                    <a:pt x="5085199" y="2463838"/>
-                  </a:lnTo>
-                  <a:lnTo>
-                    <a:pt x="5156821" y="2468583"/>
-                  </a:lnTo>
-                  <a:lnTo>
-                    <a:pt x="5228444" y="2473295"/>
-                  </a:lnTo>
-                  <a:lnTo>
-                    <a:pt x="5300066" y="2477975"/>
-                  </a:lnTo>
-                  <a:lnTo>
-                    <a:pt x="5371689" y="2482623"/>
-                  </a:lnTo>
-                  <a:lnTo>
-                    <a:pt x="5443311" y="2487238"/>
-                  </a:lnTo>
-                  <a:lnTo>
-                    <a:pt x="5514934" y="2491821"/>
-                  </a:lnTo>
-                  <a:lnTo>
-                    <a:pt x="5586557" y="2496372"/>
-                  </a:lnTo>
-                  <a:lnTo>
-                    <a:pt x="5658179" y="2500892"/>
-                  </a:lnTo>
-                  <a:lnTo>
-                    <a:pt x="5729802" y="2505381"/>
-                  </a:lnTo>
-                  <a:lnTo>
-                    <a:pt x="5801424" y="2509838"/>
-                  </a:lnTo>
-                  <a:lnTo>
-                    <a:pt x="5873047" y="2514265"/>
-                  </a:lnTo>
-                  <a:lnTo>
-                    <a:pt x="5944669" y="2518661"/>
-                  </a:lnTo>
-                  <a:lnTo>
-                    <a:pt x="6016292" y="2523026"/>
-                  </a:lnTo>
-                  <a:lnTo>
-                    <a:pt x="6087914" y="2527362"/>
-                  </a:lnTo>
-                  <a:lnTo>
-                    <a:pt x="6159537" y="2531667"/>
-                  </a:lnTo>
-                  <a:lnTo>
-                    <a:pt x="6231159" y="2535942"/>
-                  </a:lnTo>
-                  <a:lnTo>
-                    <a:pt x="6302782" y="2540188"/>
-                  </a:lnTo>
-                  <a:lnTo>
-                    <a:pt x="6374404" y="2544404"/>
-                  </a:lnTo>
-                  <a:lnTo>
-                    <a:pt x="6446027" y="2548591"/>
-                  </a:lnTo>
-                  <a:lnTo>
-                    <a:pt x="6517649" y="2552749"/>
-                  </a:lnTo>
-                  <a:lnTo>
-                    <a:pt x="6589272" y="2556879"/>
-                  </a:lnTo>
-                  <a:lnTo>
-                    <a:pt x="6660894" y="2560979"/>
-                  </a:lnTo>
-                  <a:lnTo>
-                    <a:pt x="6732517" y="2565052"/>
-                  </a:lnTo>
-                  <a:lnTo>
-                    <a:pt x="6804139" y="2569096"/>
-                  </a:lnTo>
-                  <a:lnTo>
-                    <a:pt x="6875762" y="2573112"/>
-                  </a:lnTo>
-                  <a:lnTo>
-                    <a:pt x="6947385" y="2577100"/>
-                  </a:lnTo>
-                  <a:lnTo>
-                    <a:pt x="7019007" y="2581061"/>
-                  </a:lnTo>
-                  <a:lnTo>
-                    <a:pt x="7090630" y="2584994"/>
-                  </a:lnTo>
-                  <a:lnTo>
-                    <a:pt x="7090630" y="2997957"/>
-                  </a:lnTo>
-                  <a:lnTo>
-                    <a:pt x="7019007" y="2993256"/>
-                  </a:lnTo>
-                  <a:lnTo>
-                    <a:pt x="6947385" y="2988409"/>
-                  </a:lnTo>
-                  <a:lnTo>
-                    <a:pt x="6875762" y="2983410"/>
-                  </a:lnTo>
-                  <a:lnTo>
-                    <a:pt x="6804139" y="2978256"/>
-                  </a:lnTo>
-                  <a:lnTo>
-                    <a:pt x="6732517" y="2972941"/>
-                  </a:lnTo>
-                  <a:lnTo>
-                    <a:pt x="6660894" y="2967461"/>
-                  </a:lnTo>
-                  <a:lnTo>
-                    <a:pt x="6589272" y="2961809"/>
-                  </a:lnTo>
-                  <a:lnTo>
-                    <a:pt x="6517649" y="2955982"/>
-                  </a:lnTo>
-                  <a:lnTo>
-                    <a:pt x="6446027" y="2949973"/>
-                  </a:lnTo>
-                  <a:lnTo>
-                    <a:pt x="6374404" y="2943776"/>
-                  </a:lnTo>
-                  <a:lnTo>
-                    <a:pt x="6302782" y="2937387"/>
-                  </a:lnTo>
-                  <a:lnTo>
-                    <a:pt x="6231159" y="2930798"/>
-                  </a:lnTo>
-                  <a:lnTo>
-                    <a:pt x="6159537" y="2924004"/>
-                  </a:lnTo>
-                  <a:lnTo>
-                    <a:pt x="6087914" y="2916998"/>
-                  </a:lnTo>
-                  <a:lnTo>
-                    <a:pt x="6016292" y="2909773"/>
-                  </a:lnTo>
-                  <a:lnTo>
-                    <a:pt x="5944669" y="2902324"/>
-                  </a:lnTo>
-                  <a:lnTo>
-                    <a:pt x="5873047" y="2894642"/>
-                  </a:lnTo>
-                  <a:lnTo>
-                    <a:pt x="5801424" y="2886721"/>
-                  </a:lnTo>
-                  <a:lnTo>
-                    <a:pt x="5729802" y="2878553"/>
-                  </a:lnTo>
-                  <a:lnTo>
-                    <a:pt x="5658179" y="2870130"/>
-                  </a:lnTo>
-                  <a:lnTo>
-                    <a:pt x="5586557" y="2861445"/>
-                  </a:lnTo>
-                  <a:lnTo>
-                    <a:pt x="5514934" y="2852489"/>
-                  </a:lnTo>
-                  <a:lnTo>
-                    <a:pt x="5443311" y="2843254"/>
-                  </a:lnTo>
-                  <a:lnTo>
-                    <a:pt x="5371689" y="2833731"/>
-                  </a:lnTo>
-                  <a:lnTo>
-                    <a:pt x="5300066" y="2823912"/>
-                  </a:lnTo>
-                  <a:lnTo>
-                    <a:pt x="5228444" y="2813786"/>
-                  </a:lnTo>
-                  <a:lnTo>
-                    <a:pt x="5156821" y="2803344"/>
-                  </a:lnTo>
-                  <a:lnTo>
-                    <a:pt x="5085199" y="2792577"/>
-                  </a:lnTo>
-                  <a:lnTo>
-                    <a:pt x="5013576" y="2781475"/>
-                  </a:lnTo>
-                  <a:lnTo>
-                    <a:pt x="4941954" y="2770026"/>
-                  </a:lnTo>
-                  <a:lnTo>
-                    <a:pt x="4870331" y="2758221"/>
-                  </a:lnTo>
-                  <a:lnTo>
-                    <a:pt x="4798709" y="2746047"/>
-                  </a:lnTo>
-                  <a:lnTo>
-                    <a:pt x="4727086" y="2733494"/>
-                  </a:lnTo>
-                  <a:lnTo>
-                    <a:pt x="4655464" y="2720550"/>
-                  </a:lnTo>
-                  <a:lnTo>
-                    <a:pt x="4583841" y="2707202"/>
-                  </a:lnTo>
-                  <a:lnTo>
-                    <a:pt x="4512219" y="2693439"/>
-                  </a:lnTo>
-                  <a:lnTo>
-                    <a:pt x="4440596" y="2679246"/>
-                  </a:lnTo>
-                  <a:lnTo>
-                    <a:pt x="4368974" y="2664611"/>
-                  </a:lnTo>
-                  <a:lnTo>
-                    <a:pt x="4297351" y="2649520"/>
-                  </a:lnTo>
-                  <a:lnTo>
-                    <a:pt x="4225729" y="2633958"/>
-                  </a:lnTo>
-                  <a:lnTo>
-                    <a:pt x="4154106" y="2617911"/>
-                  </a:lnTo>
-                  <a:lnTo>
-                    <a:pt x="4082483" y="2601364"/>
-                  </a:lnTo>
-                  <a:lnTo>
-                    <a:pt x="4010861" y="2584301"/>
-                  </a:lnTo>
-                  <a:lnTo>
-                    <a:pt x="3939238" y="2566707"/>
-                  </a:lnTo>
-                  <a:lnTo>
-                    <a:pt x="3867616" y="2548564"/>
-                  </a:lnTo>
-                  <a:lnTo>
-                    <a:pt x="3795993" y="2529855"/>
-                  </a:lnTo>
-                  <a:lnTo>
-                    <a:pt x="3724371" y="2510564"/>
-                  </a:lnTo>
-                  <a:lnTo>
-                    <a:pt x="3652748" y="2490671"/>
-                  </a:lnTo>
-                  <a:lnTo>
-                    <a:pt x="3581126" y="2470158"/>
-                  </a:lnTo>
-                  <a:lnTo>
-                    <a:pt x="3509503" y="2449005"/>
-                  </a:lnTo>
-                  <a:lnTo>
-                    <a:pt x="3437881" y="2427193"/>
-                  </a:lnTo>
-                  <a:lnTo>
-                    <a:pt x="3366258" y="2404702"/>
-                  </a:lnTo>
-                  <a:lnTo>
-                    <a:pt x="3294636" y="2381509"/>
-                  </a:lnTo>
-                  <a:lnTo>
-                    <a:pt x="3223013" y="2357593"/>
-                  </a:lnTo>
-                  <a:lnTo>
-                    <a:pt x="3151391" y="2332932"/>
-                  </a:lnTo>
-                  <a:lnTo>
-                    <a:pt x="3079768" y="2316645"/>
-                  </a:lnTo>
-                  <a:lnTo>
-                    <a:pt x="3008146" y="2310839"/>
-                  </a:lnTo>
-                  <a:lnTo>
-                    <a:pt x="2936523" y="2304994"/>
-                  </a:lnTo>
-                  <a:lnTo>
-                    <a:pt x="2864901" y="2299107"/>
-                  </a:lnTo>
-                  <a:lnTo>
-                    <a:pt x="2793278" y="2293179"/>
-                  </a:lnTo>
-                  <a:lnTo>
-                    <a:pt x="2721655" y="2287210"/>
-                  </a:lnTo>
-                  <a:lnTo>
-                    <a:pt x="2650033" y="2281200"/>
-                  </a:lnTo>
-                  <a:lnTo>
-                    <a:pt x="2578410" y="2275147"/>
-                  </a:lnTo>
-                  <a:lnTo>
-                    <a:pt x="2506788" y="2269052"/>
-                  </a:lnTo>
-                  <a:lnTo>
-                    <a:pt x="2435165" y="2262915"/>
-                  </a:lnTo>
-                  <a:lnTo>
-                    <a:pt x="2363543" y="2256735"/>
-                  </a:lnTo>
-                  <a:lnTo>
-                    <a:pt x="2291920" y="2250512"/>
-                  </a:lnTo>
-                  <a:lnTo>
-                    <a:pt x="2220298" y="2244245"/>
-                  </a:lnTo>
-                  <a:lnTo>
-                    <a:pt x="2148675" y="2237934"/>
-                  </a:lnTo>
-                  <a:lnTo>
-                    <a:pt x="2077053" y="2231580"/>
-                  </a:lnTo>
-                  <a:lnTo>
-                    <a:pt x="2005430" y="2225181"/>
-                  </a:lnTo>
-                  <a:lnTo>
-                    <a:pt x="1933808" y="2218738"/>
-                  </a:lnTo>
-                  <a:lnTo>
-                    <a:pt x="1862185" y="2212250"/>
-                  </a:lnTo>
-                  <a:lnTo>
-                    <a:pt x="1790563" y="2205716"/>
-                  </a:lnTo>
-                  <a:lnTo>
-                    <a:pt x="1718940" y="2199137"/>
-                  </a:lnTo>
-                  <a:lnTo>
-                    <a:pt x="1647318" y="2192512"/>
-                  </a:lnTo>
-                  <a:lnTo>
-                    <a:pt x="1575695" y="2185840"/>
-                  </a:lnTo>
-                  <a:lnTo>
-                    <a:pt x="1504073" y="2179122"/>
-                  </a:lnTo>
-                  <a:lnTo>
-                    <a:pt x="1432450" y="2172358"/>
-                  </a:lnTo>
-                  <a:lnTo>
-                    <a:pt x="1360827" y="2165546"/>
-                  </a:lnTo>
-                  <a:lnTo>
-                    <a:pt x="1289205" y="2158686"/>
-                  </a:lnTo>
-                  <a:lnTo>
-                    <a:pt x="1217582" y="2151779"/>
-                  </a:lnTo>
-                  <a:lnTo>
-                    <a:pt x="1145960" y="2144824"/>
-                  </a:lnTo>
-                  <a:lnTo>
-                    <a:pt x="1074337" y="2137820"/>
-                  </a:lnTo>
-                  <a:lnTo>
-                    <a:pt x="1002715" y="2130767"/>
-                  </a:lnTo>
-                  <a:lnTo>
-                    <a:pt x="931092" y="2123665"/>
-                  </a:lnTo>
-                  <a:lnTo>
-                    <a:pt x="859470" y="2116513"/>
-                  </a:lnTo>
-                  <a:lnTo>
-                    <a:pt x="787847" y="2109311"/>
-                  </a:lnTo>
-                  <a:lnTo>
-                    <a:pt x="716225" y="2102060"/>
-                  </a:lnTo>
-                  <a:lnTo>
-                    <a:pt x="644602" y="2094757"/>
-                  </a:lnTo>
-                  <a:lnTo>
-                    <a:pt x="572980" y="2087404"/>
-                  </a:lnTo>
-                  <a:lnTo>
-                    <a:pt x="501357" y="2079999"/>
-                  </a:lnTo>
-                  <a:lnTo>
-                    <a:pt x="429735" y="2072543"/>
-                  </a:lnTo>
-                  <a:lnTo>
-                    <a:pt x="358112" y="2065035"/>
-                  </a:lnTo>
-                  <a:lnTo>
-                    <a:pt x="286490" y="2057474"/>
-                  </a:lnTo>
-                  <a:lnTo>
-                    <a:pt x="214867" y="2049861"/>
-                  </a:lnTo>
-                  <a:lnTo>
-                    <a:pt x="143245" y="2042194"/>
-                  </a:lnTo>
-                  <a:lnTo>
-                    <a:pt x="71622" y="2034474"/>
-                  </a:lnTo>
-                  <a:lnTo>
-                    <a:pt x="0" y="2026700"/>
+                    <a:pt x="70344" y="34348"/>
+                  </a:lnTo>
+                  <a:lnTo>
+                    <a:pt x="140688" y="67659"/>
+                  </a:lnTo>
+                  <a:lnTo>
+                    <a:pt x="211033" y="99962"/>
+                  </a:lnTo>
+                  <a:lnTo>
+                    <a:pt x="281377" y="131289"/>
+                  </a:lnTo>
+                  <a:lnTo>
+                    <a:pt x="351722" y="161669"/>
+                  </a:lnTo>
+                  <a:lnTo>
+                    <a:pt x="422066" y="191131"/>
+                  </a:lnTo>
+                  <a:lnTo>
+                    <a:pt x="492411" y="219702"/>
+                  </a:lnTo>
+                  <a:lnTo>
+                    <a:pt x="562755" y="247410"/>
+                  </a:lnTo>
+                  <a:lnTo>
+                    <a:pt x="633100" y="274280"/>
+                  </a:lnTo>
+                  <a:lnTo>
+                    <a:pt x="703444" y="300337"/>
+                  </a:lnTo>
+                  <a:lnTo>
+                    <a:pt x="773789" y="325607"/>
+                  </a:lnTo>
+                  <a:lnTo>
+                    <a:pt x="844133" y="350114"/>
+                  </a:lnTo>
+                  <a:lnTo>
+                    <a:pt x="914478" y="373879"/>
+                  </a:lnTo>
+                  <a:lnTo>
+                    <a:pt x="984822" y="396926"/>
+                  </a:lnTo>
+                  <a:lnTo>
+                    <a:pt x="1055167" y="419276"/>
+                  </a:lnTo>
+                  <a:lnTo>
+                    <a:pt x="1125511" y="440951"/>
+                  </a:lnTo>
+                  <a:lnTo>
+                    <a:pt x="1195856" y="461971"/>
+                  </a:lnTo>
+                  <a:lnTo>
+                    <a:pt x="1266200" y="482355"/>
+                  </a:lnTo>
+                  <a:lnTo>
+                    <a:pt x="1336545" y="502123"/>
+                  </a:lnTo>
+                  <a:lnTo>
+                    <a:pt x="1406889" y="521293"/>
+                  </a:lnTo>
+                  <a:lnTo>
+                    <a:pt x="1477234" y="539884"/>
+                  </a:lnTo>
+                  <a:lnTo>
+                    <a:pt x="1547578" y="557913"/>
+                  </a:lnTo>
+                  <a:lnTo>
+                    <a:pt x="1617923" y="575397"/>
+                  </a:lnTo>
+                  <a:lnTo>
+                    <a:pt x="1688267" y="592353"/>
+                  </a:lnTo>
+                  <a:lnTo>
+                    <a:pt x="1758612" y="608796"/>
+                  </a:lnTo>
+                  <a:lnTo>
+                    <a:pt x="1828956" y="624742"/>
+                  </a:lnTo>
+                  <a:lnTo>
+                    <a:pt x="1899301" y="640206"/>
+                  </a:lnTo>
+                  <a:lnTo>
+                    <a:pt x="1969645" y="655202"/>
+                  </a:lnTo>
+                  <a:lnTo>
+                    <a:pt x="2039990" y="669745"/>
+                  </a:lnTo>
+                  <a:lnTo>
+                    <a:pt x="2110334" y="683849"/>
+                  </a:lnTo>
+                  <a:lnTo>
+                    <a:pt x="2180679" y="697526"/>
+                  </a:lnTo>
+                  <a:lnTo>
+                    <a:pt x="2251023" y="710790"/>
+                  </a:lnTo>
+                  <a:lnTo>
+                    <a:pt x="2321368" y="723653"/>
+                  </a:lnTo>
+                  <a:lnTo>
+                    <a:pt x="2391712" y="736127"/>
+                  </a:lnTo>
+                  <a:lnTo>
+                    <a:pt x="2462057" y="748224"/>
+                  </a:lnTo>
+                  <a:lnTo>
+                    <a:pt x="2532401" y="759955"/>
+                  </a:lnTo>
+                  <a:lnTo>
+                    <a:pt x="2602746" y="771332"/>
+                  </a:lnTo>
+                  <a:lnTo>
+                    <a:pt x="2673090" y="782364"/>
+                  </a:lnTo>
+                  <a:lnTo>
+                    <a:pt x="2743435" y="793064"/>
+                  </a:lnTo>
+                  <a:lnTo>
+                    <a:pt x="2813779" y="803440"/>
+                  </a:lnTo>
+                  <a:lnTo>
+                    <a:pt x="2884124" y="813502"/>
+                  </a:lnTo>
+                  <a:lnTo>
+                    <a:pt x="2954468" y="823260"/>
+                  </a:lnTo>
+                  <a:lnTo>
+                    <a:pt x="3024813" y="832723"/>
+                  </a:lnTo>
+                  <a:lnTo>
+                    <a:pt x="3095157" y="838103"/>
+                  </a:lnTo>
+                  <a:lnTo>
+                    <a:pt x="3165502" y="840169"/>
+                  </a:lnTo>
+                  <a:lnTo>
+                    <a:pt x="3235846" y="842221"/>
+                  </a:lnTo>
+                  <a:lnTo>
+                    <a:pt x="3306191" y="844258"/>
+                  </a:lnTo>
+                  <a:lnTo>
+                    <a:pt x="3376535" y="846282"/>
+                  </a:lnTo>
+                  <a:lnTo>
+                    <a:pt x="3446880" y="848291"/>
+                  </a:lnTo>
+                  <a:lnTo>
+                    <a:pt x="3517224" y="850286"/>
+                  </a:lnTo>
+                  <a:lnTo>
+                    <a:pt x="3587569" y="852268"/>
+                  </a:lnTo>
+                  <a:lnTo>
+                    <a:pt x="3657913" y="854236"/>
+                  </a:lnTo>
+                  <a:lnTo>
+                    <a:pt x="3728257" y="856190"/>
+                  </a:lnTo>
+                  <a:lnTo>
+                    <a:pt x="3798602" y="858131"/>
+                  </a:lnTo>
+                  <a:lnTo>
+                    <a:pt x="3868946" y="860058"/>
+                  </a:lnTo>
+                  <a:lnTo>
+                    <a:pt x="3939291" y="861972"/>
+                  </a:lnTo>
+                  <a:lnTo>
+                    <a:pt x="4009635" y="863873"/>
+                  </a:lnTo>
+                  <a:lnTo>
+                    <a:pt x="4079980" y="865761"/>
+                  </a:lnTo>
+                  <a:lnTo>
+                    <a:pt x="4150324" y="867635"/>
+                  </a:lnTo>
+                  <a:lnTo>
+                    <a:pt x="4220669" y="869496"/>
+                  </a:lnTo>
+                  <a:lnTo>
+                    <a:pt x="4291013" y="871345"/>
+                  </a:lnTo>
+                  <a:lnTo>
+                    <a:pt x="4361358" y="873181"/>
+                  </a:lnTo>
+                  <a:lnTo>
+                    <a:pt x="4431702" y="875004"/>
+                  </a:lnTo>
+                  <a:lnTo>
+                    <a:pt x="4502047" y="876814"/>
+                  </a:lnTo>
+                  <a:lnTo>
+                    <a:pt x="4572391" y="878612"/>
+                  </a:lnTo>
+                  <a:lnTo>
+                    <a:pt x="4642736" y="880397"/>
+                  </a:lnTo>
+                  <a:lnTo>
+                    <a:pt x="4713080" y="882171"/>
+                  </a:lnTo>
+                  <a:lnTo>
+                    <a:pt x="4783425" y="883931"/>
+                  </a:lnTo>
+                  <a:lnTo>
+                    <a:pt x="4853769" y="885680"/>
+                  </a:lnTo>
+                  <a:lnTo>
+                    <a:pt x="4924114" y="887416"/>
+                  </a:lnTo>
+                  <a:lnTo>
+                    <a:pt x="4994458" y="889141"/>
+                  </a:lnTo>
+                  <a:lnTo>
+                    <a:pt x="5064803" y="890853"/>
+                  </a:lnTo>
+                  <a:lnTo>
+                    <a:pt x="5135147" y="892554"/>
+                  </a:lnTo>
+                  <a:lnTo>
+                    <a:pt x="5205492" y="894243"/>
+                  </a:lnTo>
+                  <a:lnTo>
+                    <a:pt x="5275836" y="895920"/>
+                  </a:lnTo>
+                  <a:lnTo>
+                    <a:pt x="5346181" y="897585"/>
+                  </a:lnTo>
+                  <a:lnTo>
+                    <a:pt x="5416525" y="899239"/>
+                  </a:lnTo>
+                  <a:lnTo>
+                    <a:pt x="5486870" y="900882"/>
+                  </a:lnTo>
+                  <a:lnTo>
+                    <a:pt x="5557214" y="902513"/>
+                  </a:lnTo>
+                  <a:lnTo>
+                    <a:pt x="5627559" y="904133"/>
+                  </a:lnTo>
+                  <a:lnTo>
+                    <a:pt x="5697903" y="905741"/>
+                  </a:lnTo>
+                  <a:lnTo>
+                    <a:pt x="5768248" y="907339"/>
+                  </a:lnTo>
+                  <a:lnTo>
+                    <a:pt x="5838592" y="908925"/>
+                  </a:lnTo>
+                  <a:lnTo>
+                    <a:pt x="5908937" y="910501"/>
+                  </a:lnTo>
+                  <a:lnTo>
+                    <a:pt x="5979281" y="912065"/>
+                  </a:lnTo>
+                  <a:lnTo>
+                    <a:pt x="6049626" y="913619"/>
+                  </a:lnTo>
+                  <a:lnTo>
+                    <a:pt x="6119970" y="915162"/>
+                  </a:lnTo>
+                  <a:lnTo>
+                    <a:pt x="6190315" y="916694"/>
+                  </a:lnTo>
+                  <a:lnTo>
+                    <a:pt x="6260659" y="918215"/>
+                  </a:lnTo>
+                  <a:lnTo>
+                    <a:pt x="6331004" y="919726"/>
+                  </a:lnTo>
+                  <a:lnTo>
+                    <a:pt x="6401348" y="921227"/>
+                  </a:lnTo>
+                  <a:lnTo>
+                    <a:pt x="6471693" y="922717"/>
+                  </a:lnTo>
+                  <a:lnTo>
+                    <a:pt x="6542037" y="924197"/>
+                  </a:lnTo>
+                  <a:lnTo>
+                    <a:pt x="6612382" y="925666"/>
+                  </a:lnTo>
+                  <a:lnTo>
+                    <a:pt x="6682726" y="927126"/>
+                  </a:lnTo>
+                  <a:lnTo>
+                    <a:pt x="6753071" y="928575"/>
+                  </a:lnTo>
+                  <a:lnTo>
+                    <a:pt x="6823415" y="930014"/>
+                  </a:lnTo>
+                  <a:lnTo>
+                    <a:pt x="6893760" y="931444"/>
+                  </a:lnTo>
+                  <a:lnTo>
+                    <a:pt x="6964104" y="932863"/>
+                  </a:lnTo>
+                  <a:lnTo>
+                    <a:pt x="6964104" y="1081892"/>
+                  </a:lnTo>
+                  <a:lnTo>
+                    <a:pt x="6893760" y="1080195"/>
+                  </a:lnTo>
+                  <a:lnTo>
+                    <a:pt x="6823415" y="1078446"/>
+                  </a:lnTo>
+                  <a:lnTo>
+                    <a:pt x="6753071" y="1076642"/>
+                  </a:lnTo>
+                  <a:lnTo>
+                    <a:pt x="6682726" y="1074782"/>
+                  </a:lnTo>
+                  <a:lnTo>
+                    <a:pt x="6612382" y="1072864"/>
+                  </a:lnTo>
+                  <a:lnTo>
+                    <a:pt x="6542037" y="1070886"/>
+                  </a:lnTo>
+                  <a:lnTo>
+                    <a:pt x="6471693" y="1068847"/>
+                  </a:lnTo>
+                  <a:lnTo>
+                    <a:pt x="6401348" y="1066744"/>
+                  </a:lnTo>
+                  <a:lnTo>
+                    <a:pt x="6331004" y="1064575"/>
+                  </a:lnTo>
+                  <a:lnTo>
+                    <a:pt x="6260659" y="1062339"/>
+                  </a:lnTo>
+                  <a:lnTo>
+                    <a:pt x="6190315" y="1060033"/>
+                  </a:lnTo>
+                  <a:lnTo>
+                    <a:pt x="6119970" y="1057656"/>
+                  </a:lnTo>
+                  <a:lnTo>
+                    <a:pt x="6049626" y="1055204"/>
+                  </a:lnTo>
+                  <a:lnTo>
+                    <a:pt x="5979281" y="1052676"/>
+                  </a:lnTo>
+                  <a:lnTo>
+                    <a:pt x="5908937" y="1050068"/>
+                  </a:lnTo>
+                  <a:lnTo>
+                    <a:pt x="5838592" y="1047380"/>
+                  </a:lnTo>
+                  <a:lnTo>
+                    <a:pt x="5768248" y="1044608"/>
+                  </a:lnTo>
+                  <a:lnTo>
+                    <a:pt x="5697903" y="1041749"/>
+                  </a:lnTo>
+                  <a:lnTo>
+                    <a:pt x="5627559" y="1038802"/>
+                  </a:lnTo>
+                  <a:lnTo>
+                    <a:pt x="5557214" y="1035762"/>
+                  </a:lnTo>
+                  <a:lnTo>
+                    <a:pt x="5486870" y="1032628"/>
+                  </a:lnTo>
+                  <a:lnTo>
+                    <a:pt x="5416525" y="1029396"/>
+                  </a:lnTo>
+                  <a:lnTo>
+                    <a:pt x="5346181" y="1026063"/>
+                  </a:lnTo>
+                  <a:lnTo>
+                    <a:pt x="5275836" y="1022627"/>
+                  </a:lnTo>
+                  <a:lnTo>
+                    <a:pt x="5205492" y="1019083"/>
+                  </a:lnTo>
+                  <a:lnTo>
+                    <a:pt x="5135147" y="1015429"/>
+                  </a:lnTo>
+                  <a:lnTo>
+                    <a:pt x="5064803" y="1011661"/>
+                  </a:lnTo>
+                  <a:lnTo>
+                    <a:pt x="4994458" y="1007775"/>
+                  </a:lnTo>
+                  <a:lnTo>
+                    <a:pt x="4924114" y="1003768"/>
+                  </a:lnTo>
+                  <a:lnTo>
+                    <a:pt x="4853769" y="999637"/>
+                  </a:lnTo>
+                  <a:lnTo>
+                    <a:pt x="4783425" y="995377"/>
+                  </a:lnTo>
+                  <a:lnTo>
+                    <a:pt x="4713080" y="990984"/>
+                  </a:lnTo>
+                  <a:lnTo>
+                    <a:pt x="4642736" y="986453"/>
+                  </a:lnTo>
+                  <a:lnTo>
+                    <a:pt x="4572391" y="981782"/>
+                  </a:lnTo>
+                  <a:lnTo>
+                    <a:pt x="4502047" y="976965"/>
+                  </a:lnTo>
+                  <a:lnTo>
+                    <a:pt x="4431702" y="971998"/>
+                  </a:lnTo>
+                  <a:lnTo>
+                    <a:pt x="4361358" y="966877"/>
+                  </a:lnTo>
+                  <a:lnTo>
+                    <a:pt x="4291013" y="961595"/>
+                  </a:lnTo>
+                  <a:lnTo>
+                    <a:pt x="4220669" y="956149"/>
+                  </a:lnTo>
+                  <a:lnTo>
+                    <a:pt x="4150324" y="950533"/>
+                  </a:lnTo>
+                  <a:lnTo>
+                    <a:pt x="4079980" y="944742"/>
+                  </a:lnTo>
+                  <a:lnTo>
+                    <a:pt x="4009635" y="938771"/>
+                  </a:lnTo>
+                  <a:lnTo>
+                    <a:pt x="3939291" y="932613"/>
+                  </a:lnTo>
+                  <a:lnTo>
+                    <a:pt x="3868946" y="926264"/>
+                  </a:lnTo>
+                  <a:lnTo>
+                    <a:pt x="3798602" y="919716"/>
+                  </a:lnTo>
+                  <a:lnTo>
+                    <a:pt x="3728257" y="912965"/>
+                  </a:lnTo>
+                  <a:lnTo>
+                    <a:pt x="3657913" y="906003"/>
+                  </a:lnTo>
+                  <a:lnTo>
+                    <a:pt x="3587569" y="898824"/>
+                  </a:lnTo>
+                  <a:lnTo>
+                    <a:pt x="3517224" y="891421"/>
+                  </a:lnTo>
+                  <a:lnTo>
+                    <a:pt x="3446880" y="883788"/>
+                  </a:lnTo>
+                  <a:lnTo>
+                    <a:pt x="3376535" y="875917"/>
+                  </a:lnTo>
+                  <a:lnTo>
+                    <a:pt x="3306191" y="867800"/>
+                  </a:lnTo>
+                  <a:lnTo>
+                    <a:pt x="3235846" y="859430"/>
+                  </a:lnTo>
+                  <a:lnTo>
+                    <a:pt x="3165502" y="850800"/>
+                  </a:lnTo>
+                  <a:lnTo>
+                    <a:pt x="3095157" y="841900"/>
+                  </a:lnTo>
+                  <a:lnTo>
+                    <a:pt x="3024813" y="836022"/>
+                  </a:lnTo>
+                  <a:lnTo>
+                    <a:pt x="2954468" y="833927"/>
+                  </a:lnTo>
+                  <a:lnTo>
+                    <a:pt x="2884124" y="831818"/>
+                  </a:lnTo>
+                  <a:lnTo>
+                    <a:pt x="2813779" y="829693"/>
+                  </a:lnTo>
+                  <a:lnTo>
+                    <a:pt x="2743435" y="827554"/>
+                  </a:lnTo>
+                  <a:lnTo>
+                    <a:pt x="2673090" y="825400"/>
+                  </a:lnTo>
+                  <a:lnTo>
+                    <a:pt x="2602746" y="823231"/>
+                  </a:lnTo>
+                  <a:lnTo>
+                    <a:pt x="2532401" y="821047"/>
+                  </a:lnTo>
+                  <a:lnTo>
+                    <a:pt x="2462057" y="818847"/>
+                  </a:lnTo>
+                  <a:lnTo>
+                    <a:pt x="2391712" y="816632"/>
+                  </a:lnTo>
+                  <a:lnTo>
+                    <a:pt x="2321368" y="814402"/>
+                  </a:lnTo>
+                  <a:lnTo>
+                    <a:pt x="2251023" y="812156"/>
+                  </a:lnTo>
+                  <a:lnTo>
+                    <a:pt x="2180679" y="809895"/>
+                  </a:lnTo>
+                  <a:lnTo>
+                    <a:pt x="2110334" y="807618"/>
+                  </a:lnTo>
+                  <a:lnTo>
+                    <a:pt x="2039990" y="805324"/>
+                  </a:lnTo>
+                  <a:lnTo>
+                    <a:pt x="1969645" y="803015"/>
+                  </a:lnTo>
+                  <a:lnTo>
+                    <a:pt x="1899301" y="800690"/>
+                  </a:lnTo>
+                  <a:lnTo>
+                    <a:pt x="1828956" y="798348"/>
+                  </a:lnTo>
+                  <a:lnTo>
+                    <a:pt x="1758612" y="795991"/>
+                  </a:lnTo>
+                  <a:lnTo>
+                    <a:pt x="1688267" y="793616"/>
+                  </a:lnTo>
+                  <a:lnTo>
+                    <a:pt x="1617923" y="791226"/>
+                  </a:lnTo>
+                  <a:lnTo>
+                    <a:pt x="1547578" y="788818"/>
+                  </a:lnTo>
+                  <a:lnTo>
+                    <a:pt x="1477234" y="786394"/>
+                  </a:lnTo>
+                  <a:lnTo>
+                    <a:pt x="1406889" y="783952"/>
+                  </a:lnTo>
+                  <a:lnTo>
+                    <a:pt x="1336545" y="781494"/>
+                  </a:lnTo>
+                  <a:lnTo>
+                    <a:pt x="1266200" y="779019"/>
+                  </a:lnTo>
+                  <a:lnTo>
+                    <a:pt x="1195856" y="776526"/>
+                  </a:lnTo>
+                  <a:lnTo>
+                    <a:pt x="1125511" y="774016"/>
+                  </a:lnTo>
+                  <a:lnTo>
+                    <a:pt x="1055167" y="771488"/>
+                  </a:lnTo>
+                  <a:lnTo>
+                    <a:pt x="984822" y="768943"/>
+                  </a:lnTo>
+                  <a:lnTo>
+                    <a:pt x="914478" y="766380"/>
+                  </a:lnTo>
+                  <a:lnTo>
+                    <a:pt x="844133" y="763799"/>
+                  </a:lnTo>
+                  <a:lnTo>
+                    <a:pt x="773789" y="761201"/>
+                  </a:lnTo>
+                  <a:lnTo>
+                    <a:pt x="703444" y="758584"/>
+                  </a:lnTo>
+                  <a:lnTo>
+                    <a:pt x="633100" y="755948"/>
+                  </a:lnTo>
+                  <a:lnTo>
+                    <a:pt x="562755" y="753295"/>
+                  </a:lnTo>
+                  <a:lnTo>
+                    <a:pt x="492411" y="750623"/>
+                  </a:lnTo>
+                  <a:lnTo>
+                    <a:pt x="422066" y="747932"/>
+                  </a:lnTo>
+                  <a:lnTo>
+                    <a:pt x="351722" y="745222"/>
+                  </a:lnTo>
+                  <a:lnTo>
+                    <a:pt x="281377" y="742494"/>
+                  </a:lnTo>
+                  <a:lnTo>
+                    <a:pt x="211033" y="739746"/>
+                  </a:lnTo>
+                  <a:lnTo>
+                    <a:pt x="140688" y="736980"/>
+                  </a:lnTo>
+                  <a:lnTo>
+                    <a:pt x="70344" y="734194"/>
+                  </a:lnTo>
+                  <a:lnTo>
+                    <a:pt x="0" y="731388"/>
                   </a:lnTo>
                   <a:close/>
                 </a:path>
@@ -3670,643 +3705,318 @@
         </p:sp>
         <p:sp>
           <p:nvSpPr>
-            <p:cNvPr id="23" name="pl23"/>
-            <p:cNvSpPr/>
-            <p:nvPr/>
-          </p:nvSpPr>
-          <p:spPr>
-            <a:xfrm>
-              <a:off x="1172049" y="2408482"/>
-              <a:ext cx="7090630" cy="2584994"/>
-            </a:xfrm>
-            <a:custGeom>
-              <a:avLst/>
-              <a:pathLst>
-                <a:path w="7090630" h="2584994">
-                  <a:moveTo>
-                    <a:pt x="0" y="0"/>
-                  </a:moveTo>
-                  <a:lnTo>
-                    <a:pt x="71622" y="95181"/>
-                  </a:lnTo>
-                  <a:lnTo>
-                    <a:pt x="143245" y="187485"/>
-                  </a:lnTo>
-                  <a:lnTo>
-                    <a:pt x="214867" y="276999"/>
-                  </a:lnTo>
-                  <a:lnTo>
-                    <a:pt x="286490" y="363807"/>
-                  </a:lnTo>
-                  <a:lnTo>
-                    <a:pt x="358112" y="447991"/>
-                  </a:lnTo>
-                  <a:lnTo>
-                    <a:pt x="429735" y="529631"/>
-                  </a:lnTo>
-                  <a:lnTo>
-                    <a:pt x="501357" y="608802"/>
-                  </a:lnTo>
-                  <a:lnTo>
-                    <a:pt x="572980" y="685581"/>
-                  </a:lnTo>
-                  <a:lnTo>
-                    <a:pt x="644602" y="760038"/>
-                  </a:lnTo>
-                  <a:lnTo>
-                    <a:pt x="716225" y="832245"/>
-                  </a:lnTo>
-                  <a:lnTo>
-                    <a:pt x="787847" y="902269"/>
-                  </a:lnTo>
-                  <a:lnTo>
-                    <a:pt x="859470" y="970177"/>
-                  </a:lnTo>
-                  <a:lnTo>
-                    <a:pt x="931092" y="1036031"/>
-                  </a:lnTo>
-                  <a:lnTo>
-                    <a:pt x="1002715" y="1099895"/>
-                  </a:lnTo>
-                  <a:lnTo>
-                    <a:pt x="1074337" y="1161829"/>
-                  </a:lnTo>
-                  <a:lnTo>
-                    <a:pt x="1145960" y="1221890"/>
-                  </a:lnTo>
-                  <a:lnTo>
-                    <a:pt x="1217582" y="1280136"/>
-                  </a:lnTo>
-                  <a:lnTo>
-                    <a:pt x="1289205" y="1336621"/>
-                  </a:lnTo>
-                  <a:lnTo>
-                    <a:pt x="1360827" y="1391399"/>
-                  </a:lnTo>
-                  <a:lnTo>
-                    <a:pt x="1432450" y="1444521"/>
-                  </a:lnTo>
-                  <a:lnTo>
-                    <a:pt x="1504073" y="1496037"/>
-                  </a:lnTo>
-                  <a:lnTo>
-                    <a:pt x="1575695" y="1545996"/>
-                  </a:lnTo>
-                  <a:lnTo>
-                    <a:pt x="1647318" y="1594445"/>
-                  </a:lnTo>
-                  <a:lnTo>
-                    <a:pt x="1718940" y="1641429"/>
-                  </a:lnTo>
-                  <a:lnTo>
-                    <a:pt x="1790563" y="1686993"/>
-                  </a:lnTo>
-                  <a:lnTo>
-                    <a:pt x="1862185" y="1731180"/>
-                  </a:lnTo>
-                  <a:lnTo>
-                    <a:pt x="1933808" y="1774031"/>
-                  </a:lnTo>
-                  <a:lnTo>
-                    <a:pt x="2005430" y="1815586"/>
-                  </a:lnTo>
-                  <a:lnTo>
-                    <a:pt x="2077053" y="1855886"/>
-                  </a:lnTo>
-                  <a:lnTo>
-                    <a:pt x="2148675" y="1894967"/>
-                  </a:lnTo>
-                  <a:lnTo>
-                    <a:pt x="2220298" y="1932867"/>
-                  </a:lnTo>
-                  <a:lnTo>
-                    <a:pt x="2291920" y="1969622"/>
-                  </a:lnTo>
-                  <a:lnTo>
-                    <a:pt x="2363543" y="2005265"/>
-                  </a:lnTo>
-                  <a:lnTo>
-                    <a:pt x="2435165" y="2039831"/>
-                  </a:lnTo>
-                  <a:lnTo>
-                    <a:pt x="2506788" y="2073352"/>
-                  </a:lnTo>
-                  <a:lnTo>
-                    <a:pt x="2578410" y="2105860"/>
-                  </a:lnTo>
-                  <a:lnTo>
-                    <a:pt x="2650033" y="2137385"/>
-                  </a:lnTo>
-                  <a:lnTo>
-                    <a:pt x="2721655" y="2167957"/>
-                  </a:lnTo>
-                  <a:lnTo>
-                    <a:pt x="2793278" y="2197605"/>
-                  </a:lnTo>
-                  <a:lnTo>
-                    <a:pt x="2864901" y="2226357"/>
-                  </a:lnTo>
-                  <a:lnTo>
-                    <a:pt x="2936523" y="2254240"/>
-                  </a:lnTo>
-                  <a:lnTo>
-                    <a:pt x="3008146" y="2281280"/>
-                  </a:lnTo>
-                  <a:lnTo>
-                    <a:pt x="3079768" y="2307502"/>
-                  </a:lnTo>
-                  <a:lnTo>
-                    <a:pt x="3151391" y="2322410"/>
-                  </a:lnTo>
-                  <a:lnTo>
-                    <a:pt x="3223013" y="2328135"/>
-                  </a:lnTo>
-                  <a:lnTo>
-                    <a:pt x="3294636" y="2333820"/>
-                  </a:lnTo>
-                  <a:lnTo>
-                    <a:pt x="3366258" y="2339466"/>
-                  </a:lnTo>
-                  <a:lnTo>
-                    <a:pt x="3437881" y="2345073"/>
-                  </a:lnTo>
-                  <a:lnTo>
-                    <a:pt x="3509503" y="2350642"/>
-                  </a:lnTo>
-                  <a:lnTo>
-                    <a:pt x="3581126" y="2356171"/>
-                  </a:lnTo>
-                  <a:lnTo>
-                    <a:pt x="3652748" y="2361662"/>
-                  </a:lnTo>
-                  <a:lnTo>
-                    <a:pt x="3724371" y="2367116"/>
-                  </a:lnTo>
-                  <a:lnTo>
-                    <a:pt x="3795993" y="2372531"/>
-                  </a:lnTo>
-                  <a:lnTo>
-                    <a:pt x="3867616" y="2377909"/>
-                  </a:lnTo>
-                  <a:lnTo>
-                    <a:pt x="3939238" y="2383249"/>
-                  </a:lnTo>
-                  <a:lnTo>
-                    <a:pt x="4010861" y="2388553"/>
-                  </a:lnTo>
-                  <a:lnTo>
-                    <a:pt x="4082483" y="2393820"/>
-                  </a:lnTo>
-                  <a:lnTo>
-                    <a:pt x="4154106" y="2399050"/>
-                  </a:lnTo>
-                  <a:lnTo>
-                    <a:pt x="4225729" y="2404245"/>
-                  </a:lnTo>
-                  <a:lnTo>
-                    <a:pt x="4297351" y="2409403"/>
-                  </a:lnTo>
-                  <a:lnTo>
-                    <a:pt x="4368974" y="2414525"/>
-                  </a:lnTo>
-                  <a:lnTo>
-                    <a:pt x="4440596" y="2419612"/>
-                  </a:lnTo>
-                  <a:lnTo>
-                    <a:pt x="4512219" y="2424664"/>
-                  </a:lnTo>
-                  <a:lnTo>
-                    <a:pt x="4583841" y="2429681"/>
-                  </a:lnTo>
-                  <a:lnTo>
-                    <a:pt x="4655464" y="2434662"/>
-                  </a:lnTo>
-                  <a:lnTo>
-                    <a:pt x="4727086" y="2439610"/>
-                  </a:lnTo>
-                  <a:lnTo>
-                    <a:pt x="4798709" y="2444523"/>
-                  </a:lnTo>
-                  <a:lnTo>
-                    <a:pt x="4870331" y="2449402"/>
-                  </a:lnTo>
-                  <a:lnTo>
-                    <a:pt x="4941954" y="2454247"/>
-                  </a:lnTo>
-                  <a:lnTo>
-                    <a:pt x="5013576" y="2459059"/>
-                  </a:lnTo>
-                  <a:lnTo>
-                    <a:pt x="5085199" y="2463838"/>
-                  </a:lnTo>
-                  <a:lnTo>
-                    <a:pt x="5156821" y="2468583"/>
-                  </a:lnTo>
-                  <a:lnTo>
-                    <a:pt x="5228444" y="2473295"/>
-                  </a:lnTo>
-                  <a:lnTo>
-                    <a:pt x="5300066" y="2477975"/>
-                  </a:lnTo>
-                  <a:lnTo>
-                    <a:pt x="5371689" y="2482623"/>
-                  </a:lnTo>
-                  <a:lnTo>
-                    <a:pt x="5443311" y="2487238"/>
-                  </a:lnTo>
-                  <a:lnTo>
-                    <a:pt x="5514934" y="2491821"/>
-                  </a:lnTo>
-                  <a:lnTo>
-                    <a:pt x="5586557" y="2496372"/>
-                  </a:lnTo>
-                  <a:lnTo>
-                    <a:pt x="5658179" y="2500892"/>
-                  </a:lnTo>
-                  <a:lnTo>
-                    <a:pt x="5729802" y="2505381"/>
-                  </a:lnTo>
-                  <a:lnTo>
-                    <a:pt x="5801424" y="2509838"/>
-                  </a:lnTo>
-                  <a:lnTo>
-                    <a:pt x="5873047" y="2514265"/>
-                  </a:lnTo>
-                  <a:lnTo>
-                    <a:pt x="5944669" y="2518661"/>
-                  </a:lnTo>
-                  <a:lnTo>
-                    <a:pt x="6016292" y="2523026"/>
-                  </a:lnTo>
-                  <a:lnTo>
-                    <a:pt x="6087914" y="2527362"/>
-                  </a:lnTo>
-                  <a:lnTo>
-                    <a:pt x="6159537" y="2531667"/>
-                  </a:lnTo>
-                  <a:lnTo>
-                    <a:pt x="6231159" y="2535942"/>
-                  </a:lnTo>
-                  <a:lnTo>
-                    <a:pt x="6302782" y="2540188"/>
-                  </a:lnTo>
-                  <a:lnTo>
-                    <a:pt x="6374404" y="2544404"/>
-                  </a:lnTo>
-                  <a:lnTo>
-                    <a:pt x="6446027" y="2548591"/>
-                  </a:lnTo>
-                  <a:lnTo>
-                    <a:pt x="6517649" y="2552749"/>
-                  </a:lnTo>
-                  <a:lnTo>
-                    <a:pt x="6589272" y="2556879"/>
-                  </a:lnTo>
-                  <a:lnTo>
-                    <a:pt x="6660894" y="2560979"/>
-                  </a:lnTo>
-                  <a:lnTo>
-                    <a:pt x="6732517" y="2565052"/>
-                  </a:lnTo>
-                  <a:lnTo>
-                    <a:pt x="6804139" y="2569096"/>
-                  </a:lnTo>
-                  <a:lnTo>
-                    <a:pt x="6875762" y="2573112"/>
-                  </a:lnTo>
-                  <a:lnTo>
-                    <a:pt x="6947385" y="2577100"/>
-                  </a:lnTo>
-                  <a:lnTo>
-                    <a:pt x="7019007" y="2581061"/>
-                  </a:lnTo>
-                  <a:lnTo>
-                    <a:pt x="7090630" y="2584994"/>
-                  </a:lnTo>
-                </a:path>
-              </a:pathLst>
-            </a:custGeom>
-          </p:spPr>
-          <p:txBody>
-            <a:bodyPr/>
-            <a:lstStyle/>
-            <a:p/>
-          </p:txBody>
-        </p:sp>
-        <p:sp>
-          <p:nvSpPr>
             <p:cNvPr id="24" name="pl24"/>
             <p:cNvSpPr/>
             <p:nvPr/>
           </p:nvSpPr>
           <p:spPr>
             <a:xfrm>
-              <a:off x="1172049" y="4435183"/>
-              <a:ext cx="7090630" cy="971256"/>
+              <a:off x="1235312" y="2263978"/>
+              <a:ext cx="6964104" cy="932863"/>
             </a:xfrm>
             <a:custGeom>
               <a:avLst/>
               <a:pathLst>
-                <a:path w="7090630" h="971256">
+                <a:path w="6964104" h="932863">
                   <a:moveTo>
-                    <a:pt x="7090630" y="971256"/>
+                    <a:pt x="0" y="0"/>
                   </a:moveTo>
                   <a:lnTo>
-                    <a:pt x="7019007" y="966555"/>
-                  </a:lnTo>
-                  <a:lnTo>
-                    <a:pt x="6947385" y="961708"/>
-                  </a:lnTo>
-                  <a:lnTo>
-                    <a:pt x="6875762" y="956709"/>
-                  </a:lnTo>
-                  <a:lnTo>
-                    <a:pt x="6804139" y="951555"/>
-                  </a:lnTo>
-                  <a:lnTo>
-                    <a:pt x="6732517" y="946240"/>
-                  </a:lnTo>
-                  <a:lnTo>
-                    <a:pt x="6660894" y="940760"/>
-                  </a:lnTo>
-                  <a:lnTo>
-                    <a:pt x="6589272" y="935108"/>
-                  </a:lnTo>
-                  <a:lnTo>
-                    <a:pt x="6517649" y="929281"/>
-                  </a:lnTo>
-                  <a:lnTo>
-                    <a:pt x="6446027" y="923272"/>
-                  </a:lnTo>
-                  <a:lnTo>
-                    <a:pt x="6374404" y="917075"/>
-                  </a:lnTo>
-                  <a:lnTo>
-                    <a:pt x="6302782" y="910686"/>
-                  </a:lnTo>
-                  <a:lnTo>
-                    <a:pt x="6231159" y="904097"/>
-                  </a:lnTo>
-                  <a:lnTo>
-                    <a:pt x="6159537" y="897303"/>
-                  </a:lnTo>
-                  <a:lnTo>
-                    <a:pt x="6087914" y="890297"/>
-                  </a:lnTo>
-                  <a:lnTo>
-                    <a:pt x="6016292" y="883072"/>
-                  </a:lnTo>
-                  <a:lnTo>
-                    <a:pt x="5944669" y="875623"/>
-                  </a:lnTo>
-                  <a:lnTo>
-                    <a:pt x="5873047" y="867941"/>
-                  </a:lnTo>
-                  <a:lnTo>
-                    <a:pt x="5801424" y="860020"/>
-                  </a:lnTo>
-                  <a:lnTo>
-                    <a:pt x="5729802" y="851852"/>
-                  </a:lnTo>
-                  <a:lnTo>
-                    <a:pt x="5658179" y="843429"/>
-                  </a:lnTo>
-                  <a:lnTo>
-                    <a:pt x="5586557" y="834744"/>
-                  </a:lnTo>
-                  <a:lnTo>
-                    <a:pt x="5514934" y="825788"/>
-                  </a:lnTo>
-                  <a:lnTo>
-                    <a:pt x="5443311" y="816553"/>
-                  </a:lnTo>
-                  <a:lnTo>
-                    <a:pt x="5371689" y="807030"/>
-                  </a:lnTo>
-                  <a:lnTo>
-                    <a:pt x="5300066" y="797211"/>
-                  </a:lnTo>
-                  <a:lnTo>
-                    <a:pt x="5228444" y="787085"/>
-                  </a:lnTo>
-                  <a:lnTo>
-                    <a:pt x="5156821" y="776643"/>
-                  </a:lnTo>
-                  <a:lnTo>
-                    <a:pt x="5085199" y="765876"/>
-                  </a:lnTo>
-                  <a:lnTo>
-                    <a:pt x="5013576" y="754774"/>
-                  </a:lnTo>
-                  <a:lnTo>
-                    <a:pt x="4941954" y="743325"/>
-                  </a:lnTo>
-                  <a:lnTo>
-                    <a:pt x="4870331" y="731520"/>
-                  </a:lnTo>
-                  <a:lnTo>
-                    <a:pt x="4798709" y="719346"/>
-                  </a:lnTo>
-                  <a:lnTo>
-                    <a:pt x="4727086" y="706793"/>
-                  </a:lnTo>
-                  <a:lnTo>
-                    <a:pt x="4655464" y="693849"/>
-                  </a:lnTo>
-                  <a:lnTo>
-                    <a:pt x="4583841" y="680501"/>
-                  </a:lnTo>
-                  <a:lnTo>
-                    <a:pt x="4512219" y="666738"/>
-                  </a:lnTo>
-                  <a:lnTo>
-                    <a:pt x="4440596" y="652545"/>
-                  </a:lnTo>
-                  <a:lnTo>
-                    <a:pt x="4368974" y="637910"/>
-                  </a:lnTo>
-                  <a:lnTo>
-                    <a:pt x="4297351" y="622819"/>
-                  </a:lnTo>
-                  <a:lnTo>
-                    <a:pt x="4225729" y="607257"/>
-                  </a:lnTo>
-                  <a:lnTo>
-                    <a:pt x="4154106" y="591210"/>
-                  </a:lnTo>
-                  <a:lnTo>
-                    <a:pt x="4082483" y="574663"/>
-                  </a:lnTo>
-                  <a:lnTo>
-                    <a:pt x="4010861" y="557600"/>
-                  </a:lnTo>
-                  <a:lnTo>
-                    <a:pt x="3939238" y="540006"/>
-                  </a:lnTo>
-                  <a:lnTo>
-                    <a:pt x="3867616" y="521863"/>
-                  </a:lnTo>
-                  <a:lnTo>
-                    <a:pt x="3795993" y="503154"/>
-                  </a:lnTo>
-                  <a:lnTo>
-                    <a:pt x="3724371" y="483863"/>
-                  </a:lnTo>
-                  <a:lnTo>
-                    <a:pt x="3652748" y="463970"/>
-                  </a:lnTo>
-                  <a:lnTo>
-                    <a:pt x="3581126" y="443457"/>
-                  </a:lnTo>
-                  <a:lnTo>
-                    <a:pt x="3509503" y="422304"/>
-                  </a:lnTo>
-                  <a:lnTo>
-                    <a:pt x="3437881" y="400492"/>
-                  </a:lnTo>
-                  <a:lnTo>
-                    <a:pt x="3366258" y="378001"/>
-                  </a:lnTo>
-                  <a:lnTo>
-                    <a:pt x="3294636" y="354808"/>
-                  </a:lnTo>
-                  <a:lnTo>
-                    <a:pt x="3223013" y="330892"/>
-                  </a:lnTo>
-                  <a:lnTo>
-                    <a:pt x="3151391" y="306231"/>
-                  </a:lnTo>
-                  <a:lnTo>
-                    <a:pt x="3079768" y="289944"/>
-                  </a:lnTo>
-                  <a:lnTo>
-                    <a:pt x="3008146" y="284138"/>
-                  </a:lnTo>
-                  <a:lnTo>
-                    <a:pt x="2936523" y="278293"/>
-                  </a:lnTo>
-                  <a:lnTo>
-                    <a:pt x="2864901" y="272406"/>
-                  </a:lnTo>
-                  <a:lnTo>
-                    <a:pt x="2793278" y="266478"/>
-                  </a:lnTo>
-                  <a:lnTo>
-                    <a:pt x="2721655" y="260509"/>
-                  </a:lnTo>
-                  <a:lnTo>
-                    <a:pt x="2650033" y="254499"/>
-                  </a:lnTo>
-                  <a:lnTo>
-                    <a:pt x="2578410" y="248446"/>
-                  </a:lnTo>
-                  <a:lnTo>
-                    <a:pt x="2506788" y="242351"/>
-                  </a:lnTo>
-                  <a:lnTo>
-                    <a:pt x="2435165" y="236214"/>
-                  </a:lnTo>
-                  <a:lnTo>
-                    <a:pt x="2363543" y="230034"/>
-                  </a:lnTo>
-                  <a:lnTo>
-                    <a:pt x="2291920" y="223811"/>
-                  </a:lnTo>
-                  <a:lnTo>
-                    <a:pt x="2220298" y="217544"/>
-                  </a:lnTo>
-                  <a:lnTo>
-                    <a:pt x="2148675" y="211233"/>
-                  </a:lnTo>
-                  <a:lnTo>
-                    <a:pt x="2077053" y="204879"/>
-                  </a:lnTo>
-                  <a:lnTo>
-                    <a:pt x="2005430" y="198480"/>
-                  </a:lnTo>
-                  <a:lnTo>
-                    <a:pt x="1933808" y="192037"/>
-                  </a:lnTo>
-                  <a:lnTo>
-                    <a:pt x="1862185" y="185549"/>
-                  </a:lnTo>
-                  <a:lnTo>
-                    <a:pt x="1790563" y="179015"/>
-                  </a:lnTo>
-                  <a:lnTo>
-                    <a:pt x="1718940" y="172436"/>
-                  </a:lnTo>
-                  <a:lnTo>
-                    <a:pt x="1647318" y="165811"/>
-                  </a:lnTo>
-                  <a:lnTo>
-                    <a:pt x="1575695" y="159139"/>
-                  </a:lnTo>
-                  <a:lnTo>
-                    <a:pt x="1504073" y="152421"/>
-                  </a:lnTo>
-                  <a:lnTo>
-                    <a:pt x="1432450" y="145657"/>
-                  </a:lnTo>
-                  <a:lnTo>
-                    <a:pt x="1360827" y="138845"/>
-                  </a:lnTo>
-                  <a:lnTo>
-                    <a:pt x="1289205" y="131985"/>
-                  </a:lnTo>
-                  <a:lnTo>
-                    <a:pt x="1217582" y="125078"/>
-                  </a:lnTo>
-                  <a:lnTo>
-                    <a:pt x="1145960" y="118123"/>
-                  </a:lnTo>
-                  <a:lnTo>
-                    <a:pt x="1074337" y="111119"/>
-                  </a:lnTo>
-                  <a:lnTo>
-                    <a:pt x="1002715" y="104066"/>
-                  </a:lnTo>
-                  <a:lnTo>
-                    <a:pt x="931092" y="96964"/>
-                  </a:lnTo>
-                  <a:lnTo>
-                    <a:pt x="859470" y="89812"/>
-                  </a:lnTo>
-                  <a:lnTo>
-                    <a:pt x="787847" y="82610"/>
-                  </a:lnTo>
-                  <a:lnTo>
-                    <a:pt x="716225" y="75359"/>
-                  </a:lnTo>
-                  <a:lnTo>
-                    <a:pt x="644602" y="68056"/>
-                  </a:lnTo>
-                  <a:lnTo>
-                    <a:pt x="572980" y="60703"/>
-                  </a:lnTo>
-                  <a:lnTo>
-                    <a:pt x="501357" y="53298"/>
-                  </a:lnTo>
-                  <a:lnTo>
-                    <a:pt x="429735" y="45842"/>
-                  </a:lnTo>
-                  <a:lnTo>
-                    <a:pt x="358112" y="38334"/>
-                  </a:lnTo>
-                  <a:lnTo>
-                    <a:pt x="286490" y="30773"/>
-                  </a:lnTo>
-                  <a:lnTo>
-                    <a:pt x="214867" y="23160"/>
-                  </a:lnTo>
-                  <a:lnTo>
-                    <a:pt x="143245" y="15493"/>
-                  </a:lnTo>
-                  <a:lnTo>
-                    <a:pt x="71622" y="7773"/>
-                  </a:lnTo>
-                  <a:lnTo>
-                    <a:pt x="0" y="0"/>
+                    <a:pt x="70344" y="34348"/>
+                  </a:lnTo>
+                  <a:lnTo>
+                    <a:pt x="140688" y="67659"/>
+                  </a:lnTo>
+                  <a:lnTo>
+                    <a:pt x="211033" y="99962"/>
+                  </a:lnTo>
+                  <a:lnTo>
+                    <a:pt x="281377" y="131289"/>
+                  </a:lnTo>
+                  <a:lnTo>
+                    <a:pt x="351722" y="161669"/>
+                  </a:lnTo>
+                  <a:lnTo>
+                    <a:pt x="422066" y="191131"/>
+                  </a:lnTo>
+                  <a:lnTo>
+                    <a:pt x="492411" y="219702"/>
+                  </a:lnTo>
+                  <a:lnTo>
+                    <a:pt x="562755" y="247410"/>
+                  </a:lnTo>
+                  <a:lnTo>
+                    <a:pt x="633100" y="274280"/>
+                  </a:lnTo>
+                  <a:lnTo>
+                    <a:pt x="703444" y="300337"/>
+                  </a:lnTo>
+                  <a:lnTo>
+                    <a:pt x="773789" y="325607"/>
+                  </a:lnTo>
+                  <a:lnTo>
+                    <a:pt x="844133" y="350114"/>
+                  </a:lnTo>
+                  <a:lnTo>
+                    <a:pt x="914478" y="373879"/>
+                  </a:lnTo>
+                  <a:lnTo>
+                    <a:pt x="984822" y="396926"/>
+                  </a:lnTo>
+                  <a:lnTo>
+                    <a:pt x="1055167" y="419276"/>
+                  </a:lnTo>
+                  <a:lnTo>
+                    <a:pt x="1125511" y="440951"/>
+                  </a:lnTo>
+                  <a:lnTo>
+                    <a:pt x="1195856" y="461971"/>
+                  </a:lnTo>
+                  <a:lnTo>
+                    <a:pt x="1266200" y="482355"/>
+                  </a:lnTo>
+                  <a:lnTo>
+                    <a:pt x="1336545" y="502123"/>
+                  </a:lnTo>
+                  <a:lnTo>
+                    <a:pt x="1406889" y="521293"/>
+                  </a:lnTo>
+                  <a:lnTo>
+                    <a:pt x="1477234" y="539884"/>
+                  </a:lnTo>
+                  <a:lnTo>
+                    <a:pt x="1547578" y="557913"/>
+                  </a:lnTo>
+                  <a:lnTo>
+                    <a:pt x="1617923" y="575397"/>
+                  </a:lnTo>
+                  <a:lnTo>
+                    <a:pt x="1688267" y="592353"/>
+                  </a:lnTo>
+                  <a:lnTo>
+                    <a:pt x="1758612" y="608796"/>
+                  </a:lnTo>
+                  <a:lnTo>
+                    <a:pt x="1828956" y="624742"/>
+                  </a:lnTo>
+                  <a:lnTo>
+                    <a:pt x="1899301" y="640206"/>
+                  </a:lnTo>
+                  <a:lnTo>
+                    <a:pt x="1969645" y="655202"/>
+                  </a:lnTo>
+                  <a:lnTo>
+                    <a:pt x="2039990" y="669745"/>
+                  </a:lnTo>
+                  <a:lnTo>
+                    <a:pt x="2110334" y="683849"/>
+                  </a:lnTo>
+                  <a:lnTo>
+                    <a:pt x="2180679" y="697526"/>
+                  </a:lnTo>
+                  <a:lnTo>
+                    <a:pt x="2251023" y="710790"/>
+                  </a:lnTo>
+                  <a:lnTo>
+                    <a:pt x="2321368" y="723653"/>
+                  </a:lnTo>
+                  <a:lnTo>
+                    <a:pt x="2391712" y="736127"/>
+                  </a:lnTo>
+                  <a:lnTo>
+                    <a:pt x="2462057" y="748224"/>
+                  </a:lnTo>
+                  <a:lnTo>
+                    <a:pt x="2532401" y="759955"/>
+                  </a:lnTo>
+                  <a:lnTo>
+                    <a:pt x="2602746" y="771332"/>
+                  </a:lnTo>
+                  <a:lnTo>
+                    <a:pt x="2673090" y="782364"/>
+                  </a:lnTo>
+                  <a:lnTo>
+                    <a:pt x="2743435" y="793064"/>
+                  </a:lnTo>
+                  <a:lnTo>
+                    <a:pt x="2813779" y="803440"/>
+                  </a:lnTo>
+                  <a:lnTo>
+                    <a:pt x="2884124" y="813502"/>
+                  </a:lnTo>
+                  <a:lnTo>
+                    <a:pt x="2954468" y="823260"/>
+                  </a:lnTo>
+                  <a:lnTo>
+                    <a:pt x="3024813" y="832723"/>
+                  </a:lnTo>
+                  <a:lnTo>
+                    <a:pt x="3095157" y="838103"/>
+                  </a:lnTo>
+                  <a:lnTo>
+                    <a:pt x="3165502" y="840169"/>
+                  </a:lnTo>
+                  <a:lnTo>
+                    <a:pt x="3235846" y="842221"/>
+                  </a:lnTo>
+                  <a:lnTo>
+                    <a:pt x="3306191" y="844258"/>
+                  </a:lnTo>
+                  <a:lnTo>
+                    <a:pt x="3376535" y="846282"/>
+                  </a:lnTo>
+                  <a:lnTo>
+                    <a:pt x="3446880" y="848291"/>
+                  </a:lnTo>
+                  <a:lnTo>
+                    <a:pt x="3517224" y="850286"/>
+                  </a:lnTo>
+                  <a:lnTo>
+                    <a:pt x="3587569" y="852268"/>
+                  </a:lnTo>
+                  <a:lnTo>
+                    <a:pt x="3657913" y="854236"/>
+                  </a:lnTo>
+                  <a:lnTo>
+                    <a:pt x="3728257" y="856190"/>
+                  </a:lnTo>
+                  <a:lnTo>
+                    <a:pt x="3798602" y="858131"/>
+                  </a:lnTo>
+                  <a:lnTo>
+                    <a:pt x="3868946" y="860058"/>
+                  </a:lnTo>
+                  <a:lnTo>
+                    <a:pt x="3939291" y="861972"/>
+                  </a:lnTo>
+                  <a:lnTo>
+                    <a:pt x="4009635" y="863873"/>
+                  </a:lnTo>
+                  <a:lnTo>
+                    <a:pt x="4079980" y="865761"/>
+                  </a:lnTo>
+                  <a:lnTo>
+                    <a:pt x="4150324" y="867635"/>
+                  </a:lnTo>
+                  <a:lnTo>
+                    <a:pt x="4220669" y="869496"/>
+                  </a:lnTo>
+                  <a:lnTo>
+                    <a:pt x="4291013" y="871345"/>
+                  </a:lnTo>
+                  <a:lnTo>
+                    <a:pt x="4361358" y="873181"/>
+                  </a:lnTo>
+                  <a:lnTo>
+                    <a:pt x="4431702" y="875004"/>
+                  </a:lnTo>
+                  <a:lnTo>
+                    <a:pt x="4502047" y="876814"/>
+                  </a:lnTo>
+                  <a:lnTo>
+                    <a:pt x="4572391" y="878612"/>
+                  </a:lnTo>
+                  <a:lnTo>
+                    <a:pt x="4642736" y="880397"/>
+                  </a:lnTo>
+                  <a:lnTo>
+                    <a:pt x="4713080" y="882171"/>
+                  </a:lnTo>
+                  <a:lnTo>
+                    <a:pt x="4783425" y="883931"/>
+                  </a:lnTo>
+                  <a:lnTo>
+                    <a:pt x="4853769" y="885680"/>
+                  </a:lnTo>
+                  <a:lnTo>
+                    <a:pt x="4924114" y="887416"/>
+                  </a:lnTo>
+                  <a:lnTo>
+                    <a:pt x="4994458" y="889141"/>
+                  </a:lnTo>
+                  <a:lnTo>
+                    <a:pt x="5064803" y="890853"/>
+                  </a:lnTo>
+                  <a:lnTo>
+                    <a:pt x="5135147" y="892554"/>
+                  </a:lnTo>
+                  <a:lnTo>
+                    <a:pt x="5205492" y="894243"/>
+                  </a:lnTo>
+                  <a:lnTo>
+                    <a:pt x="5275836" y="895920"/>
+                  </a:lnTo>
+                  <a:lnTo>
+                    <a:pt x="5346181" y="897585"/>
+                  </a:lnTo>
+                  <a:lnTo>
+                    <a:pt x="5416525" y="899239"/>
+                  </a:lnTo>
+                  <a:lnTo>
+                    <a:pt x="5486870" y="900882"/>
+                  </a:lnTo>
+                  <a:lnTo>
+                    <a:pt x="5557214" y="902513"/>
+                  </a:lnTo>
+                  <a:lnTo>
+                    <a:pt x="5627559" y="904133"/>
+                  </a:lnTo>
+                  <a:lnTo>
+                    <a:pt x="5697903" y="905741"/>
+                  </a:lnTo>
+                  <a:lnTo>
+                    <a:pt x="5768248" y="907339"/>
+                  </a:lnTo>
+                  <a:lnTo>
+                    <a:pt x="5838592" y="908925"/>
+                  </a:lnTo>
+                  <a:lnTo>
+                    <a:pt x="5908937" y="910501"/>
+                  </a:lnTo>
+                  <a:lnTo>
+                    <a:pt x="5979281" y="912065"/>
+                  </a:lnTo>
+                  <a:lnTo>
+                    <a:pt x="6049626" y="913619"/>
+                  </a:lnTo>
+                  <a:lnTo>
+                    <a:pt x="6119970" y="915162"/>
+                  </a:lnTo>
+                  <a:lnTo>
+                    <a:pt x="6190315" y="916694"/>
+                  </a:lnTo>
+                  <a:lnTo>
+                    <a:pt x="6260659" y="918215"/>
+                  </a:lnTo>
+                  <a:lnTo>
+                    <a:pt x="6331004" y="919726"/>
+                  </a:lnTo>
+                  <a:lnTo>
+                    <a:pt x="6401348" y="921227"/>
+                  </a:lnTo>
+                  <a:lnTo>
+                    <a:pt x="6471693" y="922717"/>
+                  </a:lnTo>
+                  <a:lnTo>
+                    <a:pt x="6542037" y="924197"/>
+                  </a:lnTo>
+                  <a:lnTo>
+                    <a:pt x="6612382" y="925666"/>
+                  </a:lnTo>
+                  <a:lnTo>
+                    <a:pt x="6682726" y="927126"/>
+                  </a:lnTo>
+                  <a:lnTo>
+                    <a:pt x="6753071" y="928575"/>
+                  </a:lnTo>
+                  <a:lnTo>
+                    <a:pt x="6823415" y="930014"/>
+                  </a:lnTo>
+                  <a:lnTo>
+                    <a:pt x="6893760" y="931444"/>
+                  </a:lnTo>
+                  <a:lnTo>
+                    <a:pt x="6964104" y="932863"/>
                   </a:lnTo>
                 </a:path>
               </a:pathLst>
@@ -4326,312 +4036,637 @@
           </p:nvSpPr>
           <p:spPr>
             <a:xfrm>
-              <a:off x="1172049" y="3677589"/>
-              <a:ext cx="7090630" cy="1588074"/>
+              <a:off x="1235312" y="2995367"/>
+              <a:ext cx="6964104" cy="350503"/>
             </a:xfrm>
             <a:custGeom>
               <a:avLst/>
               <a:pathLst>
-                <a:path w="7090630" h="1588074">
+                <a:path w="6964104" h="350503">
+                  <a:moveTo>
+                    <a:pt x="6964104" y="350503"/>
+                  </a:moveTo>
+                  <a:lnTo>
+                    <a:pt x="6893760" y="348807"/>
+                  </a:lnTo>
+                  <a:lnTo>
+                    <a:pt x="6823415" y="347057"/>
+                  </a:lnTo>
+                  <a:lnTo>
+                    <a:pt x="6753071" y="345254"/>
+                  </a:lnTo>
+                  <a:lnTo>
+                    <a:pt x="6682726" y="343394"/>
+                  </a:lnTo>
+                  <a:lnTo>
+                    <a:pt x="6612382" y="341476"/>
+                  </a:lnTo>
+                  <a:lnTo>
+                    <a:pt x="6542037" y="339498"/>
+                  </a:lnTo>
+                  <a:lnTo>
+                    <a:pt x="6471693" y="337458"/>
+                  </a:lnTo>
+                  <a:lnTo>
+                    <a:pt x="6401348" y="335355"/>
+                  </a:lnTo>
+                  <a:lnTo>
+                    <a:pt x="6331004" y="333187"/>
+                  </a:lnTo>
+                  <a:lnTo>
+                    <a:pt x="6260659" y="330951"/>
+                  </a:lnTo>
+                  <a:lnTo>
+                    <a:pt x="6190315" y="328645"/>
+                  </a:lnTo>
+                  <a:lnTo>
+                    <a:pt x="6119970" y="326267"/>
+                  </a:lnTo>
+                  <a:lnTo>
+                    <a:pt x="6049626" y="323815"/>
+                  </a:lnTo>
+                  <a:lnTo>
+                    <a:pt x="5979281" y="321287"/>
+                  </a:lnTo>
+                  <a:lnTo>
+                    <a:pt x="5908937" y="318680"/>
+                  </a:lnTo>
+                  <a:lnTo>
+                    <a:pt x="5838592" y="315991"/>
+                  </a:lnTo>
+                  <a:lnTo>
+                    <a:pt x="5768248" y="313219"/>
+                  </a:lnTo>
+                  <a:lnTo>
+                    <a:pt x="5697903" y="310361"/>
+                  </a:lnTo>
+                  <a:lnTo>
+                    <a:pt x="5627559" y="307413"/>
+                  </a:lnTo>
+                  <a:lnTo>
+                    <a:pt x="5557214" y="304374"/>
+                  </a:lnTo>
+                  <a:lnTo>
+                    <a:pt x="5486870" y="301239"/>
+                  </a:lnTo>
+                  <a:lnTo>
+                    <a:pt x="5416525" y="298007"/>
+                  </a:lnTo>
+                  <a:lnTo>
+                    <a:pt x="5346181" y="294675"/>
+                  </a:lnTo>
+                  <a:lnTo>
+                    <a:pt x="5275836" y="291238"/>
+                  </a:lnTo>
+                  <a:lnTo>
+                    <a:pt x="5205492" y="287694"/>
+                  </a:lnTo>
+                  <a:lnTo>
+                    <a:pt x="5135147" y="284040"/>
+                  </a:lnTo>
+                  <a:lnTo>
+                    <a:pt x="5064803" y="280272"/>
+                  </a:lnTo>
+                  <a:lnTo>
+                    <a:pt x="4994458" y="276386"/>
+                  </a:lnTo>
+                  <a:lnTo>
+                    <a:pt x="4924114" y="272380"/>
+                  </a:lnTo>
+                  <a:lnTo>
+                    <a:pt x="4853769" y="268248"/>
+                  </a:lnTo>
+                  <a:lnTo>
+                    <a:pt x="4783425" y="263988"/>
+                  </a:lnTo>
+                  <a:lnTo>
+                    <a:pt x="4713080" y="259595"/>
+                  </a:lnTo>
+                  <a:lnTo>
+                    <a:pt x="4642736" y="255065"/>
+                  </a:lnTo>
+                  <a:lnTo>
+                    <a:pt x="4572391" y="250394"/>
+                  </a:lnTo>
+                  <a:lnTo>
+                    <a:pt x="4502047" y="245577"/>
+                  </a:lnTo>
+                  <a:lnTo>
+                    <a:pt x="4431702" y="240610"/>
+                  </a:lnTo>
+                  <a:lnTo>
+                    <a:pt x="4361358" y="235488"/>
+                  </a:lnTo>
+                  <a:lnTo>
+                    <a:pt x="4291013" y="230206"/>
+                  </a:lnTo>
+                  <a:lnTo>
+                    <a:pt x="4220669" y="224760"/>
+                  </a:lnTo>
+                  <a:lnTo>
+                    <a:pt x="4150324" y="219144"/>
+                  </a:lnTo>
+                  <a:lnTo>
+                    <a:pt x="4079980" y="213354"/>
+                  </a:lnTo>
+                  <a:lnTo>
+                    <a:pt x="4009635" y="207382"/>
+                  </a:lnTo>
+                  <a:lnTo>
+                    <a:pt x="3939291" y="201225"/>
+                  </a:lnTo>
+                  <a:lnTo>
+                    <a:pt x="3868946" y="194875"/>
+                  </a:lnTo>
+                  <a:lnTo>
+                    <a:pt x="3798602" y="188328"/>
+                  </a:lnTo>
+                  <a:lnTo>
+                    <a:pt x="3728257" y="181576"/>
+                  </a:lnTo>
+                  <a:lnTo>
+                    <a:pt x="3657913" y="174614"/>
+                  </a:lnTo>
+                  <a:lnTo>
+                    <a:pt x="3587569" y="167435"/>
+                  </a:lnTo>
+                  <a:lnTo>
+                    <a:pt x="3517224" y="160033"/>
+                  </a:lnTo>
+                  <a:lnTo>
+                    <a:pt x="3446880" y="152399"/>
+                  </a:lnTo>
+                  <a:lnTo>
+                    <a:pt x="3376535" y="144528"/>
+                  </a:lnTo>
+                  <a:lnTo>
+                    <a:pt x="3306191" y="136411"/>
+                  </a:lnTo>
+                  <a:lnTo>
+                    <a:pt x="3235846" y="128041"/>
+                  </a:lnTo>
+                  <a:lnTo>
+                    <a:pt x="3165502" y="119411"/>
+                  </a:lnTo>
+                  <a:lnTo>
+                    <a:pt x="3095157" y="110511"/>
+                  </a:lnTo>
+                  <a:lnTo>
+                    <a:pt x="3024813" y="104634"/>
+                  </a:lnTo>
+                  <a:lnTo>
+                    <a:pt x="2954468" y="102539"/>
+                  </a:lnTo>
+                  <a:lnTo>
+                    <a:pt x="2884124" y="100429"/>
+                  </a:lnTo>
+                  <a:lnTo>
+                    <a:pt x="2813779" y="98305"/>
+                  </a:lnTo>
+                  <a:lnTo>
+                    <a:pt x="2743435" y="96165"/>
+                  </a:lnTo>
+                  <a:lnTo>
+                    <a:pt x="2673090" y="94011"/>
+                  </a:lnTo>
+                  <a:lnTo>
+                    <a:pt x="2602746" y="91842"/>
+                  </a:lnTo>
+                  <a:lnTo>
+                    <a:pt x="2532401" y="89658"/>
+                  </a:lnTo>
+                  <a:lnTo>
+                    <a:pt x="2462057" y="87459"/>
+                  </a:lnTo>
+                  <a:lnTo>
+                    <a:pt x="2391712" y="85244"/>
+                  </a:lnTo>
+                  <a:lnTo>
+                    <a:pt x="2321368" y="83013"/>
+                  </a:lnTo>
+                  <a:lnTo>
+                    <a:pt x="2251023" y="80768"/>
+                  </a:lnTo>
+                  <a:lnTo>
+                    <a:pt x="2180679" y="78506"/>
+                  </a:lnTo>
+                  <a:lnTo>
+                    <a:pt x="2110334" y="76229"/>
+                  </a:lnTo>
+                  <a:lnTo>
+                    <a:pt x="2039990" y="73936"/>
+                  </a:lnTo>
+                  <a:lnTo>
+                    <a:pt x="1969645" y="71627"/>
+                  </a:lnTo>
+                  <a:lnTo>
+                    <a:pt x="1899301" y="69301"/>
+                  </a:lnTo>
+                  <a:lnTo>
+                    <a:pt x="1828956" y="66960"/>
+                  </a:lnTo>
+                  <a:lnTo>
+                    <a:pt x="1758612" y="64602"/>
+                  </a:lnTo>
+                  <a:lnTo>
+                    <a:pt x="1688267" y="62228"/>
+                  </a:lnTo>
+                  <a:lnTo>
+                    <a:pt x="1617923" y="59837"/>
+                  </a:lnTo>
+                  <a:lnTo>
+                    <a:pt x="1547578" y="57429"/>
+                  </a:lnTo>
+                  <a:lnTo>
+                    <a:pt x="1477234" y="55005"/>
+                  </a:lnTo>
+                  <a:lnTo>
+                    <a:pt x="1406889" y="52564"/>
+                  </a:lnTo>
+                  <a:lnTo>
+                    <a:pt x="1336545" y="50106"/>
+                  </a:lnTo>
+                  <a:lnTo>
+                    <a:pt x="1266200" y="47630"/>
+                  </a:lnTo>
+                  <a:lnTo>
+                    <a:pt x="1195856" y="45137"/>
+                  </a:lnTo>
+                  <a:lnTo>
+                    <a:pt x="1125511" y="42627"/>
+                  </a:lnTo>
+                  <a:lnTo>
+                    <a:pt x="1055167" y="40100"/>
+                  </a:lnTo>
+                  <a:lnTo>
+                    <a:pt x="984822" y="37555"/>
+                  </a:lnTo>
+                  <a:lnTo>
+                    <a:pt x="914478" y="34992"/>
+                  </a:lnTo>
+                  <a:lnTo>
+                    <a:pt x="844133" y="32411"/>
+                  </a:lnTo>
+                  <a:lnTo>
+                    <a:pt x="773789" y="29812"/>
+                  </a:lnTo>
+                  <a:lnTo>
+                    <a:pt x="703444" y="27195"/>
+                  </a:lnTo>
+                  <a:lnTo>
+                    <a:pt x="633100" y="24560"/>
+                  </a:lnTo>
+                  <a:lnTo>
+                    <a:pt x="562755" y="21906"/>
+                  </a:lnTo>
+                  <a:lnTo>
+                    <a:pt x="492411" y="19234"/>
+                  </a:lnTo>
+                  <a:lnTo>
+                    <a:pt x="422066" y="16543"/>
+                  </a:lnTo>
+                  <a:lnTo>
+                    <a:pt x="351722" y="13834"/>
+                  </a:lnTo>
+                  <a:lnTo>
+                    <a:pt x="281377" y="11105"/>
+                  </a:lnTo>
+                  <a:lnTo>
+                    <a:pt x="211033" y="8358"/>
+                  </a:lnTo>
+                  <a:lnTo>
+                    <a:pt x="140688" y="5591"/>
+                  </a:lnTo>
+                  <a:lnTo>
+                    <a:pt x="70344" y="2805"/>
+                  </a:lnTo>
+                  <a:lnTo>
+                    <a:pt x="0" y="0"/>
+                  </a:lnTo>
+                </a:path>
+              </a:pathLst>
+            </a:custGeom>
+          </p:spPr>
+          <p:txBody>
+            <a:bodyPr/>
+            <a:lstStyle/>
+            <a:p/>
+          </p:txBody>
+        </p:sp>
+        <p:sp>
+          <p:nvSpPr>
+            <p:cNvPr id="26" name="pl26"/>
+            <p:cNvSpPr/>
+            <p:nvPr/>
+          </p:nvSpPr>
+          <p:spPr>
+            <a:xfrm>
+              <a:off x="1235312" y="2721969"/>
+              <a:ext cx="6964104" cy="573098"/>
+            </a:xfrm>
+            <a:custGeom>
+              <a:avLst/>
+              <a:pathLst>
+                <a:path w="6964104" h="573098">
                   <a:moveTo>
                     <a:pt x="0" y="0"/>
                   </a:moveTo>
                   <a:lnTo>
-                    <a:pt x="71622" y="35050"/>
-                  </a:lnTo>
-                  <a:lnTo>
-                    <a:pt x="143245" y="69447"/>
-                  </a:lnTo>
-                  <a:lnTo>
-                    <a:pt x="214867" y="103203"/>
-                  </a:lnTo>
-                  <a:lnTo>
-                    <a:pt x="286490" y="136329"/>
-                  </a:lnTo>
-                  <a:lnTo>
-                    <a:pt x="358112" y="168837"/>
-                  </a:lnTo>
-                  <a:lnTo>
-                    <a:pt x="429735" y="200739"/>
-                  </a:lnTo>
-                  <a:lnTo>
-                    <a:pt x="501357" y="232047"/>
-                  </a:lnTo>
-                  <a:lnTo>
-                    <a:pt x="572980" y="262770"/>
-                  </a:lnTo>
-                  <a:lnTo>
-                    <a:pt x="644602" y="292921"/>
-                  </a:lnTo>
-                  <a:lnTo>
-                    <a:pt x="716225" y="322509"/>
-                  </a:lnTo>
-                  <a:lnTo>
-                    <a:pt x="787847" y="351546"/>
-                  </a:lnTo>
-                  <a:lnTo>
-                    <a:pt x="859470" y="380041"/>
-                  </a:lnTo>
-                  <a:lnTo>
-                    <a:pt x="931092" y="408005"/>
-                  </a:lnTo>
-                  <a:lnTo>
-                    <a:pt x="1002715" y="435447"/>
-                  </a:lnTo>
-                  <a:lnTo>
-                    <a:pt x="1074337" y="462378"/>
-                  </a:lnTo>
-                  <a:lnTo>
-                    <a:pt x="1145960" y="488807"/>
-                  </a:lnTo>
-                  <a:lnTo>
-                    <a:pt x="1217582" y="514742"/>
-                  </a:lnTo>
-                  <a:lnTo>
-                    <a:pt x="1289205" y="540194"/>
-                  </a:lnTo>
-                  <a:lnTo>
-                    <a:pt x="1360827" y="565172"/>
-                  </a:lnTo>
-                  <a:lnTo>
-                    <a:pt x="1432450" y="589683"/>
-                  </a:lnTo>
-                  <a:lnTo>
-                    <a:pt x="1504073" y="613738"/>
-                  </a:lnTo>
-                  <a:lnTo>
-                    <a:pt x="1575695" y="637344"/>
-                  </a:lnTo>
-                  <a:lnTo>
-                    <a:pt x="1647318" y="660510"/>
-                  </a:lnTo>
-                  <a:lnTo>
-                    <a:pt x="1718940" y="683244"/>
-                  </a:lnTo>
-                  <a:lnTo>
-                    <a:pt x="1790563" y="705554"/>
-                  </a:lnTo>
-                  <a:lnTo>
-                    <a:pt x="1862185" y="727448"/>
-                  </a:lnTo>
-                  <a:lnTo>
-                    <a:pt x="1933808" y="748933"/>
-                  </a:lnTo>
-                  <a:lnTo>
-                    <a:pt x="2005430" y="770018"/>
-                  </a:lnTo>
-                  <a:lnTo>
-                    <a:pt x="2077053" y="790710"/>
-                  </a:lnTo>
-                  <a:lnTo>
-                    <a:pt x="2148675" y="811016"/>
-                  </a:lnTo>
-                  <a:lnTo>
-                    <a:pt x="2220298" y="830943"/>
-                  </a:lnTo>
-                  <a:lnTo>
-                    <a:pt x="2291920" y="850499"/>
-                  </a:lnTo>
-                  <a:lnTo>
-                    <a:pt x="2363543" y="869690"/>
-                  </a:lnTo>
-                  <a:lnTo>
-                    <a:pt x="2435165" y="888523"/>
-                  </a:lnTo>
-                  <a:lnTo>
-                    <a:pt x="2506788" y="907005"/>
-                  </a:lnTo>
-                  <a:lnTo>
-                    <a:pt x="2578410" y="925143"/>
-                  </a:lnTo>
-                  <a:lnTo>
-                    <a:pt x="2650033" y="942942"/>
-                  </a:lnTo>
-                  <a:lnTo>
-                    <a:pt x="2721655" y="960409"/>
-                  </a:lnTo>
-                  <a:lnTo>
-                    <a:pt x="2793278" y="977551"/>
-                  </a:lnTo>
-                  <a:lnTo>
-                    <a:pt x="2864901" y="994373"/>
-                  </a:lnTo>
-                  <a:lnTo>
-                    <a:pt x="2936523" y="1010881"/>
-                  </a:lnTo>
-                  <a:lnTo>
-                    <a:pt x="3008146" y="1027081"/>
-                  </a:lnTo>
-                  <a:lnTo>
-                    <a:pt x="3079768" y="1042980"/>
-                  </a:lnTo>
-                  <a:lnTo>
-                    <a:pt x="3151391" y="1058581"/>
-                  </a:lnTo>
-                  <a:lnTo>
-                    <a:pt x="3223013" y="1073892"/>
-                  </a:lnTo>
-                  <a:lnTo>
-                    <a:pt x="3294636" y="1088918"/>
-                  </a:lnTo>
-                  <a:lnTo>
-                    <a:pt x="3366258" y="1103663"/>
-                  </a:lnTo>
-                  <a:lnTo>
-                    <a:pt x="3437881" y="1118133"/>
-                  </a:lnTo>
-                  <a:lnTo>
-                    <a:pt x="3509503" y="1132334"/>
-                  </a:lnTo>
-                  <a:lnTo>
-                    <a:pt x="3581126" y="1146269"/>
-                  </a:lnTo>
-                  <a:lnTo>
-                    <a:pt x="3652748" y="1159945"/>
-                  </a:lnTo>
-                  <a:lnTo>
-                    <a:pt x="3724371" y="1173366"/>
-                  </a:lnTo>
-                  <a:lnTo>
-                    <a:pt x="3795993" y="1186536"/>
-                  </a:lnTo>
-                  <a:lnTo>
-                    <a:pt x="3867616" y="1199461"/>
-                  </a:lnTo>
-                  <a:lnTo>
-                    <a:pt x="3939238" y="1212145"/>
-                  </a:lnTo>
-                  <a:lnTo>
-                    <a:pt x="4010861" y="1224592"/>
-                  </a:lnTo>
-                  <a:lnTo>
-                    <a:pt x="4082483" y="1236808"/>
-                  </a:lnTo>
-                  <a:lnTo>
-                    <a:pt x="4154106" y="1248795"/>
-                  </a:lnTo>
-                  <a:lnTo>
-                    <a:pt x="4225729" y="1260559"/>
-                  </a:lnTo>
-                  <a:lnTo>
-                    <a:pt x="4297351" y="1272104"/>
-                  </a:lnTo>
-                  <a:lnTo>
-                    <a:pt x="4368974" y="1283433"/>
-                  </a:lnTo>
-                  <a:lnTo>
-                    <a:pt x="4440596" y="1294551"/>
-                  </a:lnTo>
-                  <a:lnTo>
-                    <a:pt x="4512219" y="1305462"/>
-                  </a:lnTo>
-                  <a:lnTo>
-                    <a:pt x="4583841" y="1316169"/>
-                  </a:lnTo>
-                  <a:lnTo>
-                    <a:pt x="4655464" y="1326676"/>
-                  </a:lnTo>
-                  <a:lnTo>
-                    <a:pt x="4727086" y="1336988"/>
-                  </a:lnTo>
-                  <a:lnTo>
-                    <a:pt x="4798709" y="1347107"/>
-                  </a:lnTo>
-                  <a:lnTo>
-                    <a:pt x="4870331" y="1357038"/>
-                  </a:lnTo>
-                  <a:lnTo>
-                    <a:pt x="4941954" y="1366784"/>
-                  </a:lnTo>
-                  <a:lnTo>
-                    <a:pt x="5013576" y="1376347"/>
-                  </a:lnTo>
-                  <a:lnTo>
-                    <a:pt x="5085199" y="1385733"/>
-                  </a:lnTo>
-                  <a:lnTo>
-                    <a:pt x="5156821" y="1394943"/>
-                  </a:lnTo>
-                  <a:lnTo>
-                    <a:pt x="5228444" y="1403982"/>
-                  </a:lnTo>
-                  <a:lnTo>
-                    <a:pt x="5300066" y="1412852"/>
-                  </a:lnTo>
-                  <a:lnTo>
-                    <a:pt x="5371689" y="1421557"/>
-                  </a:lnTo>
-                  <a:lnTo>
-                    <a:pt x="5443311" y="1430099"/>
-                  </a:lnTo>
-                  <a:lnTo>
-                    <a:pt x="5514934" y="1438482"/>
-                  </a:lnTo>
-                  <a:lnTo>
-                    <a:pt x="5586557" y="1446709"/>
-                  </a:lnTo>
-                  <a:lnTo>
-                    <a:pt x="5658179" y="1454782"/>
-                  </a:lnTo>
-                  <a:lnTo>
-                    <a:pt x="5729802" y="1462705"/>
-                  </a:lnTo>
-                  <a:lnTo>
-                    <a:pt x="5801424" y="1470480"/>
-                  </a:lnTo>
-                  <a:lnTo>
-                    <a:pt x="5873047" y="1478110"/>
-                  </a:lnTo>
-                  <a:lnTo>
-                    <a:pt x="5944669" y="1485598"/>
-                  </a:lnTo>
-                  <a:lnTo>
-                    <a:pt x="6016292" y="1492946"/>
-                  </a:lnTo>
-                  <a:lnTo>
-                    <a:pt x="6087914" y="1500158"/>
-                  </a:lnTo>
-                  <a:lnTo>
-                    <a:pt x="6159537" y="1507234"/>
-                  </a:lnTo>
-                  <a:lnTo>
-                    <a:pt x="6231159" y="1514179"/>
-                  </a:lnTo>
-                  <a:lnTo>
-                    <a:pt x="6302782" y="1520994"/>
-                  </a:lnTo>
-                  <a:lnTo>
-                    <a:pt x="6374404" y="1527682"/>
-                  </a:lnTo>
-                  <a:lnTo>
-                    <a:pt x="6446027" y="1534246"/>
-                  </a:lnTo>
-                  <a:lnTo>
-                    <a:pt x="6517649" y="1540687"/>
-                  </a:lnTo>
-                  <a:lnTo>
-                    <a:pt x="6589272" y="1547008"/>
-                  </a:lnTo>
-                  <a:lnTo>
-                    <a:pt x="6660894" y="1553211"/>
-                  </a:lnTo>
-                  <a:lnTo>
-                    <a:pt x="6732517" y="1559298"/>
-                  </a:lnTo>
-                  <a:lnTo>
-                    <a:pt x="6804139" y="1565272"/>
-                  </a:lnTo>
-                  <a:lnTo>
-                    <a:pt x="6875762" y="1571135"/>
-                  </a:lnTo>
-                  <a:lnTo>
-                    <a:pt x="6947385" y="1576888"/>
-                  </a:lnTo>
-                  <a:lnTo>
-                    <a:pt x="7019007" y="1582534"/>
-                  </a:lnTo>
-                  <a:lnTo>
-                    <a:pt x="7090630" y="1588074"/>
+                    <a:pt x="70344" y="12648"/>
+                  </a:lnTo>
+                  <a:lnTo>
+                    <a:pt x="140688" y="25062"/>
+                  </a:lnTo>
+                  <a:lnTo>
+                    <a:pt x="211033" y="37243"/>
+                  </a:lnTo>
+                  <a:lnTo>
+                    <a:pt x="281377" y="49198"/>
+                  </a:lnTo>
+                  <a:lnTo>
+                    <a:pt x="351722" y="60929"/>
+                  </a:lnTo>
+                  <a:lnTo>
+                    <a:pt x="422066" y="72442"/>
+                  </a:lnTo>
+                  <a:lnTo>
+                    <a:pt x="492411" y="83740"/>
+                  </a:lnTo>
+                  <a:lnTo>
+                    <a:pt x="562755" y="94827"/>
+                  </a:lnTo>
+                  <a:lnTo>
+                    <a:pt x="633100" y="105708"/>
+                  </a:lnTo>
+                  <a:lnTo>
+                    <a:pt x="703444" y="116386"/>
+                  </a:lnTo>
+                  <a:lnTo>
+                    <a:pt x="773789" y="126864"/>
+                  </a:lnTo>
+                  <a:lnTo>
+                    <a:pt x="844133" y="137148"/>
+                  </a:lnTo>
+                  <a:lnTo>
+                    <a:pt x="914478" y="147239"/>
+                  </a:lnTo>
+                  <a:lnTo>
+                    <a:pt x="984822" y="157142"/>
+                  </a:lnTo>
+                  <a:lnTo>
+                    <a:pt x="1055167" y="166861"/>
+                  </a:lnTo>
+                  <a:lnTo>
+                    <a:pt x="1125511" y="176398"/>
+                  </a:lnTo>
+                  <a:lnTo>
+                    <a:pt x="1195856" y="185758"/>
+                  </a:lnTo>
+                  <a:lnTo>
+                    <a:pt x="1266200" y="194943"/>
+                  </a:lnTo>
+                  <a:lnTo>
+                    <a:pt x="1336545" y="203957"/>
+                  </a:lnTo>
+                  <a:lnTo>
+                    <a:pt x="1406889" y="212803"/>
+                  </a:lnTo>
+                  <a:lnTo>
+                    <a:pt x="1477234" y="221483"/>
+                  </a:lnTo>
+                  <a:lnTo>
+                    <a:pt x="1547578" y="230002"/>
+                  </a:lnTo>
+                  <a:lnTo>
+                    <a:pt x="1617923" y="238362"/>
+                  </a:lnTo>
+                  <a:lnTo>
+                    <a:pt x="1688267" y="246566"/>
+                  </a:lnTo>
+                  <a:lnTo>
+                    <a:pt x="1758612" y="254617"/>
+                  </a:lnTo>
+                  <a:lnTo>
+                    <a:pt x="1828956" y="262518"/>
+                  </a:lnTo>
+                  <a:lnTo>
+                    <a:pt x="1899301" y="270272"/>
+                  </a:lnTo>
+                  <a:lnTo>
+                    <a:pt x="1969645" y="277881"/>
+                  </a:lnTo>
+                  <a:lnTo>
+                    <a:pt x="2039990" y="285348"/>
+                  </a:lnTo>
+                  <a:lnTo>
+                    <a:pt x="2110334" y="292676"/>
+                  </a:lnTo>
+                  <a:lnTo>
+                    <a:pt x="2180679" y="299868"/>
+                  </a:lnTo>
+                  <a:lnTo>
+                    <a:pt x="2251023" y="306925"/>
+                  </a:lnTo>
+                  <a:lnTo>
+                    <a:pt x="2321368" y="313850"/>
+                  </a:lnTo>
+                  <a:lnTo>
+                    <a:pt x="2391712" y="320647"/>
+                  </a:lnTo>
+                  <a:lnTo>
+                    <a:pt x="2462057" y="327317"/>
+                  </a:lnTo>
+                  <a:lnTo>
+                    <a:pt x="2532401" y="333862"/>
+                  </a:lnTo>
+                  <a:lnTo>
+                    <a:pt x="2602746" y="340285"/>
+                  </a:lnTo>
+                  <a:lnTo>
+                    <a:pt x="2673090" y="346589"/>
+                  </a:lnTo>
+                  <a:lnTo>
+                    <a:pt x="2743435" y="352775"/>
+                  </a:lnTo>
+                  <a:lnTo>
+                    <a:pt x="2813779" y="358845"/>
+                  </a:lnTo>
+                  <a:lnTo>
+                    <a:pt x="2884124" y="364803"/>
+                  </a:lnTo>
+                  <a:lnTo>
+                    <a:pt x="2954468" y="370649"/>
+                  </a:lnTo>
+                  <a:lnTo>
+                    <a:pt x="3024813" y="376386"/>
+                  </a:lnTo>
+                  <a:lnTo>
+                    <a:pt x="3095157" y="382017"/>
+                  </a:lnTo>
+                  <a:lnTo>
+                    <a:pt x="3165502" y="387542"/>
+                  </a:lnTo>
+                  <a:lnTo>
+                    <a:pt x="3235846" y="392964"/>
+                  </a:lnTo>
+                  <a:lnTo>
+                    <a:pt x="3306191" y="398286"/>
+                  </a:lnTo>
+                  <a:lnTo>
+                    <a:pt x="3376535" y="403508"/>
+                  </a:lnTo>
+                  <a:lnTo>
+                    <a:pt x="3446880" y="408632"/>
+                  </a:lnTo>
+                  <a:lnTo>
+                    <a:pt x="3517224" y="413661"/>
+                  </a:lnTo>
+                  <a:lnTo>
+                    <a:pt x="3587569" y="418597"/>
+                  </a:lnTo>
+                  <a:lnTo>
+                    <a:pt x="3657913" y="423440"/>
+                  </a:lnTo>
+                  <a:lnTo>
+                    <a:pt x="3728257" y="428193"/>
+                  </a:lnTo>
+                  <a:lnTo>
+                    <a:pt x="3798602" y="432857"/>
+                  </a:lnTo>
+                  <a:lnTo>
+                    <a:pt x="3868946" y="437434"/>
+                  </a:lnTo>
+                  <a:lnTo>
+                    <a:pt x="3939291" y="441926"/>
+                  </a:lnTo>
+                  <a:lnTo>
+                    <a:pt x="4009635" y="446334"/>
+                  </a:lnTo>
+                  <a:lnTo>
+                    <a:pt x="4079980" y="450660"/>
+                  </a:lnTo>
+                  <a:lnTo>
+                    <a:pt x="4150324" y="454906"/>
+                  </a:lnTo>
+                  <a:lnTo>
+                    <a:pt x="4220669" y="459072"/>
+                  </a:lnTo>
+                  <a:lnTo>
+                    <a:pt x="4291013" y="463160"/>
+                  </a:lnTo>
+                  <a:lnTo>
+                    <a:pt x="4361358" y="467173"/>
+                  </a:lnTo>
+                  <a:lnTo>
+                    <a:pt x="4431702" y="471110"/>
+                  </a:lnTo>
+                  <a:lnTo>
+                    <a:pt x="4502047" y="474974"/>
+                  </a:lnTo>
+                  <a:lnTo>
+                    <a:pt x="4572391" y="478766"/>
+                  </a:lnTo>
+                  <a:lnTo>
+                    <a:pt x="4642736" y="482487"/>
+                  </a:lnTo>
+                  <a:lnTo>
+                    <a:pt x="4713080" y="486139"/>
+                  </a:lnTo>
+                  <a:lnTo>
+                    <a:pt x="4783425" y="489723"/>
+                  </a:lnTo>
+                  <a:lnTo>
+                    <a:pt x="4853769" y="493240"/>
+                  </a:lnTo>
+                  <a:lnTo>
+                    <a:pt x="4924114" y="496691"/>
+                  </a:lnTo>
+                  <a:lnTo>
+                    <a:pt x="4994458" y="500078"/>
+                  </a:lnTo>
+                  <a:lnTo>
+                    <a:pt x="5064803" y="503402"/>
+                  </a:lnTo>
+                  <a:lnTo>
+                    <a:pt x="5135147" y="506664"/>
+                  </a:lnTo>
+                  <a:lnTo>
+                    <a:pt x="5205492" y="509865"/>
+                  </a:lnTo>
+                  <a:lnTo>
+                    <a:pt x="5275836" y="513006"/>
+                  </a:lnTo>
+                  <a:lnTo>
+                    <a:pt x="5346181" y="516089"/>
+                  </a:lnTo>
+                  <a:lnTo>
+                    <a:pt x="5416525" y="519114"/>
+                  </a:lnTo>
+                  <a:lnTo>
+                    <a:pt x="5486870" y="522083"/>
+                  </a:lnTo>
+                  <a:lnTo>
+                    <a:pt x="5557214" y="524996"/>
+                  </a:lnTo>
+                  <a:lnTo>
+                    <a:pt x="5627559" y="527856"/>
+                  </a:lnTo>
+                  <a:lnTo>
+                    <a:pt x="5697903" y="530661"/>
+                  </a:lnTo>
+                  <a:lnTo>
+                    <a:pt x="5768248" y="533415"/>
+                  </a:lnTo>
+                  <a:lnTo>
+                    <a:pt x="5838592" y="536117"/>
+                  </a:lnTo>
+                  <a:lnTo>
+                    <a:pt x="5908937" y="538769"/>
+                  </a:lnTo>
+                  <a:lnTo>
+                    <a:pt x="5979281" y="541371"/>
+                  </a:lnTo>
+                  <a:lnTo>
+                    <a:pt x="6049626" y="543925"/>
+                  </a:lnTo>
+                  <a:lnTo>
+                    <a:pt x="6119970" y="546431"/>
+                  </a:lnTo>
+                  <a:lnTo>
+                    <a:pt x="6190315" y="548891"/>
+                  </a:lnTo>
+                  <a:lnTo>
+                    <a:pt x="6260659" y="551304"/>
+                  </a:lnTo>
+                  <a:lnTo>
+                    <a:pt x="6331004" y="553673"/>
+                  </a:lnTo>
+                  <a:lnTo>
+                    <a:pt x="6401348" y="555997"/>
+                  </a:lnTo>
+                  <a:lnTo>
+                    <a:pt x="6471693" y="558278"/>
+                  </a:lnTo>
+                  <a:lnTo>
+                    <a:pt x="6542037" y="560517"/>
+                  </a:lnTo>
+                  <a:lnTo>
+                    <a:pt x="6612382" y="562714"/>
+                  </a:lnTo>
+                  <a:lnTo>
+                    <a:pt x="6682726" y="564870"/>
+                  </a:lnTo>
+                  <a:lnTo>
+                    <a:pt x="6753071" y="566985"/>
+                  </a:lnTo>
+                  <a:lnTo>
+                    <a:pt x="6823415" y="569061"/>
+                  </a:lnTo>
+                  <a:lnTo>
+                    <a:pt x="6893760" y="571099"/>
+                  </a:lnTo>
+                  <a:lnTo>
+                    <a:pt x="6964104" y="573098"/>
                   </a:lnTo>
                 </a:path>
               </a:pathLst>
@@ -4654,27 +4689,27 @@
         </p:sp>
         <p:sp>
           <p:nvSpPr>
-            <p:cNvPr id="26" name="pl26"/>
+            <p:cNvPr id="27" name="pl27"/>
             <p:cNvSpPr/>
             <p:nvPr/>
           </p:nvSpPr>
           <p:spPr>
             <a:xfrm>
-              <a:off x="817517" y="4727786"/>
-              <a:ext cx="7799693" cy="0"/>
+              <a:off x="887106" y="3100960"/>
+              <a:ext cx="7660515" cy="0"/>
             </a:xfrm>
             <a:custGeom>
               <a:avLst/>
               <a:pathLst>
-                <a:path w="7799693" h="0">
+                <a:path w="7660515" h="0">
                   <a:moveTo>
                     <a:pt x="0" y="0"/>
                   </a:moveTo>
                   <a:lnTo>
-                    <a:pt x="7799693" y="0"/>
-                  </a:lnTo>
-                  <a:lnTo>
-                    <a:pt x="7799693" y="0"/>
+                    <a:pt x="7660515" y="0"/>
+                  </a:lnTo>
+                  <a:lnTo>
+                    <a:pt x="7660515" y="0"/>
                   </a:lnTo>
                 </a:path>
               </a:pathLst>
@@ -4697,21 +4732,21 @@
         </p:sp>
         <p:sp>
           <p:nvSpPr>
-            <p:cNvPr id="27" name="pl27"/>
+            <p:cNvPr id="28" name="pl28"/>
             <p:cNvSpPr/>
             <p:nvPr/>
           </p:nvSpPr>
           <p:spPr>
             <a:xfrm>
-              <a:off x="4284781" y="2073503"/>
-              <a:ext cx="0" cy="3649639"/>
+              <a:off x="4292500" y="2143092"/>
+              <a:ext cx="0" cy="1317069"/>
             </a:xfrm>
             <a:custGeom>
               <a:avLst/>
               <a:pathLst>
-                <a:path w="0" h="3649639">
+                <a:path w="0" h="1317069">
                   <a:moveTo>
-                    <a:pt x="0" y="3649639"/>
+                    <a:pt x="0" y="1317069"/>
                   </a:moveTo>
                   <a:lnTo>
                     <a:pt x="0" y="0"/>
@@ -4740,21 +4775,21 @@
         </p:sp>
         <p:sp>
           <p:nvSpPr>
-            <p:cNvPr id="28" name="pl28"/>
+            <p:cNvPr id="29" name="pl29"/>
             <p:cNvSpPr/>
             <p:nvPr/>
           </p:nvSpPr>
           <p:spPr>
             <a:xfrm>
-              <a:off x="3095906" y="2073503"/>
-              <a:ext cx="0" cy="3649639"/>
+              <a:off x="3124839" y="2143092"/>
+              <a:ext cx="0" cy="1317069"/>
             </a:xfrm>
             <a:custGeom>
               <a:avLst/>
               <a:pathLst>
-                <a:path w="0" h="3649639">
+                <a:path w="0" h="1317069">
                   <a:moveTo>
-                    <a:pt x="0" y="3649639"/>
+                    <a:pt x="0" y="1317069"/>
                   </a:moveTo>
                   <a:lnTo>
                     <a:pt x="0" y="0"/>
@@ -4783,21 +4818,21 @@
         </p:sp>
         <p:sp>
           <p:nvSpPr>
-            <p:cNvPr id="29" name="pl29"/>
+            <p:cNvPr id="30" name="pl30"/>
             <p:cNvSpPr/>
             <p:nvPr/>
           </p:nvSpPr>
           <p:spPr>
             <a:xfrm>
-              <a:off x="5522967" y="2073503"/>
-              <a:ext cx="0" cy="3649639"/>
+              <a:off x="5508592" y="2143092"/>
+              <a:ext cx="0" cy="1317069"/>
             </a:xfrm>
             <a:custGeom>
               <a:avLst/>
               <a:pathLst>
-                <a:path w="0" h="3649639">
+                <a:path w="0" h="1317069">
                   <a:moveTo>
-                    <a:pt x="0" y="3649639"/>
+                    <a:pt x="0" y="1317069"/>
                   </a:moveTo>
                   <a:lnTo>
                     <a:pt x="0" y="0"/>
@@ -4826,13 +4861,13 @@
         </p:sp>
         <p:sp>
           <p:nvSpPr>
-            <p:cNvPr id="30" name="tx30"/>
+            <p:cNvPr id="31" name="tx31"/>
             <p:cNvSpPr/>
             <p:nvPr/>
           </p:nvSpPr>
           <p:spPr>
             <a:xfrm>
-              <a:off x="692708" y="5517199"/>
+              <a:off x="762297" y="3360243"/>
               <a:ext cx="62179" cy="80101"/>
             </a:xfrm>
             <a:prstGeom prst="rect">
@@ -4872,13 +4907,13 @@
         </p:sp>
         <p:sp>
           <p:nvSpPr>
-            <p:cNvPr id="31" name="tx31"/>
+            <p:cNvPr id="32" name="tx32"/>
             <p:cNvSpPr/>
             <p:nvPr/>
           </p:nvSpPr>
           <p:spPr>
             <a:xfrm>
-              <a:off x="692708" y="4687735"/>
+              <a:off x="762297" y="3060909"/>
               <a:ext cx="62179" cy="80101"/>
             </a:xfrm>
             <a:prstGeom prst="rect">
@@ -4918,13 +4953,13 @@
         </p:sp>
         <p:sp>
           <p:nvSpPr>
-            <p:cNvPr id="32" name="tx32"/>
+            <p:cNvPr id="33" name="tx33"/>
             <p:cNvSpPr/>
             <p:nvPr/>
           </p:nvSpPr>
           <p:spPr>
             <a:xfrm>
-              <a:off x="692708" y="3858272"/>
+              <a:off x="762297" y="2761575"/>
               <a:ext cx="62179" cy="80101"/>
             </a:xfrm>
             <a:prstGeom prst="rect">
@@ -4964,13 +4999,13 @@
         </p:sp>
         <p:sp>
           <p:nvSpPr>
-            <p:cNvPr id="33" name="tx33"/>
+            <p:cNvPr id="34" name="tx34"/>
             <p:cNvSpPr/>
             <p:nvPr/>
           </p:nvSpPr>
           <p:spPr>
             <a:xfrm>
-              <a:off x="692708" y="3028808"/>
+              <a:off x="762297" y="2462242"/>
               <a:ext cx="62179" cy="80101"/>
             </a:xfrm>
             <a:prstGeom prst="rect">
@@ -5010,13 +5045,13 @@
         </p:sp>
         <p:sp>
           <p:nvSpPr>
-            <p:cNvPr id="34" name="tx34"/>
+            <p:cNvPr id="35" name="tx35"/>
             <p:cNvSpPr/>
             <p:nvPr/>
           </p:nvSpPr>
           <p:spPr>
             <a:xfrm>
-              <a:off x="692708" y="2199345"/>
+              <a:off x="762297" y="2162908"/>
               <a:ext cx="62179" cy="80101"/>
             </a:xfrm>
             <a:prstGeom prst="rect">
@@ -5056,13 +5091,13 @@
         </p:sp>
         <p:sp>
           <p:nvSpPr>
-            <p:cNvPr id="35" name="tx35"/>
+            <p:cNvPr id="36" name="tx36"/>
             <p:cNvSpPr/>
             <p:nvPr/>
           </p:nvSpPr>
           <p:spPr>
             <a:xfrm>
-              <a:off x="2152181" y="5785772"/>
+              <a:off x="2196512" y="3522791"/>
               <a:ext cx="161574" cy="80101"/>
             </a:xfrm>
             <a:prstGeom prst="rect">
@@ -5102,13 +5137,13 @@
         </p:sp>
         <p:sp>
           <p:nvSpPr>
-            <p:cNvPr id="36" name="tx36"/>
+            <p:cNvPr id="37" name="tx37"/>
             <p:cNvSpPr/>
             <p:nvPr/>
           </p:nvSpPr>
           <p:spPr>
             <a:xfrm>
-              <a:off x="3884104" y="5785772"/>
+              <a:off x="3897531" y="3522791"/>
               <a:ext cx="161574" cy="80101"/>
             </a:xfrm>
             <a:prstGeom prst="rect">
@@ -5148,13 +5183,13 @@
         </p:sp>
         <p:sp>
           <p:nvSpPr>
-            <p:cNvPr id="37" name="tx37"/>
+            <p:cNvPr id="38" name="tx38"/>
             <p:cNvSpPr/>
             <p:nvPr/>
           </p:nvSpPr>
           <p:spPr>
             <a:xfrm>
-              <a:off x="5665725" y="5785772"/>
+              <a:off x="5648248" y="3522791"/>
               <a:ext cx="62179" cy="80101"/>
             </a:xfrm>
             <a:prstGeom prst="rect">
@@ -5194,13 +5229,13 @@
         </p:sp>
         <p:sp>
           <p:nvSpPr>
-            <p:cNvPr id="38" name="tx38"/>
+            <p:cNvPr id="39" name="tx39"/>
             <p:cNvSpPr/>
             <p:nvPr/>
           </p:nvSpPr>
           <p:spPr>
             <a:xfrm>
-              <a:off x="7366559" y="5785772"/>
+              <a:off x="7318177" y="3522791"/>
               <a:ext cx="124358" cy="80101"/>
             </a:xfrm>
             <a:prstGeom prst="rect">
@@ -5240,13 +5275,13 @@
         </p:sp>
         <p:sp>
           <p:nvSpPr>
-            <p:cNvPr id="39" name="tx39"/>
+            <p:cNvPr id="40" name="tx40"/>
             <p:cNvSpPr/>
             <p:nvPr/>
           </p:nvSpPr>
           <p:spPr>
             <a:xfrm>
-              <a:off x="1561815" y="5925448"/>
+              <a:off x="1561815" y="3662467"/>
               <a:ext cx="6311097" cy="100218"/>
             </a:xfrm>
             <a:prstGeom prst="rect">
@@ -5286,13 +5321,13 @@
         </p:sp>
         <p:sp>
           <p:nvSpPr>
-            <p:cNvPr id="40" name="tx40"/>
+            <p:cNvPr id="41" name="tx41"/>
             <p:cNvSpPr/>
             <p:nvPr/>
           </p:nvSpPr>
           <p:spPr>
             <a:xfrm rot="-5400000">
-              <a:off x="68446" y="3848213"/>
+              <a:off x="138035" y="2751517"/>
               <a:ext cx="1016904" cy="100218"/>
             </a:xfrm>
             <a:prstGeom prst="rect">
@@ -5332,13 +5367,13 @@
         </p:sp>
         <p:sp>
           <p:nvSpPr>
-            <p:cNvPr id="41" name="tx41"/>
+            <p:cNvPr id="42" name="tx42"/>
             <p:cNvSpPr/>
             <p:nvPr/>
           </p:nvSpPr>
           <p:spPr>
             <a:xfrm>
-              <a:off x="817517" y="1896563"/>
+              <a:off x="887106" y="1966152"/>
               <a:ext cx="6959864" cy="82021"/>
             </a:xfrm>
             <a:prstGeom prst="rect">
@@ -5378,13 +5413,3789 @@
         </p:sp>
         <p:sp>
           <p:nvSpPr>
-            <p:cNvPr id="42" name="tx42"/>
+            <p:cNvPr id="43" name="tx43"/>
             <p:cNvSpPr/>
             <p:nvPr/>
           </p:nvSpPr>
           <p:spPr>
             <a:xfrm>
-              <a:off x="817517" y="1669789"/>
+              <a:off x="887106" y="1739378"/>
+              <a:ext cx="4283141" cy="120152"/>
+            </a:xfrm>
+            <a:prstGeom prst="rect">
+              <a:avLst/>
+            </a:prstGeom>
+            <a:noFill/>
+          </p:spPr>
+          <p:txBody>
+            <a:bodyPr lIns="0" rIns="0" tIns="0" bIns="0" anchorCtr="1" anchor="ctr" wrap="none"/>
+            <a:lstStyle/>
+            <a:p>
+              <a:pPr algn="l" marL="0" marR="0" indent="0">
+                <a:lnSpc>
+                  <a:spcPts val="1320"/>
+                </a:lnSpc>
+                <a:spcBef>
+                  <a:spcPts val="0"/>
+                </a:spcBef>
+                <a:spcAft>
+                  <a:spcPts val="0"/>
+                </a:spcAft>
+              </a:pPr>
+              <a:r>
+                <a:rPr sz="1320">
+                  <a:solidFill>
+                    <a:srgbClr val="000000">
+                      <a:alpha val="100000"/>
+                    </a:srgbClr>
+                  </a:solidFill>
+                  <a:latin typeface="Helvetica"/>
+                  <a:cs typeface="Helvetica"/>
+                </a:rPr>
+                <a:t>Platinum-Related Hospitalization (Sensitivity, Carboplatin)</a:t>
+              </a:r>
+            </a:p>
+          </p:txBody>
+        </p:sp>
+        <p:sp>
+          <p:nvSpPr>
+            <p:cNvPr id="44" name="pl44"/>
+            <p:cNvSpPr/>
+            <p:nvPr/>
+          </p:nvSpPr>
+          <p:spPr>
+            <a:xfrm>
+              <a:off x="887106" y="5444019"/>
+              <a:ext cx="7660515" cy="0"/>
+            </a:xfrm>
+            <a:custGeom>
+              <a:avLst/>
+              <a:pathLst>
+                <a:path w="7660515" h="0">
+                  <a:moveTo>
+                    <a:pt x="0" y="0"/>
+                  </a:moveTo>
+                  <a:lnTo>
+                    <a:pt x="7660515" y="0"/>
+                  </a:lnTo>
+                  <a:lnTo>
+                    <a:pt x="7660515" y="0"/>
+                  </a:lnTo>
+                </a:path>
+              </a:pathLst>
+            </a:custGeom>
+            <a:ln w="6775" cap="flat">
+              <a:solidFill>
+                <a:srgbClr val="EBEBEB">
+                  <a:alpha val="100000"/>
+                </a:srgbClr>
+              </a:solidFill>
+              <a:prstDash val="solid"/>
+              <a:round/>
+            </a:ln>
+          </p:spPr>
+          <p:txBody>
+            <a:bodyPr/>
+            <a:lstStyle/>
+            <a:p/>
+          </p:txBody>
+        </p:sp>
+        <p:sp>
+          <p:nvSpPr>
+            <p:cNvPr id="45" name="pl45"/>
+            <p:cNvSpPr/>
+            <p:nvPr/>
+          </p:nvSpPr>
+          <p:spPr>
+            <a:xfrm>
+              <a:off x="887106" y="5144686"/>
+              <a:ext cx="7660515" cy="0"/>
+            </a:xfrm>
+            <a:custGeom>
+              <a:avLst/>
+              <a:pathLst>
+                <a:path w="7660515" h="0">
+                  <a:moveTo>
+                    <a:pt x="0" y="0"/>
+                  </a:moveTo>
+                  <a:lnTo>
+                    <a:pt x="7660515" y="0"/>
+                  </a:lnTo>
+                  <a:lnTo>
+                    <a:pt x="7660515" y="0"/>
+                  </a:lnTo>
+                </a:path>
+              </a:pathLst>
+            </a:custGeom>
+            <a:ln w="6775" cap="flat">
+              <a:solidFill>
+                <a:srgbClr val="EBEBEB">
+                  <a:alpha val="100000"/>
+                </a:srgbClr>
+              </a:solidFill>
+              <a:prstDash val="solid"/>
+              <a:round/>
+            </a:ln>
+          </p:spPr>
+          <p:txBody>
+            <a:bodyPr/>
+            <a:lstStyle/>
+            <a:p/>
+          </p:txBody>
+        </p:sp>
+        <p:sp>
+          <p:nvSpPr>
+            <p:cNvPr id="46" name="pl46"/>
+            <p:cNvSpPr/>
+            <p:nvPr/>
+          </p:nvSpPr>
+          <p:spPr>
+            <a:xfrm>
+              <a:off x="887106" y="4845352"/>
+              <a:ext cx="7660515" cy="0"/>
+            </a:xfrm>
+            <a:custGeom>
+              <a:avLst/>
+              <a:pathLst>
+                <a:path w="7660515" h="0">
+                  <a:moveTo>
+                    <a:pt x="0" y="0"/>
+                  </a:moveTo>
+                  <a:lnTo>
+                    <a:pt x="7660515" y="0"/>
+                  </a:lnTo>
+                  <a:lnTo>
+                    <a:pt x="7660515" y="0"/>
+                  </a:lnTo>
+                </a:path>
+              </a:pathLst>
+            </a:custGeom>
+            <a:ln w="6775" cap="flat">
+              <a:solidFill>
+                <a:srgbClr val="EBEBEB">
+                  <a:alpha val="100000"/>
+                </a:srgbClr>
+              </a:solidFill>
+              <a:prstDash val="solid"/>
+              <a:round/>
+            </a:ln>
+          </p:spPr>
+          <p:txBody>
+            <a:bodyPr/>
+            <a:lstStyle/>
+            <a:p/>
+          </p:txBody>
+        </p:sp>
+        <p:sp>
+          <p:nvSpPr>
+            <p:cNvPr id="47" name="pl47"/>
+            <p:cNvSpPr/>
+            <p:nvPr/>
+          </p:nvSpPr>
+          <p:spPr>
+            <a:xfrm>
+              <a:off x="887106" y="4546018"/>
+              <a:ext cx="7660515" cy="0"/>
+            </a:xfrm>
+            <a:custGeom>
+              <a:avLst/>
+              <a:pathLst>
+                <a:path w="7660515" h="0">
+                  <a:moveTo>
+                    <a:pt x="0" y="0"/>
+                  </a:moveTo>
+                  <a:lnTo>
+                    <a:pt x="7660515" y="0"/>
+                  </a:lnTo>
+                  <a:lnTo>
+                    <a:pt x="7660515" y="0"/>
+                  </a:lnTo>
+                </a:path>
+              </a:pathLst>
+            </a:custGeom>
+            <a:ln w="6775" cap="flat">
+              <a:solidFill>
+                <a:srgbClr val="EBEBEB">
+                  <a:alpha val="100000"/>
+                </a:srgbClr>
+              </a:solidFill>
+              <a:prstDash val="solid"/>
+              <a:round/>
+            </a:ln>
+          </p:spPr>
+          <p:txBody>
+            <a:bodyPr/>
+            <a:lstStyle/>
+            <a:p/>
+          </p:txBody>
+        </p:sp>
+        <p:sp>
+          <p:nvSpPr>
+            <p:cNvPr id="48" name="pl48"/>
+            <p:cNvSpPr/>
+            <p:nvPr/>
+          </p:nvSpPr>
+          <p:spPr>
+            <a:xfrm>
+              <a:off x="1001535" y="4336484"/>
+              <a:ext cx="0" cy="1317069"/>
+            </a:xfrm>
+            <a:custGeom>
+              <a:avLst/>
+              <a:pathLst>
+                <a:path w="0" h="1317069">
+                  <a:moveTo>
+                    <a:pt x="0" y="1317069"/>
+                  </a:moveTo>
+                  <a:lnTo>
+                    <a:pt x="0" y="0"/>
+                  </a:lnTo>
+                  <a:lnTo>
+                    <a:pt x="0" y="0"/>
+                  </a:lnTo>
+                </a:path>
+              </a:pathLst>
+            </a:custGeom>
+            <a:ln w="6775" cap="flat">
+              <a:solidFill>
+                <a:srgbClr val="EBEBEB">
+                  <a:alpha val="100000"/>
+                </a:srgbClr>
+              </a:solidFill>
+              <a:prstDash val="solid"/>
+              <a:round/>
+            </a:ln>
+          </p:spPr>
+          <p:txBody>
+            <a:bodyPr/>
+            <a:lstStyle/>
+            <a:p/>
+          </p:txBody>
+        </p:sp>
+        <p:sp>
+          <p:nvSpPr>
+            <p:cNvPr id="49" name="pl49"/>
+            <p:cNvSpPr/>
+            <p:nvPr/>
+          </p:nvSpPr>
+          <p:spPr>
+            <a:xfrm>
+              <a:off x="1852045" y="4336484"/>
+              <a:ext cx="0" cy="1317069"/>
+            </a:xfrm>
+            <a:custGeom>
+              <a:avLst/>
+              <a:pathLst>
+                <a:path w="0" h="1317069">
+                  <a:moveTo>
+                    <a:pt x="0" y="1317069"/>
+                  </a:moveTo>
+                  <a:lnTo>
+                    <a:pt x="0" y="0"/>
+                  </a:lnTo>
+                  <a:lnTo>
+                    <a:pt x="0" y="0"/>
+                  </a:lnTo>
+                </a:path>
+              </a:pathLst>
+            </a:custGeom>
+            <a:ln w="6775" cap="flat">
+              <a:solidFill>
+                <a:srgbClr val="EBEBEB">
+                  <a:alpha val="100000"/>
+                </a:srgbClr>
+              </a:solidFill>
+              <a:prstDash val="solid"/>
+              <a:round/>
+            </a:ln>
+          </p:spPr>
+          <p:txBody>
+            <a:bodyPr/>
+            <a:lstStyle/>
+            <a:p/>
+          </p:txBody>
+        </p:sp>
+        <p:sp>
+          <p:nvSpPr>
+            <p:cNvPr id="50" name="pl50"/>
+            <p:cNvSpPr/>
+            <p:nvPr/>
+          </p:nvSpPr>
+          <p:spPr>
+            <a:xfrm>
+              <a:off x="2702554" y="4336484"/>
+              <a:ext cx="0" cy="1317069"/>
+            </a:xfrm>
+            <a:custGeom>
+              <a:avLst/>
+              <a:pathLst>
+                <a:path w="0" h="1317069">
+                  <a:moveTo>
+                    <a:pt x="0" y="1317069"/>
+                  </a:moveTo>
+                  <a:lnTo>
+                    <a:pt x="0" y="0"/>
+                  </a:lnTo>
+                  <a:lnTo>
+                    <a:pt x="0" y="0"/>
+                  </a:lnTo>
+                </a:path>
+              </a:pathLst>
+            </a:custGeom>
+            <a:ln w="6775" cap="flat">
+              <a:solidFill>
+                <a:srgbClr val="EBEBEB">
+                  <a:alpha val="100000"/>
+                </a:srgbClr>
+              </a:solidFill>
+              <a:prstDash val="solid"/>
+              <a:round/>
+            </a:ln>
+          </p:spPr>
+          <p:txBody>
+            <a:bodyPr/>
+            <a:lstStyle/>
+            <a:p/>
+          </p:txBody>
+        </p:sp>
+        <p:sp>
+          <p:nvSpPr>
+            <p:cNvPr id="51" name="pl51"/>
+            <p:cNvSpPr/>
+            <p:nvPr/>
+          </p:nvSpPr>
+          <p:spPr>
+            <a:xfrm>
+              <a:off x="3553064" y="4336484"/>
+              <a:ext cx="0" cy="1317069"/>
+            </a:xfrm>
+            <a:custGeom>
+              <a:avLst/>
+              <a:pathLst>
+                <a:path w="0" h="1317069">
+                  <a:moveTo>
+                    <a:pt x="0" y="1317069"/>
+                  </a:moveTo>
+                  <a:lnTo>
+                    <a:pt x="0" y="0"/>
+                  </a:lnTo>
+                  <a:lnTo>
+                    <a:pt x="0" y="0"/>
+                  </a:lnTo>
+                </a:path>
+              </a:pathLst>
+            </a:custGeom>
+            <a:ln w="6775" cap="flat">
+              <a:solidFill>
+                <a:srgbClr val="EBEBEB">
+                  <a:alpha val="100000"/>
+                </a:srgbClr>
+              </a:solidFill>
+              <a:prstDash val="solid"/>
+              <a:round/>
+            </a:ln>
+          </p:spPr>
+          <p:txBody>
+            <a:bodyPr/>
+            <a:lstStyle/>
+            <a:p/>
+          </p:txBody>
+        </p:sp>
+        <p:sp>
+          <p:nvSpPr>
+            <p:cNvPr id="52" name="pl52"/>
+            <p:cNvSpPr/>
+            <p:nvPr/>
+          </p:nvSpPr>
+          <p:spPr>
+            <a:xfrm>
+              <a:off x="4403573" y="4336484"/>
+              <a:ext cx="0" cy="1317069"/>
+            </a:xfrm>
+            <a:custGeom>
+              <a:avLst/>
+              <a:pathLst>
+                <a:path w="0" h="1317069">
+                  <a:moveTo>
+                    <a:pt x="0" y="1317069"/>
+                  </a:moveTo>
+                  <a:lnTo>
+                    <a:pt x="0" y="0"/>
+                  </a:lnTo>
+                  <a:lnTo>
+                    <a:pt x="0" y="0"/>
+                  </a:lnTo>
+                </a:path>
+              </a:pathLst>
+            </a:custGeom>
+            <a:ln w="6775" cap="flat">
+              <a:solidFill>
+                <a:srgbClr val="EBEBEB">
+                  <a:alpha val="100000"/>
+                </a:srgbClr>
+              </a:solidFill>
+              <a:prstDash val="solid"/>
+              <a:round/>
+            </a:ln>
+          </p:spPr>
+          <p:txBody>
+            <a:bodyPr/>
+            <a:lstStyle/>
+            <a:p/>
+          </p:txBody>
+        </p:sp>
+        <p:sp>
+          <p:nvSpPr>
+            <p:cNvPr id="53" name="pl53"/>
+            <p:cNvSpPr/>
+            <p:nvPr/>
+          </p:nvSpPr>
+          <p:spPr>
+            <a:xfrm>
+              <a:off x="5254082" y="4336484"/>
+              <a:ext cx="0" cy="1317069"/>
+            </a:xfrm>
+            <a:custGeom>
+              <a:avLst/>
+              <a:pathLst>
+                <a:path w="0" h="1317069">
+                  <a:moveTo>
+                    <a:pt x="0" y="1317069"/>
+                  </a:moveTo>
+                  <a:lnTo>
+                    <a:pt x="0" y="0"/>
+                  </a:lnTo>
+                  <a:lnTo>
+                    <a:pt x="0" y="0"/>
+                  </a:lnTo>
+                </a:path>
+              </a:pathLst>
+            </a:custGeom>
+            <a:ln w="6775" cap="flat">
+              <a:solidFill>
+                <a:srgbClr val="EBEBEB">
+                  <a:alpha val="100000"/>
+                </a:srgbClr>
+              </a:solidFill>
+              <a:prstDash val="solid"/>
+              <a:round/>
+            </a:ln>
+          </p:spPr>
+          <p:txBody>
+            <a:bodyPr/>
+            <a:lstStyle/>
+            <a:p/>
+          </p:txBody>
+        </p:sp>
+        <p:sp>
+          <p:nvSpPr>
+            <p:cNvPr id="54" name="pl54"/>
+            <p:cNvSpPr/>
+            <p:nvPr/>
+          </p:nvSpPr>
+          <p:spPr>
+            <a:xfrm>
+              <a:off x="6104592" y="4336484"/>
+              <a:ext cx="0" cy="1317069"/>
+            </a:xfrm>
+            <a:custGeom>
+              <a:avLst/>
+              <a:pathLst>
+                <a:path w="0" h="1317069">
+                  <a:moveTo>
+                    <a:pt x="0" y="1317069"/>
+                  </a:moveTo>
+                  <a:lnTo>
+                    <a:pt x="0" y="0"/>
+                  </a:lnTo>
+                  <a:lnTo>
+                    <a:pt x="0" y="0"/>
+                  </a:lnTo>
+                </a:path>
+              </a:pathLst>
+            </a:custGeom>
+            <a:ln w="6775" cap="flat">
+              <a:solidFill>
+                <a:srgbClr val="EBEBEB">
+                  <a:alpha val="100000"/>
+                </a:srgbClr>
+              </a:solidFill>
+              <a:prstDash val="solid"/>
+              <a:round/>
+            </a:ln>
+          </p:spPr>
+          <p:txBody>
+            <a:bodyPr/>
+            <a:lstStyle/>
+            <a:p/>
+          </p:txBody>
+        </p:sp>
+        <p:sp>
+          <p:nvSpPr>
+            <p:cNvPr id="55" name="pl55"/>
+            <p:cNvSpPr/>
+            <p:nvPr/>
+          </p:nvSpPr>
+          <p:spPr>
+            <a:xfrm>
+              <a:off x="6955101" y="4336484"/>
+              <a:ext cx="0" cy="1317069"/>
+            </a:xfrm>
+            <a:custGeom>
+              <a:avLst/>
+              <a:pathLst>
+                <a:path w="0" h="1317069">
+                  <a:moveTo>
+                    <a:pt x="0" y="1317069"/>
+                  </a:moveTo>
+                  <a:lnTo>
+                    <a:pt x="0" y="0"/>
+                  </a:lnTo>
+                  <a:lnTo>
+                    <a:pt x="0" y="0"/>
+                  </a:lnTo>
+                </a:path>
+              </a:pathLst>
+            </a:custGeom>
+            <a:ln w="6775" cap="flat">
+              <a:solidFill>
+                <a:srgbClr val="EBEBEB">
+                  <a:alpha val="100000"/>
+                </a:srgbClr>
+              </a:solidFill>
+              <a:prstDash val="solid"/>
+              <a:round/>
+            </a:ln>
+          </p:spPr>
+          <p:txBody>
+            <a:bodyPr/>
+            <a:lstStyle/>
+            <a:p/>
+          </p:txBody>
+        </p:sp>
+        <p:sp>
+          <p:nvSpPr>
+            <p:cNvPr id="56" name="pl56"/>
+            <p:cNvSpPr/>
+            <p:nvPr/>
+          </p:nvSpPr>
+          <p:spPr>
+            <a:xfrm>
+              <a:off x="7805611" y="4336484"/>
+              <a:ext cx="0" cy="1317069"/>
+            </a:xfrm>
+            <a:custGeom>
+              <a:avLst/>
+              <a:pathLst>
+                <a:path w="0" h="1317069">
+                  <a:moveTo>
+                    <a:pt x="0" y="1317069"/>
+                  </a:moveTo>
+                  <a:lnTo>
+                    <a:pt x="0" y="0"/>
+                  </a:lnTo>
+                  <a:lnTo>
+                    <a:pt x="0" y="0"/>
+                  </a:lnTo>
+                </a:path>
+              </a:pathLst>
+            </a:custGeom>
+            <a:ln w="6775" cap="flat">
+              <a:solidFill>
+                <a:srgbClr val="EBEBEB">
+                  <a:alpha val="100000"/>
+                </a:srgbClr>
+              </a:solidFill>
+              <a:prstDash val="solid"/>
+              <a:round/>
+            </a:ln>
+          </p:spPr>
+          <p:txBody>
+            <a:bodyPr/>
+            <a:lstStyle/>
+            <a:p/>
+          </p:txBody>
+        </p:sp>
+        <p:sp>
+          <p:nvSpPr>
+            <p:cNvPr id="57" name="pl57"/>
+            <p:cNvSpPr/>
+            <p:nvPr/>
+          </p:nvSpPr>
+          <p:spPr>
+            <a:xfrm>
+              <a:off x="887106" y="5593686"/>
+              <a:ext cx="7660515" cy="0"/>
+            </a:xfrm>
+            <a:custGeom>
+              <a:avLst/>
+              <a:pathLst>
+                <a:path w="7660515" h="0">
+                  <a:moveTo>
+                    <a:pt x="0" y="0"/>
+                  </a:moveTo>
+                  <a:lnTo>
+                    <a:pt x="7660515" y="0"/>
+                  </a:lnTo>
+                  <a:lnTo>
+                    <a:pt x="7660515" y="0"/>
+                  </a:lnTo>
+                </a:path>
+              </a:pathLst>
+            </a:custGeom>
+            <a:ln w="13550" cap="flat">
+              <a:solidFill>
+                <a:srgbClr val="EBEBEB">
+                  <a:alpha val="100000"/>
+                </a:srgbClr>
+              </a:solidFill>
+              <a:prstDash val="solid"/>
+              <a:round/>
+            </a:ln>
+          </p:spPr>
+          <p:txBody>
+            <a:bodyPr/>
+            <a:lstStyle/>
+            <a:p/>
+          </p:txBody>
+        </p:sp>
+        <p:sp>
+          <p:nvSpPr>
+            <p:cNvPr id="58" name="pl58"/>
+            <p:cNvSpPr/>
+            <p:nvPr/>
+          </p:nvSpPr>
+          <p:spPr>
+            <a:xfrm>
+              <a:off x="887106" y="5294352"/>
+              <a:ext cx="7660515" cy="0"/>
+            </a:xfrm>
+            <a:custGeom>
+              <a:avLst/>
+              <a:pathLst>
+                <a:path w="7660515" h="0">
+                  <a:moveTo>
+                    <a:pt x="0" y="0"/>
+                  </a:moveTo>
+                  <a:lnTo>
+                    <a:pt x="7660515" y="0"/>
+                  </a:lnTo>
+                  <a:lnTo>
+                    <a:pt x="7660515" y="0"/>
+                  </a:lnTo>
+                </a:path>
+              </a:pathLst>
+            </a:custGeom>
+            <a:ln w="13550" cap="flat">
+              <a:solidFill>
+                <a:srgbClr val="EBEBEB">
+                  <a:alpha val="100000"/>
+                </a:srgbClr>
+              </a:solidFill>
+              <a:prstDash val="solid"/>
+              <a:round/>
+            </a:ln>
+          </p:spPr>
+          <p:txBody>
+            <a:bodyPr/>
+            <a:lstStyle/>
+            <a:p/>
+          </p:txBody>
+        </p:sp>
+        <p:sp>
+          <p:nvSpPr>
+            <p:cNvPr id="59" name="pl59"/>
+            <p:cNvSpPr/>
+            <p:nvPr/>
+          </p:nvSpPr>
+          <p:spPr>
+            <a:xfrm>
+              <a:off x="887106" y="4995019"/>
+              <a:ext cx="7660515" cy="0"/>
+            </a:xfrm>
+            <a:custGeom>
+              <a:avLst/>
+              <a:pathLst>
+                <a:path w="7660515" h="0">
+                  <a:moveTo>
+                    <a:pt x="0" y="0"/>
+                  </a:moveTo>
+                  <a:lnTo>
+                    <a:pt x="7660515" y="0"/>
+                  </a:lnTo>
+                  <a:lnTo>
+                    <a:pt x="7660515" y="0"/>
+                  </a:lnTo>
+                </a:path>
+              </a:pathLst>
+            </a:custGeom>
+            <a:ln w="13550" cap="flat">
+              <a:solidFill>
+                <a:srgbClr val="EBEBEB">
+                  <a:alpha val="100000"/>
+                </a:srgbClr>
+              </a:solidFill>
+              <a:prstDash val="solid"/>
+              <a:round/>
+            </a:ln>
+          </p:spPr>
+          <p:txBody>
+            <a:bodyPr/>
+            <a:lstStyle/>
+            <a:p/>
+          </p:txBody>
+        </p:sp>
+        <p:sp>
+          <p:nvSpPr>
+            <p:cNvPr id="60" name="pl60"/>
+            <p:cNvSpPr/>
+            <p:nvPr/>
+          </p:nvSpPr>
+          <p:spPr>
+            <a:xfrm>
+              <a:off x="887106" y="4695685"/>
+              <a:ext cx="7660515" cy="0"/>
+            </a:xfrm>
+            <a:custGeom>
+              <a:avLst/>
+              <a:pathLst>
+                <a:path w="7660515" h="0">
+                  <a:moveTo>
+                    <a:pt x="0" y="0"/>
+                  </a:moveTo>
+                  <a:lnTo>
+                    <a:pt x="7660515" y="0"/>
+                  </a:lnTo>
+                  <a:lnTo>
+                    <a:pt x="7660515" y="0"/>
+                  </a:lnTo>
+                </a:path>
+              </a:pathLst>
+            </a:custGeom>
+            <a:ln w="13550" cap="flat">
+              <a:solidFill>
+                <a:srgbClr val="EBEBEB">
+                  <a:alpha val="100000"/>
+                </a:srgbClr>
+              </a:solidFill>
+              <a:prstDash val="solid"/>
+              <a:round/>
+            </a:ln>
+          </p:spPr>
+          <p:txBody>
+            <a:bodyPr/>
+            <a:lstStyle/>
+            <a:p/>
+          </p:txBody>
+        </p:sp>
+        <p:sp>
+          <p:nvSpPr>
+            <p:cNvPr id="61" name="pl61"/>
+            <p:cNvSpPr/>
+            <p:nvPr/>
+          </p:nvSpPr>
+          <p:spPr>
+            <a:xfrm>
+              <a:off x="887106" y="4396351"/>
+              <a:ext cx="7660515" cy="0"/>
+            </a:xfrm>
+            <a:custGeom>
+              <a:avLst/>
+              <a:pathLst>
+                <a:path w="7660515" h="0">
+                  <a:moveTo>
+                    <a:pt x="0" y="0"/>
+                  </a:moveTo>
+                  <a:lnTo>
+                    <a:pt x="7660515" y="0"/>
+                  </a:lnTo>
+                  <a:lnTo>
+                    <a:pt x="7660515" y="0"/>
+                  </a:lnTo>
+                </a:path>
+              </a:pathLst>
+            </a:custGeom>
+            <a:ln w="13550" cap="flat">
+              <a:solidFill>
+                <a:srgbClr val="EBEBEB">
+                  <a:alpha val="100000"/>
+                </a:srgbClr>
+              </a:solidFill>
+              <a:prstDash val="solid"/>
+              <a:round/>
+            </a:ln>
+          </p:spPr>
+          <p:txBody>
+            <a:bodyPr/>
+            <a:lstStyle/>
+            <a:p/>
+          </p:txBody>
+        </p:sp>
+        <p:sp>
+          <p:nvSpPr>
+            <p:cNvPr id="62" name="pl62"/>
+            <p:cNvSpPr/>
+            <p:nvPr/>
+          </p:nvSpPr>
+          <p:spPr>
+            <a:xfrm>
+              <a:off x="1426790" y="4336484"/>
+              <a:ext cx="0" cy="1317069"/>
+            </a:xfrm>
+            <a:custGeom>
+              <a:avLst/>
+              <a:pathLst>
+                <a:path w="0" h="1317069">
+                  <a:moveTo>
+                    <a:pt x="0" y="1317069"/>
+                  </a:moveTo>
+                  <a:lnTo>
+                    <a:pt x="0" y="0"/>
+                  </a:lnTo>
+                  <a:lnTo>
+                    <a:pt x="0" y="0"/>
+                  </a:lnTo>
+                </a:path>
+              </a:pathLst>
+            </a:custGeom>
+            <a:ln w="13550" cap="flat">
+              <a:solidFill>
+                <a:srgbClr val="EBEBEB">
+                  <a:alpha val="100000"/>
+                </a:srgbClr>
+              </a:solidFill>
+              <a:prstDash val="solid"/>
+              <a:round/>
+            </a:ln>
+          </p:spPr>
+          <p:txBody>
+            <a:bodyPr/>
+            <a:lstStyle/>
+            <a:p/>
+          </p:txBody>
+        </p:sp>
+        <p:sp>
+          <p:nvSpPr>
+            <p:cNvPr id="63" name="pl63"/>
+            <p:cNvSpPr/>
+            <p:nvPr/>
+          </p:nvSpPr>
+          <p:spPr>
+            <a:xfrm>
+              <a:off x="2277299" y="4336484"/>
+              <a:ext cx="0" cy="1317069"/>
+            </a:xfrm>
+            <a:custGeom>
+              <a:avLst/>
+              <a:pathLst>
+                <a:path w="0" h="1317069">
+                  <a:moveTo>
+                    <a:pt x="0" y="1317069"/>
+                  </a:moveTo>
+                  <a:lnTo>
+                    <a:pt x="0" y="0"/>
+                  </a:lnTo>
+                  <a:lnTo>
+                    <a:pt x="0" y="0"/>
+                  </a:lnTo>
+                </a:path>
+              </a:pathLst>
+            </a:custGeom>
+            <a:ln w="13550" cap="flat">
+              <a:solidFill>
+                <a:srgbClr val="EBEBEB">
+                  <a:alpha val="100000"/>
+                </a:srgbClr>
+              </a:solidFill>
+              <a:prstDash val="solid"/>
+              <a:round/>
+            </a:ln>
+          </p:spPr>
+          <p:txBody>
+            <a:bodyPr/>
+            <a:lstStyle/>
+            <a:p/>
+          </p:txBody>
+        </p:sp>
+        <p:sp>
+          <p:nvSpPr>
+            <p:cNvPr id="64" name="pl64"/>
+            <p:cNvSpPr/>
+            <p:nvPr/>
+          </p:nvSpPr>
+          <p:spPr>
+            <a:xfrm>
+              <a:off x="3127809" y="4336484"/>
+              <a:ext cx="0" cy="1317069"/>
+            </a:xfrm>
+            <a:custGeom>
+              <a:avLst/>
+              <a:pathLst>
+                <a:path w="0" h="1317069">
+                  <a:moveTo>
+                    <a:pt x="0" y="1317069"/>
+                  </a:moveTo>
+                  <a:lnTo>
+                    <a:pt x="0" y="0"/>
+                  </a:lnTo>
+                  <a:lnTo>
+                    <a:pt x="0" y="0"/>
+                  </a:lnTo>
+                </a:path>
+              </a:pathLst>
+            </a:custGeom>
+            <a:ln w="13550" cap="flat">
+              <a:solidFill>
+                <a:srgbClr val="EBEBEB">
+                  <a:alpha val="100000"/>
+                </a:srgbClr>
+              </a:solidFill>
+              <a:prstDash val="solid"/>
+              <a:round/>
+            </a:ln>
+          </p:spPr>
+          <p:txBody>
+            <a:bodyPr/>
+            <a:lstStyle/>
+            <a:p/>
+          </p:txBody>
+        </p:sp>
+        <p:sp>
+          <p:nvSpPr>
+            <p:cNvPr id="65" name="pl65"/>
+            <p:cNvSpPr/>
+            <p:nvPr/>
+          </p:nvSpPr>
+          <p:spPr>
+            <a:xfrm>
+              <a:off x="3978318" y="4336484"/>
+              <a:ext cx="0" cy="1317069"/>
+            </a:xfrm>
+            <a:custGeom>
+              <a:avLst/>
+              <a:pathLst>
+                <a:path w="0" h="1317069">
+                  <a:moveTo>
+                    <a:pt x="0" y="1317069"/>
+                  </a:moveTo>
+                  <a:lnTo>
+                    <a:pt x="0" y="0"/>
+                  </a:lnTo>
+                  <a:lnTo>
+                    <a:pt x="0" y="0"/>
+                  </a:lnTo>
+                </a:path>
+              </a:pathLst>
+            </a:custGeom>
+            <a:ln w="13550" cap="flat">
+              <a:solidFill>
+                <a:srgbClr val="EBEBEB">
+                  <a:alpha val="100000"/>
+                </a:srgbClr>
+              </a:solidFill>
+              <a:prstDash val="solid"/>
+              <a:round/>
+            </a:ln>
+          </p:spPr>
+          <p:txBody>
+            <a:bodyPr/>
+            <a:lstStyle/>
+            <a:p/>
+          </p:txBody>
+        </p:sp>
+        <p:sp>
+          <p:nvSpPr>
+            <p:cNvPr id="66" name="pl66"/>
+            <p:cNvSpPr/>
+            <p:nvPr/>
+          </p:nvSpPr>
+          <p:spPr>
+            <a:xfrm>
+              <a:off x="4828828" y="4336484"/>
+              <a:ext cx="0" cy="1317069"/>
+            </a:xfrm>
+            <a:custGeom>
+              <a:avLst/>
+              <a:pathLst>
+                <a:path w="0" h="1317069">
+                  <a:moveTo>
+                    <a:pt x="0" y="1317069"/>
+                  </a:moveTo>
+                  <a:lnTo>
+                    <a:pt x="0" y="0"/>
+                  </a:lnTo>
+                  <a:lnTo>
+                    <a:pt x="0" y="0"/>
+                  </a:lnTo>
+                </a:path>
+              </a:pathLst>
+            </a:custGeom>
+            <a:ln w="13550" cap="flat">
+              <a:solidFill>
+                <a:srgbClr val="EBEBEB">
+                  <a:alpha val="100000"/>
+                </a:srgbClr>
+              </a:solidFill>
+              <a:prstDash val="solid"/>
+              <a:round/>
+            </a:ln>
+          </p:spPr>
+          <p:txBody>
+            <a:bodyPr/>
+            <a:lstStyle/>
+            <a:p/>
+          </p:txBody>
+        </p:sp>
+        <p:sp>
+          <p:nvSpPr>
+            <p:cNvPr id="67" name="pl67"/>
+            <p:cNvSpPr/>
+            <p:nvPr/>
+          </p:nvSpPr>
+          <p:spPr>
+            <a:xfrm>
+              <a:off x="5679337" y="4336484"/>
+              <a:ext cx="0" cy="1317069"/>
+            </a:xfrm>
+            <a:custGeom>
+              <a:avLst/>
+              <a:pathLst>
+                <a:path w="0" h="1317069">
+                  <a:moveTo>
+                    <a:pt x="0" y="1317069"/>
+                  </a:moveTo>
+                  <a:lnTo>
+                    <a:pt x="0" y="0"/>
+                  </a:lnTo>
+                  <a:lnTo>
+                    <a:pt x="0" y="0"/>
+                  </a:lnTo>
+                </a:path>
+              </a:pathLst>
+            </a:custGeom>
+            <a:ln w="13550" cap="flat">
+              <a:solidFill>
+                <a:srgbClr val="EBEBEB">
+                  <a:alpha val="100000"/>
+                </a:srgbClr>
+              </a:solidFill>
+              <a:prstDash val="solid"/>
+              <a:round/>
+            </a:ln>
+          </p:spPr>
+          <p:txBody>
+            <a:bodyPr/>
+            <a:lstStyle/>
+            <a:p/>
+          </p:txBody>
+        </p:sp>
+        <p:sp>
+          <p:nvSpPr>
+            <p:cNvPr id="68" name="pl68"/>
+            <p:cNvSpPr/>
+            <p:nvPr/>
+          </p:nvSpPr>
+          <p:spPr>
+            <a:xfrm>
+              <a:off x="6529847" y="4336484"/>
+              <a:ext cx="0" cy="1317069"/>
+            </a:xfrm>
+            <a:custGeom>
+              <a:avLst/>
+              <a:pathLst>
+                <a:path w="0" h="1317069">
+                  <a:moveTo>
+                    <a:pt x="0" y="1317069"/>
+                  </a:moveTo>
+                  <a:lnTo>
+                    <a:pt x="0" y="0"/>
+                  </a:lnTo>
+                  <a:lnTo>
+                    <a:pt x="0" y="0"/>
+                  </a:lnTo>
+                </a:path>
+              </a:pathLst>
+            </a:custGeom>
+            <a:ln w="13550" cap="flat">
+              <a:solidFill>
+                <a:srgbClr val="EBEBEB">
+                  <a:alpha val="100000"/>
+                </a:srgbClr>
+              </a:solidFill>
+              <a:prstDash val="solid"/>
+              <a:round/>
+            </a:ln>
+          </p:spPr>
+          <p:txBody>
+            <a:bodyPr/>
+            <a:lstStyle/>
+            <a:p/>
+          </p:txBody>
+        </p:sp>
+        <p:sp>
+          <p:nvSpPr>
+            <p:cNvPr id="69" name="pl69"/>
+            <p:cNvSpPr/>
+            <p:nvPr/>
+          </p:nvSpPr>
+          <p:spPr>
+            <a:xfrm>
+              <a:off x="7380356" y="4336484"/>
+              <a:ext cx="0" cy="1317069"/>
+            </a:xfrm>
+            <a:custGeom>
+              <a:avLst/>
+              <a:pathLst>
+                <a:path w="0" h="1317069">
+                  <a:moveTo>
+                    <a:pt x="0" y="1317069"/>
+                  </a:moveTo>
+                  <a:lnTo>
+                    <a:pt x="0" y="0"/>
+                  </a:lnTo>
+                  <a:lnTo>
+                    <a:pt x="0" y="0"/>
+                  </a:lnTo>
+                </a:path>
+              </a:pathLst>
+            </a:custGeom>
+            <a:ln w="13550" cap="flat">
+              <a:solidFill>
+                <a:srgbClr val="EBEBEB">
+                  <a:alpha val="100000"/>
+                </a:srgbClr>
+              </a:solidFill>
+              <a:prstDash val="solid"/>
+              <a:round/>
+            </a:ln>
+          </p:spPr>
+          <p:txBody>
+            <a:bodyPr/>
+            <a:lstStyle/>
+            <a:p/>
+          </p:txBody>
+        </p:sp>
+        <p:sp>
+          <p:nvSpPr>
+            <p:cNvPr id="70" name="pl70"/>
+            <p:cNvSpPr/>
+            <p:nvPr/>
+          </p:nvSpPr>
+          <p:spPr>
+            <a:xfrm>
+              <a:off x="8230866" y="4336484"/>
+              <a:ext cx="0" cy="1317069"/>
+            </a:xfrm>
+            <a:custGeom>
+              <a:avLst/>
+              <a:pathLst>
+                <a:path w="0" h="1317069">
+                  <a:moveTo>
+                    <a:pt x="0" y="1317069"/>
+                  </a:moveTo>
+                  <a:lnTo>
+                    <a:pt x="0" y="0"/>
+                  </a:lnTo>
+                  <a:lnTo>
+                    <a:pt x="0" y="0"/>
+                  </a:lnTo>
+                </a:path>
+              </a:pathLst>
+            </a:custGeom>
+            <a:ln w="13550" cap="flat">
+              <a:solidFill>
+                <a:srgbClr val="EBEBEB">
+                  <a:alpha val="100000"/>
+                </a:srgbClr>
+              </a:solidFill>
+              <a:prstDash val="solid"/>
+              <a:round/>
+            </a:ln>
+          </p:spPr>
+          <p:txBody>
+            <a:bodyPr/>
+            <a:lstStyle/>
+            <a:p/>
+          </p:txBody>
+        </p:sp>
+        <p:sp>
+          <p:nvSpPr>
+            <p:cNvPr id="71" name="pg71"/>
+            <p:cNvSpPr/>
+            <p:nvPr/>
+          </p:nvSpPr>
+          <p:spPr>
+            <a:xfrm>
+              <a:off x="1235312" y="4457370"/>
+              <a:ext cx="6964104" cy="1081892"/>
+            </a:xfrm>
+            <a:custGeom>
+              <a:avLst/>
+              <a:pathLst>
+                <a:path w="6964104" h="1081892">
+                  <a:moveTo>
+                    <a:pt x="0" y="0"/>
+                  </a:moveTo>
+                  <a:lnTo>
+                    <a:pt x="70344" y="34348"/>
+                  </a:lnTo>
+                  <a:lnTo>
+                    <a:pt x="140688" y="67659"/>
+                  </a:lnTo>
+                  <a:lnTo>
+                    <a:pt x="211033" y="99962"/>
+                  </a:lnTo>
+                  <a:lnTo>
+                    <a:pt x="281377" y="131289"/>
+                  </a:lnTo>
+                  <a:lnTo>
+                    <a:pt x="351722" y="161669"/>
+                  </a:lnTo>
+                  <a:lnTo>
+                    <a:pt x="422066" y="191131"/>
+                  </a:lnTo>
+                  <a:lnTo>
+                    <a:pt x="492411" y="219702"/>
+                  </a:lnTo>
+                  <a:lnTo>
+                    <a:pt x="562755" y="247410"/>
+                  </a:lnTo>
+                  <a:lnTo>
+                    <a:pt x="633100" y="274280"/>
+                  </a:lnTo>
+                  <a:lnTo>
+                    <a:pt x="703444" y="300337"/>
+                  </a:lnTo>
+                  <a:lnTo>
+                    <a:pt x="773789" y="325607"/>
+                  </a:lnTo>
+                  <a:lnTo>
+                    <a:pt x="844133" y="350114"/>
+                  </a:lnTo>
+                  <a:lnTo>
+                    <a:pt x="914478" y="373879"/>
+                  </a:lnTo>
+                  <a:lnTo>
+                    <a:pt x="984822" y="396926"/>
+                  </a:lnTo>
+                  <a:lnTo>
+                    <a:pt x="1055167" y="419276"/>
+                  </a:lnTo>
+                  <a:lnTo>
+                    <a:pt x="1125511" y="440951"/>
+                  </a:lnTo>
+                  <a:lnTo>
+                    <a:pt x="1195856" y="461971"/>
+                  </a:lnTo>
+                  <a:lnTo>
+                    <a:pt x="1266200" y="482355"/>
+                  </a:lnTo>
+                  <a:lnTo>
+                    <a:pt x="1336545" y="502123"/>
+                  </a:lnTo>
+                  <a:lnTo>
+                    <a:pt x="1406889" y="521293"/>
+                  </a:lnTo>
+                  <a:lnTo>
+                    <a:pt x="1477234" y="539884"/>
+                  </a:lnTo>
+                  <a:lnTo>
+                    <a:pt x="1547578" y="557913"/>
+                  </a:lnTo>
+                  <a:lnTo>
+                    <a:pt x="1617923" y="575397"/>
+                  </a:lnTo>
+                  <a:lnTo>
+                    <a:pt x="1688267" y="592353"/>
+                  </a:lnTo>
+                  <a:lnTo>
+                    <a:pt x="1758612" y="608796"/>
+                  </a:lnTo>
+                  <a:lnTo>
+                    <a:pt x="1828956" y="624742"/>
+                  </a:lnTo>
+                  <a:lnTo>
+                    <a:pt x="1899301" y="640206"/>
+                  </a:lnTo>
+                  <a:lnTo>
+                    <a:pt x="1969645" y="655202"/>
+                  </a:lnTo>
+                  <a:lnTo>
+                    <a:pt x="2039990" y="669745"/>
+                  </a:lnTo>
+                  <a:lnTo>
+                    <a:pt x="2110334" y="683849"/>
+                  </a:lnTo>
+                  <a:lnTo>
+                    <a:pt x="2180679" y="697526"/>
+                  </a:lnTo>
+                  <a:lnTo>
+                    <a:pt x="2251023" y="710790"/>
+                  </a:lnTo>
+                  <a:lnTo>
+                    <a:pt x="2321368" y="723653"/>
+                  </a:lnTo>
+                  <a:lnTo>
+                    <a:pt x="2391712" y="736127"/>
+                  </a:lnTo>
+                  <a:lnTo>
+                    <a:pt x="2462057" y="748224"/>
+                  </a:lnTo>
+                  <a:lnTo>
+                    <a:pt x="2532401" y="759955"/>
+                  </a:lnTo>
+                  <a:lnTo>
+                    <a:pt x="2602746" y="771332"/>
+                  </a:lnTo>
+                  <a:lnTo>
+                    <a:pt x="2673090" y="782364"/>
+                  </a:lnTo>
+                  <a:lnTo>
+                    <a:pt x="2743435" y="793064"/>
+                  </a:lnTo>
+                  <a:lnTo>
+                    <a:pt x="2813779" y="803440"/>
+                  </a:lnTo>
+                  <a:lnTo>
+                    <a:pt x="2884124" y="813502"/>
+                  </a:lnTo>
+                  <a:lnTo>
+                    <a:pt x="2954468" y="823260"/>
+                  </a:lnTo>
+                  <a:lnTo>
+                    <a:pt x="3024813" y="832723"/>
+                  </a:lnTo>
+                  <a:lnTo>
+                    <a:pt x="3095157" y="838103"/>
+                  </a:lnTo>
+                  <a:lnTo>
+                    <a:pt x="3165502" y="840169"/>
+                  </a:lnTo>
+                  <a:lnTo>
+                    <a:pt x="3235846" y="842221"/>
+                  </a:lnTo>
+                  <a:lnTo>
+                    <a:pt x="3306191" y="844258"/>
+                  </a:lnTo>
+                  <a:lnTo>
+                    <a:pt x="3376535" y="846282"/>
+                  </a:lnTo>
+                  <a:lnTo>
+                    <a:pt x="3446880" y="848291"/>
+                  </a:lnTo>
+                  <a:lnTo>
+                    <a:pt x="3517224" y="850286"/>
+                  </a:lnTo>
+                  <a:lnTo>
+                    <a:pt x="3587569" y="852268"/>
+                  </a:lnTo>
+                  <a:lnTo>
+                    <a:pt x="3657913" y="854236"/>
+                  </a:lnTo>
+                  <a:lnTo>
+                    <a:pt x="3728257" y="856190"/>
+                  </a:lnTo>
+                  <a:lnTo>
+                    <a:pt x="3798602" y="858131"/>
+                  </a:lnTo>
+                  <a:lnTo>
+                    <a:pt x="3868946" y="860058"/>
+                  </a:lnTo>
+                  <a:lnTo>
+                    <a:pt x="3939291" y="861972"/>
+                  </a:lnTo>
+                  <a:lnTo>
+                    <a:pt x="4009635" y="863873"/>
+                  </a:lnTo>
+                  <a:lnTo>
+                    <a:pt x="4079980" y="865761"/>
+                  </a:lnTo>
+                  <a:lnTo>
+                    <a:pt x="4150324" y="867635"/>
+                  </a:lnTo>
+                  <a:lnTo>
+                    <a:pt x="4220669" y="869496"/>
+                  </a:lnTo>
+                  <a:lnTo>
+                    <a:pt x="4291013" y="871345"/>
+                  </a:lnTo>
+                  <a:lnTo>
+                    <a:pt x="4361358" y="873181"/>
+                  </a:lnTo>
+                  <a:lnTo>
+                    <a:pt x="4431702" y="875004"/>
+                  </a:lnTo>
+                  <a:lnTo>
+                    <a:pt x="4502047" y="876814"/>
+                  </a:lnTo>
+                  <a:lnTo>
+                    <a:pt x="4572391" y="878612"/>
+                  </a:lnTo>
+                  <a:lnTo>
+                    <a:pt x="4642736" y="880397"/>
+                  </a:lnTo>
+                  <a:lnTo>
+                    <a:pt x="4713080" y="882171"/>
+                  </a:lnTo>
+                  <a:lnTo>
+                    <a:pt x="4783425" y="883931"/>
+                  </a:lnTo>
+                  <a:lnTo>
+                    <a:pt x="4853769" y="885680"/>
+                  </a:lnTo>
+                  <a:lnTo>
+                    <a:pt x="4924114" y="887416"/>
+                  </a:lnTo>
+                  <a:lnTo>
+                    <a:pt x="4994458" y="889141"/>
+                  </a:lnTo>
+                  <a:lnTo>
+                    <a:pt x="5064803" y="890853"/>
+                  </a:lnTo>
+                  <a:lnTo>
+                    <a:pt x="5135147" y="892554"/>
+                  </a:lnTo>
+                  <a:lnTo>
+                    <a:pt x="5205492" y="894243"/>
+                  </a:lnTo>
+                  <a:lnTo>
+                    <a:pt x="5275836" y="895920"/>
+                  </a:lnTo>
+                  <a:lnTo>
+                    <a:pt x="5346181" y="897585"/>
+                  </a:lnTo>
+                  <a:lnTo>
+                    <a:pt x="5416525" y="899239"/>
+                  </a:lnTo>
+                  <a:lnTo>
+                    <a:pt x="5486870" y="900882"/>
+                  </a:lnTo>
+                  <a:lnTo>
+                    <a:pt x="5557214" y="902513"/>
+                  </a:lnTo>
+                  <a:lnTo>
+                    <a:pt x="5627559" y="904133"/>
+                  </a:lnTo>
+                  <a:lnTo>
+                    <a:pt x="5697903" y="905741"/>
+                  </a:lnTo>
+                  <a:lnTo>
+                    <a:pt x="5768248" y="907339"/>
+                  </a:lnTo>
+                  <a:lnTo>
+                    <a:pt x="5838592" y="908925"/>
+                  </a:lnTo>
+                  <a:lnTo>
+                    <a:pt x="5908937" y="910501"/>
+                  </a:lnTo>
+                  <a:lnTo>
+                    <a:pt x="5979281" y="912065"/>
+                  </a:lnTo>
+                  <a:lnTo>
+                    <a:pt x="6049626" y="913619"/>
+                  </a:lnTo>
+                  <a:lnTo>
+                    <a:pt x="6119970" y="915162"/>
+                  </a:lnTo>
+                  <a:lnTo>
+                    <a:pt x="6190315" y="916694"/>
+                  </a:lnTo>
+                  <a:lnTo>
+                    <a:pt x="6260659" y="918215"/>
+                  </a:lnTo>
+                  <a:lnTo>
+                    <a:pt x="6331004" y="919726"/>
+                  </a:lnTo>
+                  <a:lnTo>
+                    <a:pt x="6401348" y="921227"/>
+                  </a:lnTo>
+                  <a:lnTo>
+                    <a:pt x="6471693" y="922717"/>
+                  </a:lnTo>
+                  <a:lnTo>
+                    <a:pt x="6542037" y="924197"/>
+                  </a:lnTo>
+                  <a:lnTo>
+                    <a:pt x="6612382" y="925666"/>
+                  </a:lnTo>
+                  <a:lnTo>
+                    <a:pt x="6682726" y="927126"/>
+                  </a:lnTo>
+                  <a:lnTo>
+                    <a:pt x="6753071" y="928575"/>
+                  </a:lnTo>
+                  <a:lnTo>
+                    <a:pt x="6823415" y="930014"/>
+                  </a:lnTo>
+                  <a:lnTo>
+                    <a:pt x="6893760" y="931444"/>
+                  </a:lnTo>
+                  <a:lnTo>
+                    <a:pt x="6964104" y="932863"/>
+                  </a:lnTo>
+                  <a:lnTo>
+                    <a:pt x="6964104" y="1081892"/>
+                  </a:lnTo>
+                  <a:lnTo>
+                    <a:pt x="6893760" y="1080195"/>
+                  </a:lnTo>
+                  <a:lnTo>
+                    <a:pt x="6823415" y="1078446"/>
+                  </a:lnTo>
+                  <a:lnTo>
+                    <a:pt x="6753071" y="1076642"/>
+                  </a:lnTo>
+                  <a:lnTo>
+                    <a:pt x="6682726" y="1074782"/>
+                  </a:lnTo>
+                  <a:lnTo>
+                    <a:pt x="6612382" y="1072864"/>
+                  </a:lnTo>
+                  <a:lnTo>
+                    <a:pt x="6542037" y="1070886"/>
+                  </a:lnTo>
+                  <a:lnTo>
+                    <a:pt x="6471693" y="1068847"/>
+                  </a:lnTo>
+                  <a:lnTo>
+                    <a:pt x="6401348" y="1066744"/>
+                  </a:lnTo>
+                  <a:lnTo>
+                    <a:pt x="6331004" y="1064575"/>
+                  </a:lnTo>
+                  <a:lnTo>
+                    <a:pt x="6260659" y="1062339"/>
+                  </a:lnTo>
+                  <a:lnTo>
+                    <a:pt x="6190315" y="1060033"/>
+                  </a:lnTo>
+                  <a:lnTo>
+                    <a:pt x="6119970" y="1057656"/>
+                  </a:lnTo>
+                  <a:lnTo>
+                    <a:pt x="6049626" y="1055204"/>
+                  </a:lnTo>
+                  <a:lnTo>
+                    <a:pt x="5979281" y="1052676"/>
+                  </a:lnTo>
+                  <a:lnTo>
+                    <a:pt x="5908937" y="1050068"/>
+                  </a:lnTo>
+                  <a:lnTo>
+                    <a:pt x="5838592" y="1047380"/>
+                  </a:lnTo>
+                  <a:lnTo>
+                    <a:pt x="5768248" y="1044608"/>
+                  </a:lnTo>
+                  <a:lnTo>
+                    <a:pt x="5697903" y="1041749"/>
+                  </a:lnTo>
+                  <a:lnTo>
+                    <a:pt x="5627559" y="1038802"/>
+                  </a:lnTo>
+                  <a:lnTo>
+                    <a:pt x="5557214" y="1035762"/>
+                  </a:lnTo>
+                  <a:lnTo>
+                    <a:pt x="5486870" y="1032628"/>
+                  </a:lnTo>
+                  <a:lnTo>
+                    <a:pt x="5416525" y="1029396"/>
+                  </a:lnTo>
+                  <a:lnTo>
+                    <a:pt x="5346181" y="1026063"/>
+                  </a:lnTo>
+                  <a:lnTo>
+                    <a:pt x="5275836" y="1022627"/>
+                  </a:lnTo>
+                  <a:lnTo>
+                    <a:pt x="5205492" y="1019083"/>
+                  </a:lnTo>
+                  <a:lnTo>
+                    <a:pt x="5135147" y="1015429"/>
+                  </a:lnTo>
+                  <a:lnTo>
+                    <a:pt x="5064803" y="1011661"/>
+                  </a:lnTo>
+                  <a:lnTo>
+                    <a:pt x="4994458" y="1007775"/>
+                  </a:lnTo>
+                  <a:lnTo>
+                    <a:pt x="4924114" y="1003768"/>
+                  </a:lnTo>
+                  <a:lnTo>
+                    <a:pt x="4853769" y="999637"/>
+                  </a:lnTo>
+                  <a:lnTo>
+                    <a:pt x="4783425" y="995377"/>
+                  </a:lnTo>
+                  <a:lnTo>
+                    <a:pt x="4713080" y="990984"/>
+                  </a:lnTo>
+                  <a:lnTo>
+                    <a:pt x="4642736" y="986453"/>
+                  </a:lnTo>
+                  <a:lnTo>
+                    <a:pt x="4572391" y="981782"/>
+                  </a:lnTo>
+                  <a:lnTo>
+                    <a:pt x="4502047" y="976965"/>
+                  </a:lnTo>
+                  <a:lnTo>
+                    <a:pt x="4431702" y="971998"/>
+                  </a:lnTo>
+                  <a:lnTo>
+                    <a:pt x="4361358" y="966877"/>
+                  </a:lnTo>
+                  <a:lnTo>
+                    <a:pt x="4291013" y="961595"/>
+                  </a:lnTo>
+                  <a:lnTo>
+                    <a:pt x="4220669" y="956149"/>
+                  </a:lnTo>
+                  <a:lnTo>
+                    <a:pt x="4150324" y="950533"/>
+                  </a:lnTo>
+                  <a:lnTo>
+                    <a:pt x="4079980" y="944742"/>
+                  </a:lnTo>
+                  <a:lnTo>
+                    <a:pt x="4009635" y="938771"/>
+                  </a:lnTo>
+                  <a:lnTo>
+                    <a:pt x="3939291" y="932613"/>
+                  </a:lnTo>
+                  <a:lnTo>
+                    <a:pt x="3868946" y="926264"/>
+                  </a:lnTo>
+                  <a:lnTo>
+                    <a:pt x="3798602" y="919716"/>
+                  </a:lnTo>
+                  <a:lnTo>
+                    <a:pt x="3728257" y="912965"/>
+                  </a:lnTo>
+                  <a:lnTo>
+                    <a:pt x="3657913" y="906003"/>
+                  </a:lnTo>
+                  <a:lnTo>
+                    <a:pt x="3587569" y="898824"/>
+                  </a:lnTo>
+                  <a:lnTo>
+                    <a:pt x="3517224" y="891421"/>
+                  </a:lnTo>
+                  <a:lnTo>
+                    <a:pt x="3446880" y="883788"/>
+                  </a:lnTo>
+                  <a:lnTo>
+                    <a:pt x="3376535" y="875917"/>
+                  </a:lnTo>
+                  <a:lnTo>
+                    <a:pt x="3306191" y="867800"/>
+                  </a:lnTo>
+                  <a:lnTo>
+                    <a:pt x="3235846" y="859430"/>
+                  </a:lnTo>
+                  <a:lnTo>
+                    <a:pt x="3165502" y="850800"/>
+                  </a:lnTo>
+                  <a:lnTo>
+                    <a:pt x="3095157" y="841900"/>
+                  </a:lnTo>
+                  <a:lnTo>
+                    <a:pt x="3024813" y="836022"/>
+                  </a:lnTo>
+                  <a:lnTo>
+                    <a:pt x="2954468" y="833927"/>
+                  </a:lnTo>
+                  <a:lnTo>
+                    <a:pt x="2884124" y="831818"/>
+                  </a:lnTo>
+                  <a:lnTo>
+                    <a:pt x="2813779" y="829693"/>
+                  </a:lnTo>
+                  <a:lnTo>
+                    <a:pt x="2743435" y="827554"/>
+                  </a:lnTo>
+                  <a:lnTo>
+                    <a:pt x="2673090" y="825400"/>
+                  </a:lnTo>
+                  <a:lnTo>
+                    <a:pt x="2602746" y="823231"/>
+                  </a:lnTo>
+                  <a:lnTo>
+                    <a:pt x="2532401" y="821047"/>
+                  </a:lnTo>
+                  <a:lnTo>
+                    <a:pt x="2462057" y="818847"/>
+                  </a:lnTo>
+                  <a:lnTo>
+                    <a:pt x="2391712" y="816632"/>
+                  </a:lnTo>
+                  <a:lnTo>
+                    <a:pt x="2321368" y="814402"/>
+                  </a:lnTo>
+                  <a:lnTo>
+                    <a:pt x="2251023" y="812156"/>
+                  </a:lnTo>
+                  <a:lnTo>
+                    <a:pt x="2180679" y="809895"/>
+                  </a:lnTo>
+                  <a:lnTo>
+                    <a:pt x="2110334" y="807618"/>
+                  </a:lnTo>
+                  <a:lnTo>
+                    <a:pt x="2039990" y="805324"/>
+                  </a:lnTo>
+                  <a:lnTo>
+                    <a:pt x="1969645" y="803015"/>
+                  </a:lnTo>
+                  <a:lnTo>
+                    <a:pt x="1899301" y="800690"/>
+                  </a:lnTo>
+                  <a:lnTo>
+                    <a:pt x="1828956" y="798348"/>
+                  </a:lnTo>
+                  <a:lnTo>
+                    <a:pt x="1758612" y="795991"/>
+                  </a:lnTo>
+                  <a:lnTo>
+                    <a:pt x="1688267" y="793616"/>
+                  </a:lnTo>
+                  <a:lnTo>
+                    <a:pt x="1617923" y="791226"/>
+                  </a:lnTo>
+                  <a:lnTo>
+                    <a:pt x="1547578" y="788818"/>
+                  </a:lnTo>
+                  <a:lnTo>
+                    <a:pt x="1477234" y="786394"/>
+                  </a:lnTo>
+                  <a:lnTo>
+                    <a:pt x="1406889" y="783952"/>
+                  </a:lnTo>
+                  <a:lnTo>
+                    <a:pt x="1336545" y="781494"/>
+                  </a:lnTo>
+                  <a:lnTo>
+                    <a:pt x="1266200" y="779019"/>
+                  </a:lnTo>
+                  <a:lnTo>
+                    <a:pt x="1195856" y="776526"/>
+                  </a:lnTo>
+                  <a:lnTo>
+                    <a:pt x="1125511" y="774016"/>
+                  </a:lnTo>
+                  <a:lnTo>
+                    <a:pt x="1055167" y="771488"/>
+                  </a:lnTo>
+                  <a:lnTo>
+                    <a:pt x="984822" y="768943"/>
+                  </a:lnTo>
+                  <a:lnTo>
+                    <a:pt x="914478" y="766380"/>
+                  </a:lnTo>
+                  <a:lnTo>
+                    <a:pt x="844133" y="763799"/>
+                  </a:lnTo>
+                  <a:lnTo>
+                    <a:pt x="773789" y="761201"/>
+                  </a:lnTo>
+                  <a:lnTo>
+                    <a:pt x="703444" y="758584"/>
+                  </a:lnTo>
+                  <a:lnTo>
+                    <a:pt x="633100" y="755948"/>
+                  </a:lnTo>
+                  <a:lnTo>
+                    <a:pt x="562755" y="753295"/>
+                  </a:lnTo>
+                  <a:lnTo>
+                    <a:pt x="492411" y="750623"/>
+                  </a:lnTo>
+                  <a:lnTo>
+                    <a:pt x="422066" y="747932"/>
+                  </a:lnTo>
+                  <a:lnTo>
+                    <a:pt x="351722" y="745222"/>
+                  </a:lnTo>
+                  <a:lnTo>
+                    <a:pt x="281377" y="742494"/>
+                  </a:lnTo>
+                  <a:lnTo>
+                    <a:pt x="211033" y="739746"/>
+                  </a:lnTo>
+                  <a:lnTo>
+                    <a:pt x="140688" y="736980"/>
+                  </a:lnTo>
+                  <a:lnTo>
+                    <a:pt x="70344" y="734194"/>
+                  </a:lnTo>
+                  <a:lnTo>
+                    <a:pt x="0" y="731388"/>
+                  </a:lnTo>
+                  <a:close/>
+                </a:path>
+              </a:pathLst>
+            </a:custGeom>
+            <a:solidFill>
+              <a:srgbClr val="FF8C00">
+                <a:alpha val="20000"/>
+              </a:srgbClr>
+            </a:solidFill>
+          </p:spPr>
+          <p:txBody>
+            <a:bodyPr/>
+            <a:lstStyle/>
+            <a:p/>
+          </p:txBody>
+        </p:sp>
+        <p:sp>
+          <p:nvSpPr>
+            <p:cNvPr id="72" name="pl72"/>
+            <p:cNvSpPr/>
+            <p:nvPr/>
+          </p:nvSpPr>
+          <p:spPr>
+            <a:xfrm>
+              <a:off x="1235312" y="4457370"/>
+              <a:ext cx="6964104" cy="932863"/>
+            </a:xfrm>
+            <a:custGeom>
+              <a:avLst/>
+              <a:pathLst>
+                <a:path w="6964104" h="932863">
+                  <a:moveTo>
+                    <a:pt x="0" y="0"/>
+                  </a:moveTo>
+                  <a:lnTo>
+                    <a:pt x="70344" y="34348"/>
+                  </a:lnTo>
+                  <a:lnTo>
+                    <a:pt x="140688" y="67659"/>
+                  </a:lnTo>
+                  <a:lnTo>
+                    <a:pt x="211033" y="99962"/>
+                  </a:lnTo>
+                  <a:lnTo>
+                    <a:pt x="281377" y="131289"/>
+                  </a:lnTo>
+                  <a:lnTo>
+                    <a:pt x="351722" y="161669"/>
+                  </a:lnTo>
+                  <a:lnTo>
+                    <a:pt x="422066" y="191131"/>
+                  </a:lnTo>
+                  <a:lnTo>
+                    <a:pt x="492411" y="219702"/>
+                  </a:lnTo>
+                  <a:lnTo>
+                    <a:pt x="562755" y="247410"/>
+                  </a:lnTo>
+                  <a:lnTo>
+                    <a:pt x="633100" y="274280"/>
+                  </a:lnTo>
+                  <a:lnTo>
+                    <a:pt x="703444" y="300337"/>
+                  </a:lnTo>
+                  <a:lnTo>
+                    <a:pt x="773789" y="325607"/>
+                  </a:lnTo>
+                  <a:lnTo>
+                    <a:pt x="844133" y="350114"/>
+                  </a:lnTo>
+                  <a:lnTo>
+                    <a:pt x="914478" y="373879"/>
+                  </a:lnTo>
+                  <a:lnTo>
+                    <a:pt x="984822" y="396926"/>
+                  </a:lnTo>
+                  <a:lnTo>
+                    <a:pt x="1055167" y="419276"/>
+                  </a:lnTo>
+                  <a:lnTo>
+                    <a:pt x="1125511" y="440951"/>
+                  </a:lnTo>
+                  <a:lnTo>
+                    <a:pt x="1195856" y="461971"/>
+                  </a:lnTo>
+                  <a:lnTo>
+                    <a:pt x="1266200" y="482355"/>
+                  </a:lnTo>
+                  <a:lnTo>
+                    <a:pt x="1336545" y="502123"/>
+                  </a:lnTo>
+                  <a:lnTo>
+                    <a:pt x="1406889" y="521293"/>
+                  </a:lnTo>
+                  <a:lnTo>
+                    <a:pt x="1477234" y="539884"/>
+                  </a:lnTo>
+                  <a:lnTo>
+                    <a:pt x="1547578" y="557913"/>
+                  </a:lnTo>
+                  <a:lnTo>
+                    <a:pt x="1617923" y="575397"/>
+                  </a:lnTo>
+                  <a:lnTo>
+                    <a:pt x="1688267" y="592353"/>
+                  </a:lnTo>
+                  <a:lnTo>
+                    <a:pt x="1758612" y="608796"/>
+                  </a:lnTo>
+                  <a:lnTo>
+                    <a:pt x="1828956" y="624742"/>
+                  </a:lnTo>
+                  <a:lnTo>
+                    <a:pt x="1899301" y="640206"/>
+                  </a:lnTo>
+                  <a:lnTo>
+                    <a:pt x="1969645" y="655202"/>
+                  </a:lnTo>
+                  <a:lnTo>
+                    <a:pt x="2039990" y="669745"/>
+                  </a:lnTo>
+                  <a:lnTo>
+                    <a:pt x="2110334" y="683849"/>
+                  </a:lnTo>
+                  <a:lnTo>
+                    <a:pt x="2180679" y="697526"/>
+                  </a:lnTo>
+                  <a:lnTo>
+                    <a:pt x="2251023" y="710790"/>
+                  </a:lnTo>
+                  <a:lnTo>
+                    <a:pt x="2321368" y="723653"/>
+                  </a:lnTo>
+                  <a:lnTo>
+                    <a:pt x="2391712" y="736127"/>
+                  </a:lnTo>
+                  <a:lnTo>
+                    <a:pt x="2462057" y="748224"/>
+                  </a:lnTo>
+                  <a:lnTo>
+                    <a:pt x="2532401" y="759955"/>
+                  </a:lnTo>
+                  <a:lnTo>
+                    <a:pt x="2602746" y="771332"/>
+                  </a:lnTo>
+                  <a:lnTo>
+                    <a:pt x="2673090" y="782364"/>
+                  </a:lnTo>
+                  <a:lnTo>
+                    <a:pt x="2743435" y="793064"/>
+                  </a:lnTo>
+                  <a:lnTo>
+                    <a:pt x="2813779" y="803440"/>
+                  </a:lnTo>
+                  <a:lnTo>
+                    <a:pt x="2884124" y="813502"/>
+                  </a:lnTo>
+                  <a:lnTo>
+                    <a:pt x="2954468" y="823260"/>
+                  </a:lnTo>
+                  <a:lnTo>
+                    <a:pt x="3024813" y="832723"/>
+                  </a:lnTo>
+                  <a:lnTo>
+                    <a:pt x="3095157" y="838103"/>
+                  </a:lnTo>
+                  <a:lnTo>
+                    <a:pt x="3165502" y="840169"/>
+                  </a:lnTo>
+                  <a:lnTo>
+                    <a:pt x="3235846" y="842221"/>
+                  </a:lnTo>
+                  <a:lnTo>
+                    <a:pt x="3306191" y="844258"/>
+                  </a:lnTo>
+                  <a:lnTo>
+                    <a:pt x="3376535" y="846282"/>
+                  </a:lnTo>
+                  <a:lnTo>
+                    <a:pt x="3446880" y="848291"/>
+                  </a:lnTo>
+                  <a:lnTo>
+                    <a:pt x="3517224" y="850286"/>
+                  </a:lnTo>
+                  <a:lnTo>
+                    <a:pt x="3587569" y="852268"/>
+                  </a:lnTo>
+                  <a:lnTo>
+                    <a:pt x="3657913" y="854236"/>
+                  </a:lnTo>
+                  <a:lnTo>
+                    <a:pt x="3728257" y="856190"/>
+                  </a:lnTo>
+                  <a:lnTo>
+                    <a:pt x="3798602" y="858131"/>
+                  </a:lnTo>
+                  <a:lnTo>
+                    <a:pt x="3868946" y="860058"/>
+                  </a:lnTo>
+                  <a:lnTo>
+                    <a:pt x="3939291" y="861972"/>
+                  </a:lnTo>
+                  <a:lnTo>
+                    <a:pt x="4009635" y="863873"/>
+                  </a:lnTo>
+                  <a:lnTo>
+                    <a:pt x="4079980" y="865761"/>
+                  </a:lnTo>
+                  <a:lnTo>
+                    <a:pt x="4150324" y="867635"/>
+                  </a:lnTo>
+                  <a:lnTo>
+                    <a:pt x="4220669" y="869496"/>
+                  </a:lnTo>
+                  <a:lnTo>
+                    <a:pt x="4291013" y="871345"/>
+                  </a:lnTo>
+                  <a:lnTo>
+                    <a:pt x="4361358" y="873181"/>
+                  </a:lnTo>
+                  <a:lnTo>
+                    <a:pt x="4431702" y="875004"/>
+                  </a:lnTo>
+                  <a:lnTo>
+                    <a:pt x="4502047" y="876814"/>
+                  </a:lnTo>
+                  <a:lnTo>
+                    <a:pt x="4572391" y="878612"/>
+                  </a:lnTo>
+                  <a:lnTo>
+                    <a:pt x="4642736" y="880397"/>
+                  </a:lnTo>
+                  <a:lnTo>
+                    <a:pt x="4713080" y="882171"/>
+                  </a:lnTo>
+                  <a:lnTo>
+                    <a:pt x="4783425" y="883931"/>
+                  </a:lnTo>
+                  <a:lnTo>
+                    <a:pt x="4853769" y="885680"/>
+                  </a:lnTo>
+                  <a:lnTo>
+                    <a:pt x="4924114" y="887416"/>
+                  </a:lnTo>
+                  <a:lnTo>
+                    <a:pt x="4994458" y="889141"/>
+                  </a:lnTo>
+                  <a:lnTo>
+                    <a:pt x="5064803" y="890853"/>
+                  </a:lnTo>
+                  <a:lnTo>
+                    <a:pt x="5135147" y="892554"/>
+                  </a:lnTo>
+                  <a:lnTo>
+                    <a:pt x="5205492" y="894243"/>
+                  </a:lnTo>
+                  <a:lnTo>
+                    <a:pt x="5275836" y="895920"/>
+                  </a:lnTo>
+                  <a:lnTo>
+                    <a:pt x="5346181" y="897585"/>
+                  </a:lnTo>
+                  <a:lnTo>
+                    <a:pt x="5416525" y="899239"/>
+                  </a:lnTo>
+                  <a:lnTo>
+                    <a:pt x="5486870" y="900882"/>
+                  </a:lnTo>
+                  <a:lnTo>
+                    <a:pt x="5557214" y="902513"/>
+                  </a:lnTo>
+                  <a:lnTo>
+                    <a:pt x="5627559" y="904133"/>
+                  </a:lnTo>
+                  <a:lnTo>
+                    <a:pt x="5697903" y="905741"/>
+                  </a:lnTo>
+                  <a:lnTo>
+                    <a:pt x="5768248" y="907339"/>
+                  </a:lnTo>
+                  <a:lnTo>
+                    <a:pt x="5838592" y="908925"/>
+                  </a:lnTo>
+                  <a:lnTo>
+                    <a:pt x="5908937" y="910501"/>
+                  </a:lnTo>
+                  <a:lnTo>
+                    <a:pt x="5979281" y="912065"/>
+                  </a:lnTo>
+                  <a:lnTo>
+                    <a:pt x="6049626" y="913619"/>
+                  </a:lnTo>
+                  <a:lnTo>
+                    <a:pt x="6119970" y="915162"/>
+                  </a:lnTo>
+                  <a:lnTo>
+                    <a:pt x="6190315" y="916694"/>
+                  </a:lnTo>
+                  <a:lnTo>
+                    <a:pt x="6260659" y="918215"/>
+                  </a:lnTo>
+                  <a:lnTo>
+                    <a:pt x="6331004" y="919726"/>
+                  </a:lnTo>
+                  <a:lnTo>
+                    <a:pt x="6401348" y="921227"/>
+                  </a:lnTo>
+                  <a:lnTo>
+                    <a:pt x="6471693" y="922717"/>
+                  </a:lnTo>
+                  <a:lnTo>
+                    <a:pt x="6542037" y="924197"/>
+                  </a:lnTo>
+                  <a:lnTo>
+                    <a:pt x="6612382" y="925666"/>
+                  </a:lnTo>
+                  <a:lnTo>
+                    <a:pt x="6682726" y="927126"/>
+                  </a:lnTo>
+                  <a:lnTo>
+                    <a:pt x="6753071" y="928575"/>
+                  </a:lnTo>
+                  <a:lnTo>
+                    <a:pt x="6823415" y="930014"/>
+                  </a:lnTo>
+                  <a:lnTo>
+                    <a:pt x="6893760" y="931444"/>
+                  </a:lnTo>
+                  <a:lnTo>
+                    <a:pt x="6964104" y="932863"/>
+                  </a:lnTo>
+                </a:path>
+              </a:pathLst>
+            </a:custGeom>
+          </p:spPr>
+          <p:txBody>
+            <a:bodyPr/>
+            <a:lstStyle/>
+            <a:p/>
+          </p:txBody>
+        </p:sp>
+        <p:sp>
+          <p:nvSpPr>
+            <p:cNvPr id="73" name="pl73"/>
+            <p:cNvSpPr/>
+            <p:nvPr/>
+          </p:nvSpPr>
+          <p:spPr>
+            <a:xfrm>
+              <a:off x="1235312" y="5188759"/>
+              <a:ext cx="6964104" cy="350503"/>
+            </a:xfrm>
+            <a:custGeom>
+              <a:avLst/>
+              <a:pathLst>
+                <a:path w="6964104" h="350503">
+                  <a:moveTo>
+                    <a:pt x="6964104" y="350503"/>
+                  </a:moveTo>
+                  <a:lnTo>
+                    <a:pt x="6893760" y="348807"/>
+                  </a:lnTo>
+                  <a:lnTo>
+                    <a:pt x="6823415" y="347057"/>
+                  </a:lnTo>
+                  <a:lnTo>
+                    <a:pt x="6753071" y="345254"/>
+                  </a:lnTo>
+                  <a:lnTo>
+                    <a:pt x="6682726" y="343394"/>
+                  </a:lnTo>
+                  <a:lnTo>
+                    <a:pt x="6612382" y="341476"/>
+                  </a:lnTo>
+                  <a:lnTo>
+                    <a:pt x="6542037" y="339498"/>
+                  </a:lnTo>
+                  <a:lnTo>
+                    <a:pt x="6471693" y="337458"/>
+                  </a:lnTo>
+                  <a:lnTo>
+                    <a:pt x="6401348" y="335355"/>
+                  </a:lnTo>
+                  <a:lnTo>
+                    <a:pt x="6331004" y="333187"/>
+                  </a:lnTo>
+                  <a:lnTo>
+                    <a:pt x="6260659" y="330951"/>
+                  </a:lnTo>
+                  <a:lnTo>
+                    <a:pt x="6190315" y="328645"/>
+                  </a:lnTo>
+                  <a:lnTo>
+                    <a:pt x="6119970" y="326267"/>
+                  </a:lnTo>
+                  <a:lnTo>
+                    <a:pt x="6049626" y="323815"/>
+                  </a:lnTo>
+                  <a:lnTo>
+                    <a:pt x="5979281" y="321287"/>
+                  </a:lnTo>
+                  <a:lnTo>
+                    <a:pt x="5908937" y="318680"/>
+                  </a:lnTo>
+                  <a:lnTo>
+                    <a:pt x="5838592" y="315991"/>
+                  </a:lnTo>
+                  <a:lnTo>
+                    <a:pt x="5768248" y="313219"/>
+                  </a:lnTo>
+                  <a:lnTo>
+                    <a:pt x="5697903" y="310361"/>
+                  </a:lnTo>
+                  <a:lnTo>
+                    <a:pt x="5627559" y="307413"/>
+                  </a:lnTo>
+                  <a:lnTo>
+                    <a:pt x="5557214" y="304374"/>
+                  </a:lnTo>
+                  <a:lnTo>
+                    <a:pt x="5486870" y="301239"/>
+                  </a:lnTo>
+                  <a:lnTo>
+                    <a:pt x="5416525" y="298007"/>
+                  </a:lnTo>
+                  <a:lnTo>
+                    <a:pt x="5346181" y="294675"/>
+                  </a:lnTo>
+                  <a:lnTo>
+                    <a:pt x="5275836" y="291238"/>
+                  </a:lnTo>
+                  <a:lnTo>
+                    <a:pt x="5205492" y="287694"/>
+                  </a:lnTo>
+                  <a:lnTo>
+                    <a:pt x="5135147" y="284040"/>
+                  </a:lnTo>
+                  <a:lnTo>
+                    <a:pt x="5064803" y="280272"/>
+                  </a:lnTo>
+                  <a:lnTo>
+                    <a:pt x="4994458" y="276386"/>
+                  </a:lnTo>
+                  <a:lnTo>
+                    <a:pt x="4924114" y="272380"/>
+                  </a:lnTo>
+                  <a:lnTo>
+                    <a:pt x="4853769" y="268248"/>
+                  </a:lnTo>
+                  <a:lnTo>
+                    <a:pt x="4783425" y="263988"/>
+                  </a:lnTo>
+                  <a:lnTo>
+                    <a:pt x="4713080" y="259595"/>
+                  </a:lnTo>
+                  <a:lnTo>
+                    <a:pt x="4642736" y="255065"/>
+                  </a:lnTo>
+                  <a:lnTo>
+                    <a:pt x="4572391" y="250394"/>
+                  </a:lnTo>
+                  <a:lnTo>
+                    <a:pt x="4502047" y="245577"/>
+                  </a:lnTo>
+                  <a:lnTo>
+                    <a:pt x="4431702" y="240610"/>
+                  </a:lnTo>
+                  <a:lnTo>
+                    <a:pt x="4361358" y="235488"/>
+                  </a:lnTo>
+                  <a:lnTo>
+                    <a:pt x="4291013" y="230206"/>
+                  </a:lnTo>
+                  <a:lnTo>
+                    <a:pt x="4220669" y="224760"/>
+                  </a:lnTo>
+                  <a:lnTo>
+                    <a:pt x="4150324" y="219144"/>
+                  </a:lnTo>
+                  <a:lnTo>
+                    <a:pt x="4079980" y="213354"/>
+                  </a:lnTo>
+                  <a:lnTo>
+                    <a:pt x="4009635" y="207382"/>
+                  </a:lnTo>
+                  <a:lnTo>
+                    <a:pt x="3939291" y="201225"/>
+                  </a:lnTo>
+                  <a:lnTo>
+                    <a:pt x="3868946" y="194875"/>
+                  </a:lnTo>
+                  <a:lnTo>
+                    <a:pt x="3798602" y="188328"/>
+                  </a:lnTo>
+                  <a:lnTo>
+                    <a:pt x="3728257" y="181576"/>
+                  </a:lnTo>
+                  <a:lnTo>
+                    <a:pt x="3657913" y="174614"/>
+                  </a:lnTo>
+                  <a:lnTo>
+                    <a:pt x="3587569" y="167435"/>
+                  </a:lnTo>
+                  <a:lnTo>
+                    <a:pt x="3517224" y="160033"/>
+                  </a:lnTo>
+                  <a:lnTo>
+                    <a:pt x="3446880" y="152399"/>
+                  </a:lnTo>
+                  <a:lnTo>
+                    <a:pt x="3376535" y="144528"/>
+                  </a:lnTo>
+                  <a:lnTo>
+                    <a:pt x="3306191" y="136411"/>
+                  </a:lnTo>
+                  <a:lnTo>
+                    <a:pt x="3235846" y="128041"/>
+                  </a:lnTo>
+                  <a:lnTo>
+                    <a:pt x="3165502" y="119411"/>
+                  </a:lnTo>
+                  <a:lnTo>
+                    <a:pt x="3095157" y="110511"/>
+                  </a:lnTo>
+                  <a:lnTo>
+                    <a:pt x="3024813" y="104634"/>
+                  </a:lnTo>
+                  <a:lnTo>
+                    <a:pt x="2954468" y="102539"/>
+                  </a:lnTo>
+                  <a:lnTo>
+                    <a:pt x="2884124" y="100429"/>
+                  </a:lnTo>
+                  <a:lnTo>
+                    <a:pt x="2813779" y="98305"/>
+                  </a:lnTo>
+                  <a:lnTo>
+                    <a:pt x="2743435" y="96165"/>
+                  </a:lnTo>
+                  <a:lnTo>
+                    <a:pt x="2673090" y="94011"/>
+                  </a:lnTo>
+                  <a:lnTo>
+                    <a:pt x="2602746" y="91842"/>
+                  </a:lnTo>
+                  <a:lnTo>
+                    <a:pt x="2532401" y="89658"/>
+                  </a:lnTo>
+                  <a:lnTo>
+                    <a:pt x="2462057" y="87459"/>
+                  </a:lnTo>
+                  <a:lnTo>
+                    <a:pt x="2391712" y="85244"/>
+                  </a:lnTo>
+                  <a:lnTo>
+                    <a:pt x="2321368" y="83013"/>
+                  </a:lnTo>
+                  <a:lnTo>
+                    <a:pt x="2251023" y="80768"/>
+                  </a:lnTo>
+                  <a:lnTo>
+                    <a:pt x="2180679" y="78506"/>
+                  </a:lnTo>
+                  <a:lnTo>
+                    <a:pt x="2110334" y="76229"/>
+                  </a:lnTo>
+                  <a:lnTo>
+                    <a:pt x="2039990" y="73936"/>
+                  </a:lnTo>
+                  <a:lnTo>
+                    <a:pt x="1969645" y="71627"/>
+                  </a:lnTo>
+                  <a:lnTo>
+                    <a:pt x="1899301" y="69301"/>
+                  </a:lnTo>
+                  <a:lnTo>
+                    <a:pt x="1828956" y="66960"/>
+                  </a:lnTo>
+                  <a:lnTo>
+                    <a:pt x="1758612" y="64602"/>
+                  </a:lnTo>
+                  <a:lnTo>
+                    <a:pt x="1688267" y="62228"/>
+                  </a:lnTo>
+                  <a:lnTo>
+                    <a:pt x="1617923" y="59837"/>
+                  </a:lnTo>
+                  <a:lnTo>
+                    <a:pt x="1547578" y="57429"/>
+                  </a:lnTo>
+                  <a:lnTo>
+                    <a:pt x="1477234" y="55005"/>
+                  </a:lnTo>
+                  <a:lnTo>
+                    <a:pt x="1406889" y="52564"/>
+                  </a:lnTo>
+                  <a:lnTo>
+                    <a:pt x="1336545" y="50106"/>
+                  </a:lnTo>
+                  <a:lnTo>
+                    <a:pt x="1266200" y="47630"/>
+                  </a:lnTo>
+                  <a:lnTo>
+                    <a:pt x="1195856" y="45137"/>
+                  </a:lnTo>
+                  <a:lnTo>
+                    <a:pt x="1125511" y="42627"/>
+                  </a:lnTo>
+                  <a:lnTo>
+                    <a:pt x="1055167" y="40100"/>
+                  </a:lnTo>
+                  <a:lnTo>
+                    <a:pt x="984822" y="37555"/>
+                  </a:lnTo>
+                  <a:lnTo>
+                    <a:pt x="914478" y="34992"/>
+                  </a:lnTo>
+                  <a:lnTo>
+                    <a:pt x="844133" y="32411"/>
+                  </a:lnTo>
+                  <a:lnTo>
+                    <a:pt x="773789" y="29812"/>
+                  </a:lnTo>
+                  <a:lnTo>
+                    <a:pt x="703444" y="27195"/>
+                  </a:lnTo>
+                  <a:lnTo>
+                    <a:pt x="633100" y="24560"/>
+                  </a:lnTo>
+                  <a:lnTo>
+                    <a:pt x="562755" y="21906"/>
+                  </a:lnTo>
+                  <a:lnTo>
+                    <a:pt x="492411" y="19234"/>
+                  </a:lnTo>
+                  <a:lnTo>
+                    <a:pt x="422066" y="16543"/>
+                  </a:lnTo>
+                  <a:lnTo>
+                    <a:pt x="351722" y="13834"/>
+                  </a:lnTo>
+                  <a:lnTo>
+                    <a:pt x="281377" y="11105"/>
+                  </a:lnTo>
+                  <a:lnTo>
+                    <a:pt x="211033" y="8358"/>
+                  </a:lnTo>
+                  <a:lnTo>
+                    <a:pt x="140688" y="5591"/>
+                  </a:lnTo>
+                  <a:lnTo>
+                    <a:pt x="70344" y="2805"/>
+                  </a:lnTo>
+                  <a:lnTo>
+                    <a:pt x="0" y="0"/>
+                  </a:lnTo>
+                </a:path>
+              </a:pathLst>
+            </a:custGeom>
+          </p:spPr>
+          <p:txBody>
+            <a:bodyPr/>
+            <a:lstStyle/>
+            <a:p/>
+          </p:txBody>
+        </p:sp>
+        <p:sp>
+          <p:nvSpPr>
+            <p:cNvPr id="74" name="pl74"/>
+            <p:cNvSpPr/>
+            <p:nvPr/>
+          </p:nvSpPr>
+          <p:spPr>
+            <a:xfrm>
+              <a:off x="1235312" y="4915361"/>
+              <a:ext cx="6964104" cy="573098"/>
+            </a:xfrm>
+            <a:custGeom>
+              <a:avLst/>
+              <a:pathLst>
+                <a:path w="6964104" h="573098">
+                  <a:moveTo>
+                    <a:pt x="0" y="0"/>
+                  </a:moveTo>
+                  <a:lnTo>
+                    <a:pt x="70344" y="12648"/>
+                  </a:lnTo>
+                  <a:lnTo>
+                    <a:pt x="140688" y="25062"/>
+                  </a:lnTo>
+                  <a:lnTo>
+                    <a:pt x="211033" y="37243"/>
+                  </a:lnTo>
+                  <a:lnTo>
+                    <a:pt x="281377" y="49198"/>
+                  </a:lnTo>
+                  <a:lnTo>
+                    <a:pt x="351722" y="60929"/>
+                  </a:lnTo>
+                  <a:lnTo>
+                    <a:pt x="422066" y="72442"/>
+                  </a:lnTo>
+                  <a:lnTo>
+                    <a:pt x="492411" y="83740"/>
+                  </a:lnTo>
+                  <a:lnTo>
+                    <a:pt x="562755" y="94827"/>
+                  </a:lnTo>
+                  <a:lnTo>
+                    <a:pt x="633100" y="105708"/>
+                  </a:lnTo>
+                  <a:lnTo>
+                    <a:pt x="703444" y="116386"/>
+                  </a:lnTo>
+                  <a:lnTo>
+                    <a:pt x="773789" y="126864"/>
+                  </a:lnTo>
+                  <a:lnTo>
+                    <a:pt x="844133" y="137148"/>
+                  </a:lnTo>
+                  <a:lnTo>
+                    <a:pt x="914478" y="147239"/>
+                  </a:lnTo>
+                  <a:lnTo>
+                    <a:pt x="984822" y="157142"/>
+                  </a:lnTo>
+                  <a:lnTo>
+                    <a:pt x="1055167" y="166861"/>
+                  </a:lnTo>
+                  <a:lnTo>
+                    <a:pt x="1125511" y="176398"/>
+                  </a:lnTo>
+                  <a:lnTo>
+                    <a:pt x="1195856" y="185758"/>
+                  </a:lnTo>
+                  <a:lnTo>
+                    <a:pt x="1266200" y="194943"/>
+                  </a:lnTo>
+                  <a:lnTo>
+                    <a:pt x="1336545" y="203957"/>
+                  </a:lnTo>
+                  <a:lnTo>
+                    <a:pt x="1406889" y="212803"/>
+                  </a:lnTo>
+                  <a:lnTo>
+                    <a:pt x="1477234" y="221483"/>
+                  </a:lnTo>
+                  <a:lnTo>
+                    <a:pt x="1547578" y="230002"/>
+                  </a:lnTo>
+                  <a:lnTo>
+                    <a:pt x="1617923" y="238362"/>
+                  </a:lnTo>
+                  <a:lnTo>
+                    <a:pt x="1688267" y="246566"/>
+                  </a:lnTo>
+                  <a:lnTo>
+                    <a:pt x="1758612" y="254617"/>
+                  </a:lnTo>
+                  <a:lnTo>
+                    <a:pt x="1828956" y="262518"/>
+                  </a:lnTo>
+                  <a:lnTo>
+                    <a:pt x="1899301" y="270272"/>
+                  </a:lnTo>
+                  <a:lnTo>
+                    <a:pt x="1969645" y="277881"/>
+                  </a:lnTo>
+                  <a:lnTo>
+                    <a:pt x="2039990" y="285348"/>
+                  </a:lnTo>
+                  <a:lnTo>
+                    <a:pt x="2110334" y="292676"/>
+                  </a:lnTo>
+                  <a:lnTo>
+                    <a:pt x="2180679" y="299868"/>
+                  </a:lnTo>
+                  <a:lnTo>
+                    <a:pt x="2251023" y="306925"/>
+                  </a:lnTo>
+                  <a:lnTo>
+                    <a:pt x="2321368" y="313850"/>
+                  </a:lnTo>
+                  <a:lnTo>
+                    <a:pt x="2391712" y="320647"/>
+                  </a:lnTo>
+                  <a:lnTo>
+                    <a:pt x="2462057" y="327317"/>
+                  </a:lnTo>
+                  <a:lnTo>
+                    <a:pt x="2532401" y="333862"/>
+                  </a:lnTo>
+                  <a:lnTo>
+                    <a:pt x="2602746" y="340285"/>
+                  </a:lnTo>
+                  <a:lnTo>
+                    <a:pt x="2673090" y="346589"/>
+                  </a:lnTo>
+                  <a:lnTo>
+                    <a:pt x="2743435" y="352775"/>
+                  </a:lnTo>
+                  <a:lnTo>
+                    <a:pt x="2813779" y="358845"/>
+                  </a:lnTo>
+                  <a:lnTo>
+                    <a:pt x="2884124" y="364803"/>
+                  </a:lnTo>
+                  <a:lnTo>
+                    <a:pt x="2954468" y="370649"/>
+                  </a:lnTo>
+                  <a:lnTo>
+                    <a:pt x="3024813" y="376386"/>
+                  </a:lnTo>
+                  <a:lnTo>
+                    <a:pt x="3095157" y="382017"/>
+                  </a:lnTo>
+                  <a:lnTo>
+                    <a:pt x="3165502" y="387542"/>
+                  </a:lnTo>
+                  <a:lnTo>
+                    <a:pt x="3235846" y="392964"/>
+                  </a:lnTo>
+                  <a:lnTo>
+                    <a:pt x="3306191" y="398286"/>
+                  </a:lnTo>
+                  <a:lnTo>
+                    <a:pt x="3376535" y="403508"/>
+                  </a:lnTo>
+                  <a:lnTo>
+                    <a:pt x="3446880" y="408632"/>
+                  </a:lnTo>
+                  <a:lnTo>
+                    <a:pt x="3517224" y="413661"/>
+                  </a:lnTo>
+                  <a:lnTo>
+                    <a:pt x="3587569" y="418597"/>
+                  </a:lnTo>
+                  <a:lnTo>
+                    <a:pt x="3657913" y="423440"/>
+                  </a:lnTo>
+                  <a:lnTo>
+                    <a:pt x="3728257" y="428193"/>
+                  </a:lnTo>
+                  <a:lnTo>
+                    <a:pt x="3798602" y="432857"/>
+                  </a:lnTo>
+                  <a:lnTo>
+                    <a:pt x="3868946" y="437434"/>
+                  </a:lnTo>
+                  <a:lnTo>
+                    <a:pt x="3939291" y="441926"/>
+                  </a:lnTo>
+                  <a:lnTo>
+                    <a:pt x="4009635" y="446334"/>
+                  </a:lnTo>
+                  <a:lnTo>
+                    <a:pt x="4079980" y="450660"/>
+                  </a:lnTo>
+                  <a:lnTo>
+                    <a:pt x="4150324" y="454906"/>
+                  </a:lnTo>
+                  <a:lnTo>
+                    <a:pt x="4220669" y="459072"/>
+                  </a:lnTo>
+                  <a:lnTo>
+                    <a:pt x="4291013" y="463160"/>
+                  </a:lnTo>
+                  <a:lnTo>
+                    <a:pt x="4361358" y="467173"/>
+                  </a:lnTo>
+                  <a:lnTo>
+                    <a:pt x="4431702" y="471110"/>
+                  </a:lnTo>
+                  <a:lnTo>
+                    <a:pt x="4502047" y="474974"/>
+                  </a:lnTo>
+                  <a:lnTo>
+                    <a:pt x="4572391" y="478766"/>
+                  </a:lnTo>
+                  <a:lnTo>
+                    <a:pt x="4642736" y="482487"/>
+                  </a:lnTo>
+                  <a:lnTo>
+                    <a:pt x="4713080" y="486139"/>
+                  </a:lnTo>
+                  <a:lnTo>
+                    <a:pt x="4783425" y="489723"/>
+                  </a:lnTo>
+                  <a:lnTo>
+                    <a:pt x="4853769" y="493240"/>
+                  </a:lnTo>
+                  <a:lnTo>
+                    <a:pt x="4924114" y="496691"/>
+                  </a:lnTo>
+                  <a:lnTo>
+                    <a:pt x="4994458" y="500078"/>
+                  </a:lnTo>
+                  <a:lnTo>
+                    <a:pt x="5064803" y="503402"/>
+                  </a:lnTo>
+                  <a:lnTo>
+                    <a:pt x="5135147" y="506664"/>
+                  </a:lnTo>
+                  <a:lnTo>
+                    <a:pt x="5205492" y="509865"/>
+                  </a:lnTo>
+                  <a:lnTo>
+                    <a:pt x="5275836" y="513006"/>
+                  </a:lnTo>
+                  <a:lnTo>
+                    <a:pt x="5346181" y="516089"/>
+                  </a:lnTo>
+                  <a:lnTo>
+                    <a:pt x="5416525" y="519114"/>
+                  </a:lnTo>
+                  <a:lnTo>
+                    <a:pt x="5486870" y="522083"/>
+                  </a:lnTo>
+                  <a:lnTo>
+                    <a:pt x="5557214" y="524996"/>
+                  </a:lnTo>
+                  <a:lnTo>
+                    <a:pt x="5627559" y="527856"/>
+                  </a:lnTo>
+                  <a:lnTo>
+                    <a:pt x="5697903" y="530661"/>
+                  </a:lnTo>
+                  <a:lnTo>
+                    <a:pt x="5768248" y="533415"/>
+                  </a:lnTo>
+                  <a:lnTo>
+                    <a:pt x="5838592" y="536117"/>
+                  </a:lnTo>
+                  <a:lnTo>
+                    <a:pt x="5908937" y="538769"/>
+                  </a:lnTo>
+                  <a:lnTo>
+                    <a:pt x="5979281" y="541371"/>
+                  </a:lnTo>
+                  <a:lnTo>
+                    <a:pt x="6049626" y="543925"/>
+                  </a:lnTo>
+                  <a:lnTo>
+                    <a:pt x="6119970" y="546431"/>
+                  </a:lnTo>
+                  <a:lnTo>
+                    <a:pt x="6190315" y="548891"/>
+                  </a:lnTo>
+                  <a:lnTo>
+                    <a:pt x="6260659" y="551304"/>
+                  </a:lnTo>
+                  <a:lnTo>
+                    <a:pt x="6331004" y="553673"/>
+                  </a:lnTo>
+                  <a:lnTo>
+                    <a:pt x="6401348" y="555997"/>
+                  </a:lnTo>
+                  <a:lnTo>
+                    <a:pt x="6471693" y="558278"/>
+                  </a:lnTo>
+                  <a:lnTo>
+                    <a:pt x="6542037" y="560517"/>
+                  </a:lnTo>
+                  <a:lnTo>
+                    <a:pt x="6612382" y="562714"/>
+                  </a:lnTo>
+                  <a:lnTo>
+                    <a:pt x="6682726" y="564870"/>
+                  </a:lnTo>
+                  <a:lnTo>
+                    <a:pt x="6753071" y="566985"/>
+                  </a:lnTo>
+                  <a:lnTo>
+                    <a:pt x="6823415" y="569061"/>
+                  </a:lnTo>
+                  <a:lnTo>
+                    <a:pt x="6893760" y="571099"/>
+                  </a:lnTo>
+                  <a:lnTo>
+                    <a:pt x="6964104" y="573098"/>
+                  </a:lnTo>
+                </a:path>
+              </a:pathLst>
+            </a:custGeom>
+            <a:ln w="27101" cap="flat">
+              <a:solidFill>
+                <a:srgbClr val="FF8C00">
+                  <a:alpha val="100000"/>
+                </a:srgbClr>
+              </a:solidFill>
+              <a:prstDash val="solid"/>
+              <a:round/>
+            </a:ln>
+          </p:spPr>
+          <p:txBody>
+            <a:bodyPr/>
+            <a:lstStyle/>
+            <a:p/>
+          </p:txBody>
+        </p:sp>
+        <p:sp>
+          <p:nvSpPr>
+            <p:cNvPr id="75" name="pl75"/>
+            <p:cNvSpPr/>
+            <p:nvPr/>
+          </p:nvSpPr>
+          <p:spPr>
+            <a:xfrm>
+              <a:off x="887106" y="5294352"/>
+              <a:ext cx="7660515" cy="0"/>
+            </a:xfrm>
+            <a:custGeom>
+              <a:avLst/>
+              <a:pathLst>
+                <a:path w="7660515" h="0">
+                  <a:moveTo>
+                    <a:pt x="0" y="0"/>
+                  </a:moveTo>
+                  <a:lnTo>
+                    <a:pt x="7660515" y="0"/>
+                  </a:lnTo>
+                  <a:lnTo>
+                    <a:pt x="7660515" y="0"/>
+                  </a:lnTo>
+                </a:path>
+              </a:pathLst>
+            </a:custGeom>
+            <a:ln w="13550" cap="flat">
+              <a:solidFill>
+                <a:srgbClr val="7F7F7F">
+                  <a:alpha val="100000"/>
+                </a:srgbClr>
+              </a:solidFill>
+              <a:prstDash val="dash"/>
+              <a:round/>
+            </a:ln>
+          </p:spPr>
+          <p:txBody>
+            <a:bodyPr/>
+            <a:lstStyle/>
+            <a:p/>
+          </p:txBody>
+        </p:sp>
+        <p:sp>
+          <p:nvSpPr>
+            <p:cNvPr id="76" name="pl76"/>
+            <p:cNvSpPr/>
+            <p:nvPr/>
+          </p:nvSpPr>
+          <p:spPr>
+            <a:xfrm>
+              <a:off x="4292500" y="4336484"/>
+              <a:ext cx="0" cy="1317069"/>
+            </a:xfrm>
+            <a:custGeom>
+              <a:avLst/>
+              <a:pathLst>
+                <a:path w="0" h="1317069">
+                  <a:moveTo>
+                    <a:pt x="0" y="1317069"/>
+                  </a:moveTo>
+                  <a:lnTo>
+                    <a:pt x="0" y="0"/>
+                  </a:lnTo>
+                  <a:lnTo>
+                    <a:pt x="0" y="0"/>
+                  </a:lnTo>
+                </a:path>
+              </a:pathLst>
+            </a:custGeom>
+            <a:ln w="13550" cap="flat">
+              <a:solidFill>
+                <a:srgbClr val="666666">
+                  <a:alpha val="100000"/>
+                </a:srgbClr>
+              </a:solidFill>
+              <a:prstDash val="dot"/>
+              <a:round/>
+            </a:ln>
+          </p:spPr>
+          <p:txBody>
+            <a:bodyPr/>
+            <a:lstStyle/>
+            <a:p/>
+          </p:txBody>
+        </p:sp>
+        <p:sp>
+          <p:nvSpPr>
+            <p:cNvPr id="77" name="pl77"/>
+            <p:cNvSpPr/>
+            <p:nvPr/>
+          </p:nvSpPr>
+          <p:spPr>
+            <a:xfrm>
+              <a:off x="3124839" y="4336484"/>
+              <a:ext cx="0" cy="1317069"/>
+            </a:xfrm>
+            <a:custGeom>
+              <a:avLst/>
+              <a:pathLst>
+                <a:path w="0" h="1317069">
+                  <a:moveTo>
+                    <a:pt x="0" y="1317069"/>
+                  </a:moveTo>
+                  <a:lnTo>
+                    <a:pt x="0" y="0"/>
+                  </a:lnTo>
+                  <a:lnTo>
+                    <a:pt x="0" y="0"/>
+                  </a:lnTo>
+                </a:path>
+              </a:pathLst>
+            </a:custGeom>
+            <a:ln w="13550" cap="flat">
+              <a:solidFill>
+                <a:srgbClr val="4682B4">
+                  <a:alpha val="69803"/>
+                </a:srgbClr>
+              </a:solidFill>
+              <a:prstDash val="dash"/>
+              <a:round/>
+            </a:ln>
+          </p:spPr>
+          <p:txBody>
+            <a:bodyPr/>
+            <a:lstStyle/>
+            <a:p/>
+          </p:txBody>
+        </p:sp>
+        <p:sp>
+          <p:nvSpPr>
+            <p:cNvPr id="78" name="pl78"/>
+            <p:cNvSpPr/>
+            <p:nvPr/>
+          </p:nvSpPr>
+          <p:spPr>
+            <a:xfrm>
+              <a:off x="5508592" y="4336484"/>
+              <a:ext cx="0" cy="1317069"/>
+            </a:xfrm>
+            <a:custGeom>
+              <a:avLst/>
+              <a:pathLst>
+                <a:path w="0" h="1317069">
+                  <a:moveTo>
+                    <a:pt x="0" y="1317069"/>
+                  </a:moveTo>
+                  <a:lnTo>
+                    <a:pt x="0" y="0"/>
+                  </a:lnTo>
+                  <a:lnTo>
+                    <a:pt x="0" y="0"/>
+                  </a:lnTo>
+                </a:path>
+              </a:pathLst>
+            </a:custGeom>
+            <a:ln w="13550" cap="flat">
+              <a:solidFill>
+                <a:srgbClr val="4682B4">
+                  <a:alpha val="69803"/>
+                </a:srgbClr>
+              </a:solidFill>
+              <a:prstDash val="dash"/>
+              <a:round/>
+            </a:ln>
+          </p:spPr>
+          <p:txBody>
+            <a:bodyPr/>
+            <a:lstStyle/>
+            <a:p/>
+          </p:txBody>
+        </p:sp>
+        <p:sp>
+          <p:nvSpPr>
+            <p:cNvPr id="79" name="tx79"/>
+            <p:cNvSpPr/>
+            <p:nvPr/>
+          </p:nvSpPr>
+          <p:spPr>
+            <a:xfrm>
+              <a:off x="762297" y="5553636"/>
+              <a:ext cx="62179" cy="80101"/>
+            </a:xfrm>
+            <a:prstGeom prst="rect">
+              <a:avLst/>
+            </a:prstGeom>
+            <a:noFill/>
+          </p:spPr>
+          <p:txBody>
+            <a:bodyPr lIns="0" rIns="0" tIns="0" bIns="0" anchorCtr="1" anchor="ctr" wrap="none"/>
+            <a:lstStyle/>
+            <a:p>
+              <a:pPr algn="l" marL="0" marR="0" indent="0">
+                <a:lnSpc>
+                  <a:spcPts val="880"/>
+                </a:lnSpc>
+                <a:spcBef>
+                  <a:spcPts val="0"/>
+                </a:spcBef>
+                <a:spcAft>
+                  <a:spcPts val="0"/>
+                </a:spcAft>
+              </a:pPr>
+              <a:r>
+                <a:rPr sz="880">
+                  <a:solidFill>
+                    <a:srgbClr val="4D4D4D">
+                      <a:alpha val="100000"/>
+                    </a:srgbClr>
+                  </a:solidFill>
+                  <a:latin typeface="Helvetica"/>
+                  <a:cs typeface="Helvetica"/>
+                </a:rPr>
+                <a:t>0</a:t>
+              </a:r>
+            </a:p>
+          </p:txBody>
+        </p:sp>
+        <p:sp>
+          <p:nvSpPr>
+            <p:cNvPr id="80" name="tx80"/>
+            <p:cNvSpPr/>
+            <p:nvPr/>
+          </p:nvSpPr>
+          <p:spPr>
+            <a:xfrm>
+              <a:off x="762297" y="5254302"/>
+              <a:ext cx="62179" cy="80101"/>
+            </a:xfrm>
+            <a:prstGeom prst="rect">
+              <a:avLst/>
+            </a:prstGeom>
+            <a:noFill/>
+          </p:spPr>
+          <p:txBody>
+            <a:bodyPr lIns="0" rIns="0" tIns="0" bIns="0" anchorCtr="1" anchor="ctr" wrap="none"/>
+            <a:lstStyle/>
+            <a:p>
+              <a:pPr algn="l" marL="0" marR="0" indent="0">
+                <a:lnSpc>
+                  <a:spcPts val="880"/>
+                </a:lnSpc>
+                <a:spcBef>
+                  <a:spcPts val="0"/>
+                </a:spcBef>
+                <a:spcAft>
+                  <a:spcPts val="0"/>
+                </a:spcAft>
+              </a:pPr>
+              <a:r>
+                <a:rPr sz="880">
+                  <a:solidFill>
+                    <a:srgbClr val="4D4D4D">
+                      <a:alpha val="100000"/>
+                    </a:srgbClr>
+                  </a:solidFill>
+                  <a:latin typeface="Helvetica"/>
+                  <a:cs typeface="Helvetica"/>
+                </a:rPr>
+                <a:t>1</a:t>
+              </a:r>
+            </a:p>
+          </p:txBody>
+        </p:sp>
+        <p:sp>
+          <p:nvSpPr>
+            <p:cNvPr id="81" name="tx81"/>
+            <p:cNvSpPr/>
+            <p:nvPr/>
+          </p:nvSpPr>
+          <p:spPr>
+            <a:xfrm>
+              <a:off x="762297" y="4954968"/>
+              <a:ext cx="62179" cy="80101"/>
+            </a:xfrm>
+            <a:prstGeom prst="rect">
+              <a:avLst/>
+            </a:prstGeom>
+            <a:noFill/>
+          </p:spPr>
+          <p:txBody>
+            <a:bodyPr lIns="0" rIns="0" tIns="0" bIns="0" anchorCtr="1" anchor="ctr" wrap="none"/>
+            <a:lstStyle/>
+            <a:p>
+              <a:pPr algn="l" marL="0" marR="0" indent="0">
+                <a:lnSpc>
+                  <a:spcPts val="880"/>
+                </a:lnSpc>
+                <a:spcBef>
+                  <a:spcPts val="0"/>
+                </a:spcBef>
+                <a:spcAft>
+                  <a:spcPts val="0"/>
+                </a:spcAft>
+              </a:pPr>
+              <a:r>
+                <a:rPr sz="880">
+                  <a:solidFill>
+                    <a:srgbClr val="4D4D4D">
+                      <a:alpha val="100000"/>
+                    </a:srgbClr>
+                  </a:solidFill>
+                  <a:latin typeface="Helvetica"/>
+                  <a:cs typeface="Helvetica"/>
+                </a:rPr>
+                <a:t>2</a:t>
+              </a:r>
+            </a:p>
+          </p:txBody>
+        </p:sp>
+        <p:sp>
+          <p:nvSpPr>
+            <p:cNvPr id="82" name="tx82"/>
+            <p:cNvSpPr/>
+            <p:nvPr/>
+          </p:nvSpPr>
+          <p:spPr>
+            <a:xfrm>
+              <a:off x="762297" y="4655634"/>
+              <a:ext cx="62179" cy="80101"/>
+            </a:xfrm>
+            <a:prstGeom prst="rect">
+              <a:avLst/>
+            </a:prstGeom>
+            <a:noFill/>
+          </p:spPr>
+          <p:txBody>
+            <a:bodyPr lIns="0" rIns="0" tIns="0" bIns="0" anchorCtr="1" anchor="ctr" wrap="none"/>
+            <a:lstStyle/>
+            <a:p>
+              <a:pPr algn="l" marL="0" marR="0" indent="0">
+                <a:lnSpc>
+                  <a:spcPts val="880"/>
+                </a:lnSpc>
+                <a:spcBef>
+                  <a:spcPts val="0"/>
+                </a:spcBef>
+                <a:spcAft>
+                  <a:spcPts val="0"/>
+                </a:spcAft>
+              </a:pPr>
+              <a:r>
+                <a:rPr sz="880">
+                  <a:solidFill>
+                    <a:srgbClr val="4D4D4D">
+                      <a:alpha val="100000"/>
+                    </a:srgbClr>
+                  </a:solidFill>
+                  <a:latin typeface="Helvetica"/>
+                  <a:cs typeface="Helvetica"/>
+                </a:rPr>
+                <a:t>3</a:t>
+              </a:r>
+            </a:p>
+          </p:txBody>
+        </p:sp>
+        <p:sp>
+          <p:nvSpPr>
+            <p:cNvPr id="83" name="tx83"/>
+            <p:cNvSpPr/>
+            <p:nvPr/>
+          </p:nvSpPr>
+          <p:spPr>
+            <a:xfrm>
+              <a:off x="762297" y="4356300"/>
+              <a:ext cx="62179" cy="80101"/>
+            </a:xfrm>
+            <a:prstGeom prst="rect">
+              <a:avLst/>
+            </a:prstGeom>
+            <a:noFill/>
+          </p:spPr>
+          <p:txBody>
+            <a:bodyPr lIns="0" rIns="0" tIns="0" bIns="0" anchorCtr="1" anchor="ctr" wrap="none"/>
+            <a:lstStyle/>
+            <a:p>
+              <a:pPr algn="l" marL="0" marR="0" indent="0">
+                <a:lnSpc>
+                  <a:spcPts val="880"/>
+                </a:lnSpc>
+                <a:spcBef>
+                  <a:spcPts val="0"/>
+                </a:spcBef>
+                <a:spcAft>
+                  <a:spcPts val="0"/>
+                </a:spcAft>
+              </a:pPr>
+              <a:r>
+                <a:rPr sz="880">
+                  <a:solidFill>
+                    <a:srgbClr val="4D4D4D">
+                      <a:alpha val="100000"/>
+                    </a:srgbClr>
+                  </a:solidFill>
+                  <a:latin typeface="Helvetica"/>
+                  <a:cs typeface="Helvetica"/>
+                </a:rPr>
+                <a:t>4</a:t>
+              </a:r>
+            </a:p>
+          </p:txBody>
+        </p:sp>
+        <p:sp>
+          <p:nvSpPr>
+            <p:cNvPr id="84" name="tx84"/>
+            <p:cNvSpPr/>
+            <p:nvPr/>
+          </p:nvSpPr>
+          <p:spPr>
+            <a:xfrm>
+              <a:off x="1346003" y="5716183"/>
+              <a:ext cx="161574" cy="80101"/>
+            </a:xfrm>
+            <a:prstGeom prst="rect">
+              <a:avLst/>
+            </a:prstGeom>
+            <a:noFill/>
+          </p:spPr>
+          <p:txBody>
+            <a:bodyPr lIns="0" rIns="0" tIns="0" bIns="0" anchorCtr="1" anchor="ctr" wrap="none"/>
+            <a:lstStyle/>
+            <a:p>
+              <a:pPr algn="l" marL="0" marR="0" indent="0">
+                <a:lnSpc>
+                  <a:spcPts val="880"/>
+                </a:lnSpc>
+                <a:spcBef>
+                  <a:spcPts val="0"/>
+                </a:spcBef>
+                <a:spcAft>
+                  <a:spcPts val="0"/>
+                </a:spcAft>
+              </a:pPr>
+              <a:r>
+                <a:rPr sz="880">
+                  <a:solidFill>
+                    <a:srgbClr val="4D4D4D">
+                      <a:alpha val="100000"/>
+                    </a:srgbClr>
+                  </a:solidFill>
+                  <a:latin typeface="Helvetica"/>
+                  <a:cs typeface="Helvetica"/>
+                </a:rPr>
+                <a:t>-50</a:t>
+              </a:r>
+            </a:p>
+          </p:txBody>
+        </p:sp>
+        <p:sp>
+          <p:nvSpPr>
+            <p:cNvPr id="85" name="tx85"/>
+            <p:cNvSpPr/>
+            <p:nvPr/>
+          </p:nvSpPr>
+          <p:spPr>
+            <a:xfrm>
+              <a:off x="2196512" y="5716183"/>
+              <a:ext cx="161574" cy="80101"/>
+            </a:xfrm>
+            <a:prstGeom prst="rect">
+              <a:avLst/>
+            </a:prstGeom>
+            <a:noFill/>
+          </p:spPr>
+          <p:txBody>
+            <a:bodyPr lIns="0" rIns="0" tIns="0" bIns="0" anchorCtr="1" anchor="ctr" wrap="none"/>
+            <a:lstStyle/>
+            <a:p>
+              <a:pPr algn="l" marL="0" marR="0" indent="0">
+                <a:lnSpc>
+                  <a:spcPts val="880"/>
+                </a:lnSpc>
+                <a:spcBef>
+                  <a:spcPts val="0"/>
+                </a:spcBef>
+                <a:spcAft>
+                  <a:spcPts val="0"/>
+                </a:spcAft>
+              </a:pPr>
+              <a:r>
+                <a:rPr sz="880">
+                  <a:solidFill>
+                    <a:srgbClr val="4D4D4D">
+                      <a:alpha val="100000"/>
+                    </a:srgbClr>
+                  </a:solidFill>
+                  <a:latin typeface="Helvetica"/>
+                  <a:cs typeface="Helvetica"/>
+                </a:rPr>
+                <a:t>-40</a:t>
+              </a:r>
+            </a:p>
+          </p:txBody>
+        </p:sp>
+        <p:sp>
+          <p:nvSpPr>
+            <p:cNvPr id="86" name="tx86"/>
+            <p:cNvSpPr/>
+            <p:nvPr/>
+          </p:nvSpPr>
+          <p:spPr>
+            <a:xfrm>
+              <a:off x="3047022" y="5716183"/>
+              <a:ext cx="161574" cy="80101"/>
+            </a:xfrm>
+            <a:prstGeom prst="rect">
+              <a:avLst/>
+            </a:prstGeom>
+            <a:noFill/>
+          </p:spPr>
+          <p:txBody>
+            <a:bodyPr lIns="0" rIns="0" tIns="0" bIns="0" anchorCtr="1" anchor="ctr" wrap="none"/>
+            <a:lstStyle/>
+            <a:p>
+              <a:pPr algn="l" marL="0" marR="0" indent="0">
+                <a:lnSpc>
+                  <a:spcPts val="880"/>
+                </a:lnSpc>
+                <a:spcBef>
+                  <a:spcPts val="0"/>
+                </a:spcBef>
+                <a:spcAft>
+                  <a:spcPts val="0"/>
+                </a:spcAft>
+              </a:pPr>
+              <a:r>
+                <a:rPr sz="880">
+                  <a:solidFill>
+                    <a:srgbClr val="4D4D4D">
+                      <a:alpha val="100000"/>
+                    </a:srgbClr>
+                  </a:solidFill>
+                  <a:latin typeface="Helvetica"/>
+                  <a:cs typeface="Helvetica"/>
+                </a:rPr>
+                <a:t>-30</a:t>
+              </a:r>
+            </a:p>
+          </p:txBody>
+        </p:sp>
+        <p:sp>
+          <p:nvSpPr>
+            <p:cNvPr id="87" name="tx87"/>
+            <p:cNvSpPr/>
+            <p:nvPr/>
+          </p:nvSpPr>
+          <p:spPr>
+            <a:xfrm>
+              <a:off x="3897531" y="5716183"/>
+              <a:ext cx="161574" cy="80101"/>
+            </a:xfrm>
+            <a:prstGeom prst="rect">
+              <a:avLst/>
+            </a:prstGeom>
+            <a:noFill/>
+          </p:spPr>
+          <p:txBody>
+            <a:bodyPr lIns="0" rIns="0" tIns="0" bIns="0" anchorCtr="1" anchor="ctr" wrap="none"/>
+            <a:lstStyle/>
+            <a:p>
+              <a:pPr algn="l" marL="0" marR="0" indent="0">
+                <a:lnSpc>
+                  <a:spcPts val="880"/>
+                </a:lnSpc>
+                <a:spcBef>
+                  <a:spcPts val="0"/>
+                </a:spcBef>
+                <a:spcAft>
+                  <a:spcPts val="0"/>
+                </a:spcAft>
+              </a:pPr>
+              <a:r>
+                <a:rPr sz="880">
+                  <a:solidFill>
+                    <a:srgbClr val="4D4D4D">
+                      <a:alpha val="100000"/>
+                    </a:srgbClr>
+                  </a:solidFill>
+                  <a:latin typeface="Helvetica"/>
+                  <a:cs typeface="Helvetica"/>
+                </a:rPr>
+                <a:t>-20</a:t>
+              </a:r>
+            </a:p>
+          </p:txBody>
+        </p:sp>
+        <p:sp>
+          <p:nvSpPr>
+            <p:cNvPr id="88" name="tx88"/>
+            <p:cNvSpPr/>
+            <p:nvPr/>
+          </p:nvSpPr>
+          <p:spPr>
+            <a:xfrm>
+              <a:off x="4748041" y="5716183"/>
+              <a:ext cx="161574" cy="80101"/>
+            </a:xfrm>
+            <a:prstGeom prst="rect">
+              <a:avLst/>
+            </a:prstGeom>
+            <a:noFill/>
+          </p:spPr>
+          <p:txBody>
+            <a:bodyPr lIns="0" rIns="0" tIns="0" bIns="0" anchorCtr="1" anchor="ctr" wrap="none"/>
+            <a:lstStyle/>
+            <a:p>
+              <a:pPr algn="l" marL="0" marR="0" indent="0">
+                <a:lnSpc>
+                  <a:spcPts val="880"/>
+                </a:lnSpc>
+                <a:spcBef>
+                  <a:spcPts val="0"/>
+                </a:spcBef>
+                <a:spcAft>
+                  <a:spcPts val="0"/>
+                </a:spcAft>
+              </a:pPr>
+              <a:r>
+                <a:rPr sz="880">
+                  <a:solidFill>
+                    <a:srgbClr val="4D4D4D">
+                      <a:alpha val="100000"/>
+                    </a:srgbClr>
+                  </a:solidFill>
+                  <a:latin typeface="Helvetica"/>
+                  <a:cs typeface="Helvetica"/>
+                </a:rPr>
+                <a:t>-10</a:t>
+              </a:r>
+            </a:p>
+          </p:txBody>
+        </p:sp>
+        <p:sp>
+          <p:nvSpPr>
+            <p:cNvPr id="89" name="tx89"/>
+            <p:cNvSpPr/>
+            <p:nvPr/>
+          </p:nvSpPr>
+          <p:spPr>
+            <a:xfrm>
+              <a:off x="5648248" y="5716183"/>
+              <a:ext cx="62179" cy="80101"/>
+            </a:xfrm>
+            <a:prstGeom prst="rect">
+              <a:avLst/>
+            </a:prstGeom>
+            <a:noFill/>
+          </p:spPr>
+          <p:txBody>
+            <a:bodyPr lIns="0" rIns="0" tIns="0" bIns="0" anchorCtr="1" anchor="ctr" wrap="none"/>
+            <a:lstStyle/>
+            <a:p>
+              <a:pPr algn="l" marL="0" marR="0" indent="0">
+                <a:lnSpc>
+                  <a:spcPts val="880"/>
+                </a:lnSpc>
+                <a:spcBef>
+                  <a:spcPts val="0"/>
+                </a:spcBef>
+                <a:spcAft>
+                  <a:spcPts val="0"/>
+                </a:spcAft>
+              </a:pPr>
+              <a:r>
+                <a:rPr sz="880">
+                  <a:solidFill>
+                    <a:srgbClr val="4D4D4D">
+                      <a:alpha val="100000"/>
+                    </a:srgbClr>
+                  </a:solidFill>
+                  <a:latin typeface="Helvetica"/>
+                  <a:cs typeface="Helvetica"/>
+                </a:rPr>
+                <a:t>0</a:t>
+              </a:r>
+            </a:p>
+          </p:txBody>
+        </p:sp>
+        <p:sp>
+          <p:nvSpPr>
+            <p:cNvPr id="90" name="tx90"/>
+            <p:cNvSpPr/>
+            <p:nvPr/>
+          </p:nvSpPr>
+          <p:spPr>
+            <a:xfrm>
+              <a:off x="6467667" y="5716183"/>
+              <a:ext cx="124358" cy="80101"/>
+            </a:xfrm>
+            <a:prstGeom prst="rect">
+              <a:avLst/>
+            </a:prstGeom>
+            <a:noFill/>
+          </p:spPr>
+          <p:txBody>
+            <a:bodyPr lIns="0" rIns="0" tIns="0" bIns="0" anchorCtr="1" anchor="ctr" wrap="none"/>
+            <a:lstStyle/>
+            <a:p>
+              <a:pPr algn="l" marL="0" marR="0" indent="0">
+                <a:lnSpc>
+                  <a:spcPts val="880"/>
+                </a:lnSpc>
+                <a:spcBef>
+                  <a:spcPts val="0"/>
+                </a:spcBef>
+                <a:spcAft>
+                  <a:spcPts val="0"/>
+                </a:spcAft>
+              </a:pPr>
+              <a:r>
+                <a:rPr sz="880">
+                  <a:solidFill>
+                    <a:srgbClr val="4D4D4D">
+                      <a:alpha val="100000"/>
+                    </a:srgbClr>
+                  </a:solidFill>
+                  <a:latin typeface="Helvetica"/>
+                  <a:cs typeface="Helvetica"/>
+                </a:rPr>
+                <a:t>10</a:t>
+              </a:r>
+            </a:p>
+          </p:txBody>
+        </p:sp>
+        <p:sp>
+          <p:nvSpPr>
+            <p:cNvPr id="91" name="tx91"/>
+            <p:cNvSpPr/>
+            <p:nvPr/>
+          </p:nvSpPr>
+          <p:spPr>
+            <a:xfrm>
+              <a:off x="7318177" y="5716183"/>
+              <a:ext cx="124358" cy="80101"/>
+            </a:xfrm>
+            <a:prstGeom prst="rect">
+              <a:avLst/>
+            </a:prstGeom>
+            <a:noFill/>
+          </p:spPr>
+          <p:txBody>
+            <a:bodyPr lIns="0" rIns="0" tIns="0" bIns="0" anchorCtr="1" anchor="ctr" wrap="none"/>
+            <a:lstStyle/>
+            <a:p>
+              <a:pPr algn="l" marL="0" marR="0" indent="0">
+                <a:lnSpc>
+                  <a:spcPts val="880"/>
+                </a:lnSpc>
+                <a:spcBef>
+                  <a:spcPts val="0"/>
+                </a:spcBef>
+                <a:spcAft>
+                  <a:spcPts val="0"/>
+                </a:spcAft>
+              </a:pPr>
+              <a:r>
+                <a:rPr sz="880">
+                  <a:solidFill>
+                    <a:srgbClr val="4D4D4D">
+                      <a:alpha val="100000"/>
+                    </a:srgbClr>
+                  </a:solidFill>
+                  <a:latin typeface="Helvetica"/>
+                  <a:cs typeface="Helvetica"/>
+                </a:rPr>
+                <a:t>20</a:t>
+              </a:r>
+            </a:p>
+          </p:txBody>
+        </p:sp>
+        <p:sp>
+          <p:nvSpPr>
+            <p:cNvPr id="92" name="tx92"/>
+            <p:cNvSpPr/>
+            <p:nvPr/>
+          </p:nvSpPr>
+          <p:spPr>
+            <a:xfrm>
+              <a:off x="8168686" y="5716183"/>
+              <a:ext cx="124358" cy="80101"/>
+            </a:xfrm>
+            <a:prstGeom prst="rect">
+              <a:avLst/>
+            </a:prstGeom>
+            <a:noFill/>
+          </p:spPr>
+          <p:txBody>
+            <a:bodyPr lIns="0" rIns="0" tIns="0" bIns="0" anchorCtr="1" anchor="ctr" wrap="none"/>
+            <a:lstStyle/>
+            <a:p>
+              <a:pPr algn="l" marL="0" marR="0" indent="0">
+                <a:lnSpc>
+                  <a:spcPts val="880"/>
+                </a:lnSpc>
+                <a:spcBef>
+                  <a:spcPts val="0"/>
+                </a:spcBef>
+                <a:spcAft>
+                  <a:spcPts val="0"/>
+                </a:spcAft>
+              </a:pPr>
+              <a:r>
+                <a:rPr sz="880">
+                  <a:solidFill>
+                    <a:srgbClr val="4D4D4D">
+                      <a:alpha val="100000"/>
+                    </a:srgbClr>
+                  </a:solidFill>
+                  <a:latin typeface="Helvetica"/>
+                  <a:cs typeface="Helvetica"/>
+                </a:rPr>
+                <a:t>30</a:t>
+              </a:r>
+            </a:p>
+          </p:txBody>
+        </p:sp>
+        <p:sp>
+          <p:nvSpPr>
+            <p:cNvPr id="93" name="tx93"/>
+            <p:cNvSpPr/>
+            <p:nvPr/>
+          </p:nvSpPr>
+          <p:spPr>
+            <a:xfrm>
+              <a:off x="1561815" y="5855859"/>
+              <a:ext cx="6311097" cy="100218"/>
+            </a:xfrm>
+            <a:prstGeom prst="rect">
+              <a:avLst/>
+            </a:prstGeom>
+            <a:noFill/>
+          </p:spPr>
+          <p:txBody>
+            <a:bodyPr lIns="0" rIns="0" tIns="0" bIns="0" anchorCtr="1" anchor="ctr" wrap="none"/>
+            <a:lstStyle/>
+            <a:p>
+              <a:pPr algn="l" marL="0" marR="0" indent="0">
+                <a:lnSpc>
+                  <a:spcPts val="1100"/>
+                </a:lnSpc>
+                <a:spcBef>
+                  <a:spcPts val="0"/>
+                </a:spcBef>
+                <a:spcAft>
+                  <a:spcPts val="0"/>
+                </a:spcAft>
+              </a:pPr>
+              <a:r>
+                <a:rPr sz="1100">
+                  <a:solidFill>
+                    <a:srgbClr val="000000">
+                      <a:alpha val="100000"/>
+                    </a:srgbClr>
+                  </a:solidFill>
+                  <a:latin typeface="Helvetica"/>
+                  <a:cs typeface="Helvetica"/>
+                </a:rPr>
+                <a:t>Sensitivity eGFR Difference (%): 100 × (CKD-EPI 2012 CysC − CKD-EPI 2021 Cr) / CKD-EPI 2021 Cr</a:t>
+              </a:r>
+            </a:p>
+          </p:txBody>
+        </p:sp>
+        <p:sp>
+          <p:nvSpPr>
+            <p:cNvPr id="94" name="tx94"/>
+            <p:cNvSpPr/>
+            <p:nvPr/>
+          </p:nvSpPr>
+          <p:spPr>
+            <a:xfrm rot="-5400000">
+              <a:off x="138035" y="4944909"/>
+              <a:ext cx="1016904" cy="100218"/>
+            </a:xfrm>
+            <a:prstGeom prst="rect">
+              <a:avLst/>
+            </a:prstGeom>
+            <a:noFill/>
+          </p:spPr>
+          <p:txBody>
+            <a:bodyPr lIns="0" rIns="0" tIns="0" bIns="0" anchorCtr="1" anchor="ctr" wrap="none"/>
+            <a:lstStyle/>
+            <a:p>
+              <a:pPr algn="l" marL="0" marR="0" indent="0">
+                <a:lnSpc>
+                  <a:spcPts val="1100"/>
+                </a:lnSpc>
+                <a:spcBef>
+                  <a:spcPts val="0"/>
+                </a:spcBef>
+                <a:spcAft>
+                  <a:spcPts val="0"/>
+                </a:spcAft>
+              </a:pPr>
+              <a:r>
+                <a:rPr sz="1100">
+                  <a:solidFill>
+                    <a:srgbClr val="000000">
+                      <a:alpha val="100000"/>
+                    </a:srgbClr>
+                  </a:solidFill>
+                  <a:latin typeface="Helvetica"/>
+                  <a:cs typeface="Helvetica"/>
+                </a:rPr>
+                <a:t>subHR (95% CI)</a:t>
+              </a:r>
+            </a:p>
+          </p:txBody>
+        </p:sp>
+        <p:sp>
+          <p:nvSpPr>
+            <p:cNvPr id="95" name="tx95"/>
+            <p:cNvSpPr/>
+            <p:nvPr/>
+          </p:nvSpPr>
+          <p:spPr>
+            <a:xfrm>
+              <a:off x="887106" y="4159544"/>
+              <a:ext cx="6959864" cy="82021"/>
+            </a:xfrm>
+            <a:prstGeom prst="rect">
+              <a:avLst/>
+            </a:prstGeom>
+            <a:noFill/>
+          </p:spPr>
+          <p:txBody>
+            <a:bodyPr lIns="0" rIns="0" tIns="0" bIns="0" anchorCtr="1" anchor="ctr" wrap="none"/>
+            <a:lstStyle/>
+            <a:p>
+              <a:pPr algn="l" marL="0" marR="0" indent="0">
+                <a:lnSpc>
+                  <a:spcPts val="900"/>
+                </a:lnSpc>
+                <a:spcBef>
+                  <a:spcPts val="0"/>
+                </a:spcBef>
+                <a:spcAft>
+                  <a:spcPts val="0"/>
+                </a:spcAft>
+              </a:pPr>
+              <a:r>
+                <a:rPr sz="900">
+                  <a:solidFill>
+                    <a:srgbClr val="404040">
+                      <a:alpha val="100000"/>
+                    </a:srgbClr>
+                  </a:solidFill>
+                  <a:latin typeface="Helvetica"/>
+                  <a:cs typeface="Helvetica"/>
+                </a:rPr>
+                <a:t>subHR per 10 % decline: 1.26 (1.09-1.45), p_Bonf = 0.011 (n = 6)  |  per IQR decline (Δ = 28.0 %): 1.89 (1.27-2.83)  |  IQR: [-30.0, -2.0] %</a:t>
+              </a:r>
+            </a:p>
+          </p:txBody>
+        </p:sp>
+        <p:sp>
+          <p:nvSpPr>
+            <p:cNvPr id="96" name="tx96"/>
+            <p:cNvSpPr/>
+            <p:nvPr/>
+          </p:nvSpPr>
+          <p:spPr>
+            <a:xfrm>
+              <a:off x="887106" y="3932770"/>
               <a:ext cx="4283141" cy="120152"/>
             </a:xfrm>
             <a:prstGeom prst="rect">
